--- a/decks/slo/slo.pptx
+++ b/decks/slo/slo.pptx
@@ -1315,7 +1315,7 @@
       </p:grpSpPr>
       <p:pic>
         <p:nvPicPr>
-          <p:cNvPr id="2" name="Image 0" descr="/tmp/slide-1787840530289-3irmulp4kb3.png">    </p:cNvPr>
+          <p:cNvPr id="2" name="Image 0" descr="/tmp/slide-1787841959577-q951wvar8ka.png">    </p:cNvPr>
           <p:cNvPicPr>
             <a:picLocks noChangeAspect="1"/>
           </p:cNvPicPr>
@@ -1364,7 +1364,7 @@
       </p:grpSpPr>
       <p:pic>
         <p:nvPicPr>
-          <p:cNvPr id="2" name="Image 0" descr="/tmp/slide-1787840530584-ktecd3ois8r.png">    </p:cNvPr>
+          <p:cNvPr id="2" name="Image 0" descr="/tmp/slide-1787841959851-ig0yzhjk84.png">    </p:cNvPr>
           <p:cNvPicPr>
             <a:picLocks noChangeAspect="1"/>
           </p:cNvPicPr>
@@ -1413,7 +1413,7 @@
       </p:grpSpPr>
       <p:pic>
         <p:nvPicPr>
-          <p:cNvPr id="2" name="Image 0" descr="/tmp/slide-1787840530863-05mbbo280ul7.png">    </p:cNvPr>
+          <p:cNvPr id="2" name="Image 0" descr="/tmp/slide-1787841960117-ui7xvjqyz2.png">    </p:cNvPr>
           <p:cNvPicPr>
             <a:picLocks noChangeAspect="1"/>
           </p:cNvPicPr>
@@ -1462,7 +1462,7 @@
       </p:grpSpPr>
       <p:pic>
         <p:nvPicPr>
-          <p:cNvPr id="2" name="Image 0" descr="/tmp/slide-1787840531130-gg0zcy0xme.png">    </p:cNvPr>
+          <p:cNvPr id="2" name="Image 0" descr="/tmp/slide-1787841960381-zbmwig55bwl.png">    </p:cNvPr>
           <p:cNvPicPr>
             <a:picLocks noChangeAspect="1"/>
           </p:cNvPicPr>
@@ -1511,7 +1511,7 @@
       </p:grpSpPr>
       <p:pic>
         <p:nvPicPr>
-          <p:cNvPr id="2" name="Image 0" descr="/tmp/slide-1787840531436-ee2vph67l0j.png">    </p:cNvPr>
+          <p:cNvPr id="2" name="Image 0" descr="/tmp/slide-1787841960643-bgipa4btbge.png">    </p:cNvPr>
           <p:cNvPicPr>
             <a:picLocks noChangeAspect="1"/>
           </p:cNvPicPr>
@@ -1560,7 +1560,7 @@
       </p:grpSpPr>
       <p:pic>
         <p:nvPicPr>
-          <p:cNvPr id="2" name="Image 0" descr="/tmp/slide-1787840531708-j47p3jg1nq.png">    </p:cNvPr>
+          <p:cNvPr id="2" name="Image 0" descr="/tmp/slide-1787841960907-kqi1trqh9mf.png">    </p:cNvPr>
           <p:cNvPicPr>
             <a:picLocks noChangeAspect="1"/>
           </p:cNvPicPr>

--- a/decks/slo/slo.pptx
+++ b/decks/slo/slo.pptx
@@ -1299,6 +1299,13 @@
 <file path=ppt/slides/slide1.xml><?xml version="1.0" encoding="utf-8"?>
 <p:sld xmlns:a="http://schemas.openxmlformats.org/drawingml/2006/main" xmlns:r="http://schemas.openxmlformats.org/officeDocument/2006/relationships" xmlns:p="http://schemas.openxmlformats.org/presentationml/2006/main">
   <p:cSld name="Slide 1">
+    <p:bg>
+      <p:bgPr>
+        <a:solidFill>
+          <a:srgbClr val="FFFFFF"/>
+        </a:solidFill>
+      </p:bgPr>
+    </p:bg>
     <p:spTree>
       <p:nvGrpSpPr>
         <p:cNvPr id="1" name=""/>
@@ -1313,30 +1320,997 @@
           <a:chExt cx="0" cy="0"/>
         </a:xfrm>
       </p:grpSpPr>
-      <p:pic>
-        <p:nvPicPr>
-          <p:cNvPr id="2" name="Image 0" descr="/tmp/slide-1787841959577-q951wvar8ka.png">    </p:cNvPr>
-          <p:cNvPicPr>
-            <a:picLocks noChangeAspect="1"/>
-          </p:cNvPicPr>
-          <p:nvPr/>
-        </p:nvPicPr>
-        <p:blipFill>
-          <a:blip r:embed="rId1"/>
-          <a:stretch>
-            <a:fillRect/>
-          </a:stretch>
-        </p:blipFill>
-        <p:spPr>
-          <a:xfrm>
-            <a:off x="0" y="0"/>
-            <a:ext cx="12188952" cy="6858000"/>
-          </a:xfrm>
-          <a:prstGeom prst="rect">
-            <a:avLst/>
-          </a:prstGeom>
-        </p:spPr>
-      </p:pic>
+      <p:sp>
+        <p:nvSpPr>
+          <p:cNvPr id="2" name="Text 0"/>
+          <p:cNvSpPr/>
+          <p:nvPr/>
+        </p:nvSpPr>
+        <p:spPr>
+          <a:xfrm>
+            <a:off x="677098" y="406400"/>
+            <a:ext cx="5090459" cy="260747"/>
+          </a:xfrm>
+          <a:prstGeom prst="rect">
+            <a:avLst/>
+          </a:prstGeom>
+          <a:noFill/>
+          <a:ln/>
+        </p:spPr>
+        <p:txBody>
+          <a:bodyPr wrap="square" lIns="0" tIns="0" rIns="0" bIns="0" rtlCol="0" anchor="t"/>
+          <a:lstStyle/>
+          <a:p>
+            <a:pPr algn="l" indent="0" marL="0">
+              <a:lnSpc>
+                <a:spcPts val="2053"/>
+              </a:lnSpc>
+              <a:buNone/>
+            </a:pPr>
+            <a:r>
+              <a:rPr lang="en-US" sz="1466" dirty="0">
+                <a:solidFill>
+                  <a:srgbClr val="666666"/>
+                </a:solidFill>
+                <a:latin typeface="GeistMono" pitchFamily="34" charset="0"/>
+                <a:ea typeface="GeistMono" pitchFamily="34" charset="-122"/>
+                <a:cs typeface="GeistMono" pitchFamily="34" charset="-120"/>
+              </a:rPr>
+              <a:t>SERVICE LEVEL OBJECTIVES · OPERATING NOTE</a:t>
+            </a:r>
+            <a:endParaRPr lang="en-US" sz="1466" dirty="0"/>
+          </a:p>
+        </p:txBody>
+      </p:sp>
+      <p:sp>
+        <p:nvSpPr>
+          <p:cNvPr id="3" name="Text 1"/>
+          <p:cNvSpPr/>
+          <p:nvPr/>
+        </p:nvSpPr>
+        <p:spPr>
+          <a:xfrm>
+            <a:off x="9929314" y="406400"/>
+            <a:ext cx="1614191" cy="260747"/>
+          </a:xfrm>
+          <a:prstGeom prst="rect">
+            <a:avLst/>
+          </a:prstGeom>
+          <a:noFill/>
+          <a:ln/>
+        </p:spPr>
+        <p:txBody>
+          <a:bodyPr wrap="square" lIns="0" tIns="0" rIns="0" bIns="0" rtlCol="0" anchor="t"/>
+          <a:lstStyle/>
+          <a:p>
+            <a:pPr algn="l" indent="0" marL="0">
+              <a:lnSpc>
+                <a:spcPts val="2053"/>
+              </a:lnSpc>
+              <a:buNone/>
+            </a:pPr>
+            <a:r>
+              <a:rPr lang="en-US" sz="1466" dirty="0">
+                <a:solidFill>
+                  <a:srgbClr val="666666"/>
+                </a:solidFill>
+                <a:latin typeface="GeistMono" pitchFamily="34" charset="0"/>
+                <a:ea typeface="GeistMono" pitchFamily="34" charset="-122"/>
+                <a:cs typeface="GeistMono" pitchFamily="34" charset="-120"/>
+              </a:rPr>
+              <a:t>SHEET 01 / 06</a:t>
+            </a:r>
+            <a:endParaRPr lang="en-US" sz="1466" dirty="0"/>
+          </a:p>
+        </p:txBody>
+      </p:sp>
+      <p:sp>
+        <p:nvSpPr>
+          <p:cNvPr id="4" name="Text 2"/>
+          <p:cNvSpPr/>
+          <p:nvPr/>
+        </p:nvSpPr>
+        <p:spPr>
+          <a:xfrm>
+            <a:off x="677098" y="768747"/>
+            <a:ext cx="11051451" cy="506214"/>
+          </a:xfrm>
+          <a:prstGeom prst="rect">
+            <a:avLst/>
+          </a:prstGeom>
+          <a:noFill/>
+          <a:ln/>
+        </p:spPr>
+        <p:txBody>
+          <a:bodyPr wrap="square" lIns="0" tIns="0" rIns="0" bIns="0" rtlCol="0" anchor="t"/>
+          <a:lstStyle/>
+          <a:p>
+            <a:pPr algn="l" indent="0" marL="0">
+              <a:lnSpc>
+                <a:spcPts val="3986"/>
+              </a:lnSpc>
+              <a:buNone/>
+            </a:pPr>
+            <a:r>
+              <a:rPr lang="en-US" sz="3066" b="1" dirty="0">
+                <a:solidFill>
+                  <a:srgbClr val="000000"/>
+                </a:solidFill>
+                <a:latin typeface="Geist" pitchFamily="34" charset="0"/>
+                <a:ea typeface="Geist" pitchFamily="34" charset="-122"/>
+                <a:cs typeface="Geist" pitchFamily="34" charset="-120"/>
+              </a:rPr>
+              <a:t>Service level objectives</a:t>
+            </a:r>
+            <a:endParaRPr lang="en-US" sz="3066" dirty="0"/>
+          </a:p>
+        </p:txBody>
+      </p:sp>
+      <p:sp>
+        <p:nvSpPr>
+          <p:cNvPr id="5" name="Text 3"/>
+          <p:cNvSpPr/>
+          <p:nvPr/>
+        </p:nvSpPr>
+        <p:spPr>
+          <a:xfrm>
+            <a:off x="677098" y="1444228"/>
+            <a:ext cx="10834756" cy="12700"/>
+          </a:xfrm>
+          <a:prstGeom prst="rect">
+            <a:avLst/>
+          </a:prstGeom>
+          <a:solidFill>
+            <a:srgbClr val="000000"/>
+          </a:solidFill>
+          <a:ln/>
+        </p:spPr>
+        <p:txBody>
+          <a:bodyPr wrap="square" rtlCol="0" anchor="ctr"/>
+          <a:lstStyle/>
+          <a:p>
+            <a:pPr indent="0" marL="0">
+              <a:buNone/>
+            </a:pPr>
+            <a:endParaRPr lang="en-US" dirty="0"/>
+          </a:p>
+        </p:txBody>
+      </p:sp>
+      <p:sp>
+        <p:nvSpPr>
+          <p:cNvPr id="6" name="Text 4"/>
+          <p:cNvSpPr/>
+          <p:nvPr/>
+        </p:nvSpPr>
+        <p:spPr>
+          <a:xfrm>
+            <a:off x="677098" y="1727795"/>
+            <a:ext cx="6907208" cy="2194322"/>
+          </a:xfrm>
+          <a:prstGeom prst="rect">
+            <a:avLst/>
+          </a:prstGeom>
+          <a:noFill/>
+          <a:ln/>
+        </p:spPr>
+        <p:txBody>
+          <a:bodyPr wrap="square" lIns="0" tIns="0" rIns="0" bIns="0" rtlCol="0" anchor="t"/>
+          <a:lstStyle/>
+          <a:p>
+            <a:pPr algn="l" indent="0" marL="0">
+              <a:lnSpc>
+                <a:spcPts val="5759"/>
+              </a:lnSpc>
+              <a:buNone/>
+            </a:pPr>
+            <a:r>
+              <a:rPr lang="en-US" sz="4799" dirty="0">
+                <a:solidFill>
+                  <a:srgbClr val="000000"/>
+                </a:solidFill>
+                <a:latin typeface="Geist" pitchFamily="34" charset="0"/>
+                <a:ea typeface="Geist" pitchFamily="34" charset="-122"/>
+                <a:cs typeface="Geist" pitchFamily="34" charset="-120"/>
+              </a:rPr>
+              <a:t>What you promise,</a:t>
+            </a:r>
+            <a:endParaRPr lang="en-US" sz="4799" dirty="0"/>
+          </a:p>
+          <a:p>
+            <a:pPr algn="l" indent="0" marL="0">
+              <a:lnSpc>
+                <a:spcPts val="5759"/>
+              </a:lnSpc>
+              <a:buNone/>
+            </a:pPr>
+            <a:r>
+              <a:rPr lang="en-US" sz="4799" dirty="0">
+                <a:solidFill>
+                  <a:srgbClr val="000000"/>
+                </a:solidFill>
+                <a:latin typeface="Geist" pitchFamily="34" charset="0"/>
+                <a:ea typeface="Geist" pitchFamily="34" charset="-122"/>
+                <a:cs typeface="Geist" pitchFamily="34" charset="-120"/>
+              </a:rPr>
+              <a:t>and what you refuse</a:t>
+            </a:r>
+            <a:endParaRPr lang="en-US" sz="4799" dirty="0"/>
+          </a:p>
+          <a:p>
+            <a:pPr algn="l" indent="0" marL="0">
+              <a:lnSpc>
+                <a:spcPts val="5759"/>
+              </a:lnSpc>
+              <a:buNone/>
+            </a:pPr>
+            <a:r>
+              <a:rPr lang="en-US" sz="4799" dirty="0">
+                <a:solidFill>
+                  <a:srgbClr val="000000"/>
+                </a:solidFill>
+                <a:latin typeface="Geist" pitchFamily="34" charset="0"/>
+                <a:ea typeface="Geist" pitchFamily="34" charset="-122"/>
+                <a:cs typeface="Geist" pitchFamily="34" charset="-120"/>
+              </a:rPr>
+              <a:t>to promise.</a:t>
+            </a:r>
+            <a:endParaRPr lang="en-US" sz="4799" dirty="0"/>
+          </a:p>
+        </p:txBody>
+      </p:sp>
+      <p:sp>
+        <p:nvSpPr>
+          <p:cNvPr id="7" name="Text 5"/>
+          <p:cNvSpPr/>
+          <p:nvPr/>
+        </p:nvSpPr>
+        <p:spPr>
+          <a:xfrm>
+            <a:off x="677098" y="4226917"/>
+            <a:ext cx="6907208" cy="1104900"/>
+          </a:xfrm>
+          <a:prstGeom prst="rect">
+            <a:avLst/>
+          </a:prstGeom>
+          <a:noFill/>
+          <a:ln/>
+        </p:spPr>
+        <p:txBody>
+          <a:bodyPr wrap="square" lIns="0" tIns="0" rIns="0" bIns="0" rtlCol="0" anchor="t"/>
+          <a:lstStyle/>
+          <a:p>
+            <a:pPr algn="l" indent="0" marL="0">
+              <a:lnSpc>
+                <a:spcPts val="2900"/>
+              </a:lnSpc>
+              <a:spcBef>
+                <a:spcPts val="2400"/>
+              </a:spcBef>
+              <a:buNone/>
+            </a:pPr>
+            <a:r>
+              <a:rPr lang="en-US" sz="2000" dirty="0">
+                <a:solidFill>
+                  <a:srgbClr val="000000"/>
+                </a:solidFill>
+                <a:latin typeface="Geist" pitchFamily="34" charset="0"/>
+                <a:ea typeface="Geist" pitchFamily="34" charset="-122"/>
+                <a:cs typeface="Geist" pitchFamily="34" charset="-120"/>
+              </a:rPr>
+              <a:t>An SLO is not a quality metric. It is a switch that stops feature work. The error budget is the mechanism that makes the promise real.</a:t>
+            </a:r>
+            <a:endParaRPr lang="en-US" sz="2000" dirty="0"/>
+          </a:p>
+        </p:txBody>
+      </p:sp>
+      <p:sp>
+        <p:nvSpPr>
+          <p:cNvPr id="8" name="Shape 6"/>
+          <p:cNvSpPr/>
+          <p:nvPr/>
+        </p:nvSpPr>
+        <p:spPr>
+          <a:xfrm>
+            <a:off x="677098" y="5473502"/>
+            <a:ext cx="6771772" cy="0"/>
+          </a:xfrm>
+          <a:prstGeom prst="line">
+            <a:avLst/>
+          </a:prstGeom>
+          <a:noFill/>
+          <a:ln w="12698">
+            <a:solidFill>
+              <a:srgbClr val="000000"/>
+            </a:solidFill>
+            <a:prstDash val="solid"/>
+          </a:ln>
+        </p:spPr>
+      </p:sp>
+      <p:sp>
+        <p:nvSpPr>
+          <p:cNvPr id="9" name="Text 7"/>
+          <p:cNvSpPr/>
+          <p:nvPr/>
+        </p:nvSpPr>
+        <p:spPr>
+          <a:xfrm>
+            <a:off x="677098" y="5649119"/>
+            <a:ext cx="1986525" cy="260747"/>
+          </a:xfrm>
+          <a:prstGeom prst="rect">
+            <a:avLst/>
+          </a:prstGeom>
+          <a:noFill/>
+          <a:ln/>
+        </p:spPr>
+        <p:txBody>
+          <a:bodyPr wrap="square" lIns="0" tIns="0" rIns="0" bIns="0" rtlCol="0" anchor="t"/>
+          <a:lstStyle/>
+          <a:p>
+            <a:pPr algn="l" indent="0" marL="0">
+              <a:lnSpc>
+                <a:spcPts val="2053"/>
+              </a:lnSpc>
+              <a:buNone/>
+            </a:pPr>
+            <a:r>
+              <a:rPr lang="en-US" sz="1466" dirty="0">
+                <a:solidFill>
+                  <a:srgbClr val="666666"/>
+                </a:solidFill>
+                <a:latin typeface="GeistMono" pitchFamily="34" charset="0"/>
+                <a:ea typeface="GeistMono" pitchFamily="34" charset="-122"/>
+                <a:cs typeface="GeistMono" pitchFamily="34" charset="-120"/>
+              </a:rPr>
+              <a:t>Presenter · Team</a:t>
+            </a:r>
+            <a:endParaRPr lang="en-US" sz="1466" dirty="0"/>
+          </a:p>
+        </p:txBody>
+      </p:sp>
+      <p:sp>
+        <p:nvSpPr>
+          <p:cNvPr id="10" name="Text 8"/>
+          <p:cNvSpPr/>
+          <p:nvPr/>
+        </p:nvSpPr>
+        <p:spPr>
+          <a:xfrm>
+            <a:off x="5622908" y="5649119"/>
+            <a:ext cx="1862481" cy="260747"/>
+          </a:xfrm>
+          <a:prstGeom prst="rect">
+            <a:avLst/>
+          </a:prstGeom>
+          <a:noFill/>
+          <a:ln/>
+        </p:spPr>
+        <p:txBody>
+          <a:bodyPr wrap="square" lIns="0" tIns="0" rIns="0" bIns="0" rtlCol="0" anchor="t"/>
+          <a:lstStyle/>
+          <a:p>
+            <a:pPr algn="l" indent="0" marL="0">
+              <a:lnSpc>
+                <a:spcPts val="2053"/>
+              </a:lnSpc>
+              <a:buNone/>
+            </a:pPr>
+            <a:r>
+              <a:rPr lang="en-US" sz="1466" dirty="0">
+                <a:solidFill>
+                  <a:srgbClr val="666666"/>
+                </a:solidFill>
+                <a:latin typeface="GeistMono" pitchFamily="34" charset="0"/>
+                <a:ea typeface="GeistMono" pitchFamily="34" charset="-122"/>
+                <a:cs typeface="GeistMono" pitchFamily="34" charset="-120"/>
+              </a:rPr>
+              <a:t>Internal review</a:t>
+            </a:r>
+            <a:endParaRPr lang="en-US" sz="1466" dirty="0"/>
+          </a:p>
+        </p:txBody>
+      </p:sp>
+      <p:sp>
+        <p:nvSpPr>
+          <p:cNvPr id="11" name="Shape 9"/>
+          <p:cNvSpPr/>
+          <p:nvPr/>
+        </p:nvSpPr>
+        <p:spPr>
+          <a:xfrm>
+            <a:off x="7861517" y="1727795"/>
+            <a:ext cx="0" cy="4182070"/>
+          </a:xfrm>
+          <a:prstGeom prst="line">
+            <a:avLst/>
+          </a:prstGeom>
+          <a:noFill/>
+          <a:ln w="12698">
+            <a:solidFill>
+              <a:srgbClr val="000000"/>
+            </a:solidFill>
+            <a:prstDash val="solid"/>
+          </a:ln>
+        </p:spPr>
+      </p:sp>
+      <p:sp>
+        <p:nvSpPr>
+          <p:cNvPr id="12" name="Text 10"/>
+          <p:cNvSpPr/>
+          <p:nvPr/>
+        </p:nvSpPr>
+        <p:spPr>
+          <a:xfrm>
+            <a:off x="8206315" y="1727795"/>
+            <a:ext cx="3371650" cy="260747"/>
+          </a:xfrm>
+          <a:prstGeom prst="rect">
+            <a:avLst/>
+          </a:prstGeom>
+          <a:noFill/>
+          <a:ln/>
+        </p:spPr>
+        <p:txBody>
+          <a:bodyPr wrap="square" lIns="0" tIns="0" rIns="0" bIns="0" rtlCol="0" anchor="t"/>
+          <a:lstStyle/>
+          <a:p>
+            <a:pPr algn="l" indent="0" marL="0">
+              <a:lnSpc>
+                <a:spcPts val="2053"/>
+              </a:lnSpc>
+              <a:buNone/>
+            </a:pPr>
+            <a:r>
+              <a:rPr lang="en-US" sz="1466" dirty="0">
+                <a:solidFill>
+                  <a:srgbClr val="666666"/>
+                </a:solidFill>
+                <a:latin typeface="GeistMono" pitchFamily="34" charset="0"/>
+                <a:ea typeface="GeistMono" pitchFamily="34" charset="-122"/>
+                <a:cs typeface="GeistMono" pitchFamily="34" charset="-120"/>
+              </a:rPr>
+              <a:t>IN THIS DECK</a:t>
+            </a:r>
+            <a:endParaRPr lang="en-US" sz="1466" dirty="0"/>
+          </a:p>
+        </p:txBody>
+      </p:sp>
+      <p:sp>
+        <p:nvSpPr>
+          <p:cNvPr id="13" name="Text 11"/>
+          <p:cNvSpPr/>
+          <p:nvPr/>
+        </p:nvSpPr>
+        <p:spPr>
+          <a:xfrm>
+            <a:off x="8206315" y="2191742"/>
+            <a:ext cx="3305539" cy="3718123"/>
+          </a:xfrm>
+          <a:prstGeom prst="rect">
+            <a:avLst/>
+          </a:prstGeom>
+          <a:noFill/>
+          <a:ln/>
+        </p:spPr>
+        <p:txBody>
+          <a:bodyPr wrap="square" lIns="0" tIns="0" rIns="0" bIns="0" rtlCol="0" anchor="t"/>
+          <a:lstStyle/>
+          <a:p>
+            <a:pPr algn="l" marL="342900" indent="-342900">
+              <a:lnSpc>
+                <a:spcPts val="2053"/>
+              </a:lnSpc>
+              <a:buSzPct val="100000"/>
+              <a:buChar char="•"/>
+            </a:pPr>
+            <a:r>
+              <a:rPr lang="en-US" sz="1466" dirty="0">
+                <a:solidFill>
+                  <a:srgbClr val="000000"/>
+                </a:solidFill>
+                <a:latin typeface="GeistMono" pitchFamily="34" charset="0"/>
+                <a:ea typeface="GeistMono" pitchFamily="34" charset="-122"/>
+                <a:cs typeface="GeistMono" pitchFamily="34" charset="-120"/>
+              </a:rPr>
+              <a:t>02 / THE SWITCH</a:t>
+            </a:r>
+            <a:endParaRPr lang="en-US" sz="1466" dirty="0"/>
+          </a:p>
+          <a:p>
+            <a:pPr algn="l" marL="342900" indent="-342900">
+              <a:lnSpc>
+                <a:spcPts val="2053"/>
+              </a:lnSpc>
+              <a:buSzPct val="100000"/>
+              <a:buChar char="•"/>
+            </a:pPr>
+            <a:r>
+              <a:rPr lang="en-US" sz="1466" dirty="0">
+                <a:solidFill>
+                  <a:srgbClr val="000000"/>
+                </a:solidFill>
+                <a:latin typeface="GeistMono" pitchFamily="34" charset="0"/>
+                <a:ea typeface="GeistMono" pitchFamily="34" charset="-122"/>
+                <a:cs typeface="GeistMono" pitchFamily="34" charset="-120"/>
+              </a:rPr>
+              <a:t>03 / THE BUDGET</a:t>
+            </a:r>
+            <a:endParaRPr lang="en-US" sz="1466" dirty="0"/>
+          </a:p>
+          <a:p>
+            <a:pPr algn="l" marL="342900" indent="-342900">
+              <a:lnSpc>
+                <a:spcPts val="2053"/>
+              </a:lnSpc>
+              <a:buSzPct val="100000"/>
+              <a:buChar char="•"/>
+            </a:pPr>
+            <a:r>
+              <a:rPr lang="en-US" sz="1466" dirty="0">
+                <a:solidFill>
+                  <a:srgbClr val="000000"/>
+                </a:solidFill>
+                <a:latin typeface="GeistMono" pitchFamily="34" charset="0"/>
+                <a:ea typeface="GeistMono" pitchFamily="34" charset="-122"/>
+                <a:cs typeface="GeistMono" pitchFamily="34" charset="-120"/>
+              </a:rPr>
+              <a:t>04 / THE EXCLUSIONS</a:t>
+            </a:r>
+            <a:endParaRPr lang="en-US" sz="1466" dirty="0"/>
+          </a:p>
+          <a:p>
+            <a:pPr algn="l" marL="342900" indent="-342900">
+              <a:lnSpc>
+                <a:spcPts val="2053"/>
+              </a:lnSpc>
+              <a:buSzPct val="100000"/>
+              <a:buChar char="•"/>
+            </a:pPr>
+            <a:r>
+              <a:rPr lang="en-US" sz="1466" dirty="0">
+                <a:solidFill>
+                  <a:srgbClr val="000000"/>
+                </a:solidFill>
+                <a:latin typeface="GeistMono" pitchFamily="34" charset="0"/>
+                <a:ea typeface="GeistMono" pitchFamily="34" charset="-122"/>
+                <a:cs typeface="GeistMono" pitchFamily="34" charset="-120"/>
+              </a:rPr>
+              <a:t>05 / THE FAILURE MODES</a:t>
+            </a:r>
+            <a:endParaRPr lang="en-US" sz="1466" dirty="0"/>
+          </a:p>
+          <a:p>
+            <a:pPr algn="l" marL="342900" indent="-342900">
+              <a:lnSpc>
+                <a:spcPts val="2053"/>
+              </a:lnSpc>
+              <a:buSzPct val="100000"/>
+              <a:buChar char="•"/>
+            </a:pPr>
+            <a:r>
+              <a:rPr lang="en-US" sz="1466" dirty="0">
+                <a:solidFill>
+                  <a:srgbClr val="000000"/>
+                </a:solidFill>
+                <a:latin typeface="GeistMono" pitchFamily="34" charset="0"/>
+                <a:ea typeface="GeistMono" pitchFamily="34" charset="-122"/>
+                <a:cs typeface="GeistMono" pitchFamily="34" charset="-120"/>
+              </a:rPr>
+              <a:t>06 / THE DECISIONS</a:t>
+            </a:r>
+            <a:endParaRPr lang="en-US" sz="1466" dirty="0"/>
+          </a:p>
+        </p:txBody>
+      </p:sp>
+      <p:sp>
+        <p:nvSpPr>
+          <p:cNvPr id="14" name="Shape 12"/>
+          <p:cNvSpPr/>
+          <p:nvPr/>
+        </p:nvSpPr>
+        <p:spPr>
+          <a:xfrm>
+            <a:off x="8206315" y="2391569"/>
+            <a:ext cx="3305539" cy="0"/>
+          </a:xfrm>
+          <a:prstGeom prst="line">
+            <a:avLst/>
+          </a:prstGeom>
+          <a:noFill/>
+          <a:ln w="12698">
+            <a:solidFill>
+              <a:srgbClr val="000000"/>
+            </a:solidFill>
+            <a:prstDash val="solid"/>
+          </a:ln>
+        </p:spPr>
+      </p:sp>
+      <p:sp>
+        <p:nvSpPr>
+          <p:cNvPr id="15" name="Text 13"/>
+          <p:cNvSpPr/>
+          <p:nvPr/>
+        </p:nvSpPr>
+        <p:spPr>
+          <a:xfrm>
+            <a:off x="8206315" y="2397919"/>
+            <a:ext cx="2251004" cy="343694"/>
+          </a:xfrm>
+          <a:prstGeom prst="rect">
+            <a:avLst/>
+          </a:prstGeom>
+          <a:noFill/>
+          <a:ln/>
+        </p:spPr>
+        <p:txBody>
+          <a:bodyPr wrap="square" lIns="0" tIns="0" rIns="0" bIns="0" rtlCol="0" anchor="t"/>
+          <a:lstStyle/>
+          <a:p>
+            <a:pPr algn="l" indent="0" marL="0">
+              <a:lnSpc>
+                <a:spcPts val="2706"/>
+              </a:lnSpc>
+              <a:buNone/>
+            </a:pPr>
+            <a:r>
+              <a:rPr lang="en-US" sz="1866" dirty="0">
+                <a:solidFill>
+                  <a:srgbClr val="000000"/>
+                </a:solidFill>
+                <a:latin typeface="GeistMono" pitchFamily="34" charset="0"/>
+                <a:ea typeface="GeistMono" pitchFamily="34" charset="-122"/>
+                <a:cs typeface="GeistMono" pitchFamily="34" charset="-120"/>
+              </a:rPr>
+              <a:t>02 / THE SWITCH</a:t>
+            </a:r>
+            <a:endParaRPr lang="en-US" sz="1866" dirty="0"/>
+          </a:p>
+        </p:txBody>
+      </p:sp>
+      <p:sp>
+        <p:nvSpPr>
+          <p:cNvPr id="16" name="Shape 14"/>
+          <p:cNvSpPr/>
+          <p:nvPr/>
+        </p:nvSpPr>
+        <p:spPr>
+          <a:xfrm>
+            <a:off x="8206315" y="3135114"/>
+            <a:ext cx="3305539" cy="0"/>
+          </a:xfrm>
+          <a:prstGeom prst="line">
+            <a:avLst/>
+          </a:prstGeom>
+          <a:noFill/>
+          <a:ln w="12698">
+            <a:solidFill>
+              <a:srgbClr val="000000"/>
+            </a:solidFill>
+            <a:prstDash val="solid"/>
+          </a:ln>
+        </p:spPr>
+      </p:sp>
+      <p:sp>
+        <p:nvSpPr>
+          <p:cNvPr id="17" name="Text 15"/>
+          <p:cNvSpPr/>
+          <p:nvPr/>
+        </p:nvSpPr>
+        <p:spPr>
+          <a:xfrm>
+            <a:off x="8206315" y="3141464"/>
+            <a:ext cx="2251004" cy="343694"/>
+          </a:xfrm>
+          <a:prstGeom prst="rect">
+            <a:avLst/>
+          </a:prstGeom>
+          <a:noFill/>
+          <a:ln/>
+        </p:spPr>
+        <p:txBody>
+          <a:bodyPr wrap="square" lIns="0" tIns="0" rIns="0" bIns="0" rtlCol="0" anchor="t"/>
+          <a:lstStyle/>
+          <a:p>
+            <a:pPr algn="l" indent="0" marL="0">
+              <a:lnSpc>
+                <a:spcPts val="2706"/>
+              </a:lnSpc>
+              <a:buNone/>
+            </a:pPr>
+            <a:r>
+              <a:rPr lang="en-US" sz="1866" dirty="0">
+                <a:solidFill>
+                  <a:srgbClr val="000000"/>
+                </a:solidFill>
+                <a:latin typeface="GeistMono" pitchFamily="34" charset="0"/>
+                <a:ea typeface="GeistMono" pitchFamily="34" charset="-122"/>
+                <a:cs typeface="GeistMono" pitchFamily="34" charset="-120"/>
+              </a:rPr>
+              <a:t>03 / THE BUDGET</a:t>
+            </a:r>
+            <a:endParaRPr lang="en-US" sz="1866" dirty="0"/>
+          </a:p>
+        </p:txBody>
+      </p:sp>
+      <p:sp>
+        <p:nvSpPr>
+          <p:cNvPr id="18" name="Shape 16"/>
+          <p:cNvSpPr/>
+          <p:nvPr/>
+        </p:nvSpPr>
+        <p:spPr>
+          <a:xfrm>
+            <a:off x="8206315" y="3878659"/>
+            <a:ext cx="3305539" cy="0"/>
+          </a:xfrm>
+          <a:prstGeom prst="line">
+            <a:avLst/>
+          </a:prstGeom>
+          <a:noFill/>
+          <a:ln w="12698">
+            <a:solidFill>
+              <a:srgbClr val="000000"/>
+            </a:solidFill>
+            <a:prstDash val="solid"/>
+          </a:ln>
+        </p:spPr>
+      </p:sp>
+      <p:sp>
+        <p:nvSpPr>
+          <p:cNvPr id="19" name="Text 17"/>
+          <p:cNvSpPr/>
+          <p:nvPr/>
+        </p:nvSpPr>
+        <p:spPr>
+          <a:xfrm>
+            <a:off x="8206315" y="3885009"/>
+            <a:ext cx="2851191" cy="343694"/>
+          </a:xfrm>
+          <a:prstGeom prst="rect">
+            <a:avLst/>
+          </a:prstGeom>
+          <a:noFill/>
+          <a:ln/>
+        </p:spPr>
+        <p:txBody>
+          <a:bodyPr wrap="square" lIns="0" tIns="0" rIns="0" bIns="0" rtlCol="0" anchor="t"/>
+          <a:lstStyle/>
+          <a:p>
+            <a:pPr algn="l" indent="0" marL="0">
+              <a:lnSpc>
+                <a:spcPts val="2706"/>
+              </a:lnSpc>
+              <a:buNone/>
+            </a:pPr>
+            <a:r>
+              <a:rPr lang="en-US" sz="1866" dirty="0">
+                <a:solidFill>
+                  <a:srgbClr val="000000"/>
+                </a:solidFill>
+                <a:latin typeface="GeistMono" pitchFamily="34" charset="0"/>
+                <a:ea typeface="GeistMono" pitchFamily="34" charset="-122"/>
+                <a:cs typeface="GeistMono" pitchFamily="34" charset="-120"/>
+              </a:rPr>
+              <a:t>04 / THE EXCLUSIONS</a:t>
+            </a:r>
+            <a:endParaRPr lang="en-US" sz="1866" dirty="0"/>
+          </a:p>
+        </p:txBody>
+      </p:sp>
+      <p:sp>
+        <p:nvSpPr>
+          <p:cNvPr id="20" name="Shape 18"/>
+          <p:cNvSpPr/>
+          <p:nvPr/>
+        </p:nvSpPr>
+        <p:spPr>
+          <a:xfrm>
+            <a:off x="8206315" y="4622205"/>
+            <a:ext cx="3305539" cy="0"/>
+          </a:xfrm>
+          <a:prstGeom prst="line">
+            <a:avLst/>
+          </a:prstGeom>
+          <a:noFill/>
+          <a:ln w="12698">
+            <a:solidFill>
+              <a:srgbClr val="000000"/>
+            </a:solidFill>
+            <a:prstDash val="solid"/>
+          </a:ln>
+        </p:spPr>
+      </p:sp>
+      <p:sp>
+        <p:nvSpPr>
+          <p:cNvPr id="21" name="Text 19"/>
+          <p:cNvSpPr/>
+          <p:nvPr/>
+        </p:nvSpPr>
+        <p:spPr>
+          <a:xfrm>
+            <a:off x="8206315" y="4628555"/>
+            <a:ext cx="3301432" cy="343694"/>
+          </a:xfrm>
+          <a:prstGeom prst="rect">
+            <a:avLst/>
+          </a:prstGeom>
+          <a:noFill/>
+          <a:ln/>
+        </p:spPr>
+        <p:txBody>
+          <a:bodyPr wrap="square" lIns="0" tIns="0" rIns="0" bIns="0" rtlCol="0" anchor="t"/>
+          <a:lstStyle/>
+          <a:p>
+            <a:pPr algn="l" indent="0" marL="0">
+              <a:lnSpc>
+                <a:spcPts val="2706"/>
+              </a:lnSpc>
+              <a:buNone/>
+            </a:pPr>
+            <a:r>
+              <a:rPr lang="en-US" sz="1866" dirty="0">
+                <a:solidFill>
+                  <a:srgbClr val="000000"/>
+                </a:solidFill>
+                <a:latin typeface="GeistMono" pitchFamily="34" charset="0"/>
+                <a:ea typeface="GeistMono" pitchFamily="34" charset="-122"/>
+                <a:cs typeface="GeistMono" pitchFamily="34" charset="-120"/>
+              </a:rPr>
+              <a:t>05 / THE FAILURE MODES</a:t>
+            </a:r>
+            <a:endParaRPr lang="en-US" sz="1866" dirty="0"/>
+          </a:p>
+        </p:txBody>
+      </p:sp>
+      <p:sp>
+        <p:nvSpPr>
+          <p:cNvPr id="22" name="Shape 20"/>
+          <p:cNvSpPr/>
+          <p:nvPr/>
+        </p:nvSpPr>
+        <p:spPr>
+          <a:xfrm>
+            <a:off x="8206315" y="5365750"/>
+            <a:ext cx="3305539" cy="0"/>
+          </a:xfrm>
+          <a:prstGeom prst="line">
+            <a:avLst/>
+          </a:prstGeom>
+          <a:noFill/>
+          <a:ln w="12698">
+            <a:solidFill>
+              <a:srgbClr val="000000"/>
+            </a:solidFill>
+            <a:prstDash val="solid"/>
+          </a:ln>
+        </p:spPr>
+      </p:sp>
+      <p:sp>
+        <p:nvSpPr>
+          <p:cNvPr id="23" name="Text 21"/>
+          <p:cNvSpPr/>
+          <p:nvPr/>
+        </p:nvSpPr>
+        <p:spPr>
+          <a:xfrm>
+            <a:off x="8206315" y="5372100"/>
+            <a:ext cx="2701043" cy="343694"/>
+          </a:xfrm>
+          <a:prstGeom prst="rect">
+            <a:avLst/>
+          </a:prstGeom>
+          <a:noFill/>
+          <a:ln/>
+        </p:spPr>
+        <p:txBody>
+          <a:bodyPr wrap="square" lIns="0" tIns="0" rIns="0" bIns="0" rtlCol="0" anchor="t"/>
+          <a:lstStyle/>
+          <a:p>
+            <a:pPr algn="l" indent="0" marL="0">
+              <a:lnSpc>
+                <a:spcPts val="2706"/>
+              </a:lnSpc>
+              <a:buNone/>
+            </a:pPr>
+            <a:r>
+              <a:rPr lang="en-US" sz="1866" dirty="0">
+                <a:solidFill>
+                  <a:srgbClr val="000000"/>
+                </a:solidFill>
+                <a:latin typeface="GeistMono" pitchFamily="34" charset="0"/>
+                <a:ea typeface="GeistMono" pitchFamily="34" charset="-122"/>
+                <a:cs typeface="GeistMono" pitchFamily="34" charset="-120"/>
+              </a:rPr>
+              <a:t>06 / THE DECISIONS</a:t>
+            </a:r>
+            <a:endParaRPr lang="en-US" sz="1866" dirty="0"/>
+          </a:p>
+        </p:txBody>
+      </p:sp>
+      <p:sp>
+        <p:nvSpPr>
+          <p:cNvPr id="24" name="Text 22"/>
+          <p:cNvSpPr/>
+          <p:nvPr/>
+        </p:nvSpPr>
+        <p:spPr>
+          <a:xfrm>
+            <a:off x="677098" y="6113066"/>
+            <a:ext cx="2210331" cy="236934"/>
+          </a:xfrm>
+          <a:prstGeom prst="rect">
+            <a:avLst/>
+          </a:prstGeom>
+          <a:noFill/>
+          <a:ln/>
+        </p:spPr>
+        <p:txBody>
+          <a:bodyPr wrap="square" lIns="0" tIns="0" rIns="0" bIns="0" rtlCol="0" anchor="t"/>
+          <a:lstStyle/>
+          <a:p>
+            <a:pPr algn="l" indent="0" marL="0">
+              <a:lnSpc>
+                <a:spcPts val="1866"/>
+              </a:lnSpc>
+              <a:buNone/>
+            </a:pPr>
+            <a:r>
+              <a:rPr lang="en-US" sz="1333" dirty="0">
+                <a:solidFill>
+                  <a:srgbClr val="666666"/>
+                </a:solidFill>
+                <a:latin typeface="GeistMono" pitchFamily="34" charset="0"/>
+                <a:ea typeface="GeistMono" pitchFamily="34" charset="-122"/>
+                <a:cs typeface="GeistMono" pitchFamily="34" charset="-120"/>
+              </a:rPr>
+              <a:t>SLO · OPERATING NOTE</a:t>
+            </a:r>
+            <a:endParaRPr lang="en-US" sz="1333" dirty="0"/>
+          </a:p>
+        </p:txBody>
+      </p:sp>
+      <p:sp>
+        <p:nvSpPr>
+          <p:cNvPr id="25" name="Text 23"/>
+          <p:cNvSpPr/>
+          <p:nvPr/>
+        </p:nvSpPr>
+        <p:spPr>
+          <a:xfrm>
+            <a:off x="6527755" y="6113066"/>
+            <a:ext cx="5083781" cy="236934"/>
+          </a:xfrm>
+          <a:prstGeom prst="rect">
+            <a:avLst/>
+          </a:prstGeom>
+          <a:noFill/>
+          <a:ln/>
+        </p:spPr>
+        <p:txBody>
+          <a:bodyPr wrap="square" lIns="0" tIns="0" rIns="0" bIns="0" rtlCol="0" anchor="t"/>
+          <a:lstStyle/>
+          <a:p>
+            <a:pPr algn="l" indent="0" marL="0">
+              <a:lnSpc>
+                <a:spcPts val="1866"/>
+              </a:lnSpc>
+              <a:buNone/>
+            </a:pPr>
+            <a:r>
+              <a:rPr lang="en-US" sz="1333" dirty="0">
+                <a:solidFill>
+                  <a:srgbClr val="666666"/>
+                </a:solidFill>
+                <a:latin typeface="GeistMono" pitchFamily="34" charset="0"/>
+                <a:ea typeface="GeistMono" pitchFamily="34" charset="-122"/>
+                <a:cs typeface="GeistMono" pitchFamily="34" charset="-120"/>
+              </a:rPr>
+              <a:t>Source: none — no figures appear in this deck.</a:t>
+            </a:r>
+            <a:endParaRPr lang="en-US" sz="1333" dirty="0"/>
+          </a:p>
+        </p:txBody>
+      </p:sp>
     </p:spTree>
   </p:cSld>
   <p:clrMapOvr>
@@ -1348,6 +2322,13 @@
 <file path=ppt/slides/slide2.xml><?xml version="1.0" encoding="utf-8"?>
 <p:sld xmlns:a="http://schemas.openxmlformats.org/drawingml/2006/main" xmlns:r="http://schemas.openxmlformats.org/officeDocument/2006/relationships" xmlns:p="http://schemas.openxmlformats.org/presentationml/2006/main">
   <p:cSld name="Slide 2">
+    <p:bg>
+      <p:bgPr>
+        <a:solidFill>
+          <a:srgbClr val="FFFFFF"/>
+        </a:solidFill>
+      </p:bgPr>
+    </p:bg>
     <p:spTree>
       <p:nvGrpSpPr>
         <p:cNvPr id="1" name=""/>
@@ -1362,30 +2343,985 @@
           <a:chExt cx="0" cy="0"/>
         </a:xfrm>
       </p:grpSpPr>
-      <p:pic>
-        <p:nvPicPr>
-          <p:cNvPr id="2" name="Image 0" descr="/tmp/slide-1787841959851-ig0yzhjk84.png">    </p:cNvPr>
-          <p:cNvPicPr>
-            <a:picLocks noChangeAspect="1"/>
-          </p:cNvPicPr>
-          <p:nvPr/>
-        </p:nvPicPr>
-        <p:blipFill>
-          <a:blip r:embed="rId1"/>
-          <a:stretch>
-            <a:fillRect/>
-          </a:stretch>
-        </p:blipFill>
-        <p:spPr>
-          <a:xfrm>
-            <a:off x="0" y="0"/>
-            <a:ext cx="12188952" cy="6858000"/>
-          </a:xfrm>
-          <a:prstGeom prst="rect">
-            <a:avLst/>
-          </a:prstGeom>
-        </p:spPr>
-      </p:pic>
+      <p:sp>
+        <p:nvSpPr>
+          <p:cNvPr id="2" name="Text 0"/>
+          <p:cNvSpPr/>
+          <p:nvPr/>
+        </p:nvSpPr>
+        <p:spPr>
+          <a:xfrm>
+            <a:off x="677098" y="406400"/>
+            <a:ext cx="1862481" cy="260747"/>
+          </a:xfrm>
+          <a:prstGeom prst="rect">
+            <a:avLst/>
+          </a:prstGeom>
+          <a:noFill/>
+          <a:ln/>
+        </p:spPr>
+        <p:txBody>
+          <a:bodyPr wrap="square" lIns="0" tIns="0" rIns="0" bIns="0" rtlCol="0" anchor="t"/>
+          <a:lstStyle/>
+          <a:p>
+            <a:pPr algn="l" indent="0" marL="0">
+              <a:lnSpc>
+                <a:spcPts val="2053"/>
+              </a:lnSpc>
+              <a:buNone/>
+            </a:pPr>
+            <a:r>
+              <a:rPr lang="en-US" sz="1466" dirty="0">
+                <a:solidFill>
+                  <a:srgbClr val="666666"/>
+                </a:solidFill>
+                <a:latin typeface="GeistMono" pitchFamily="34" charset="0"/>
+                <a:ea typeface="GeistMono" pitchFamily="34" charset="-122"/>
+                <a:cs typeface="GeistMono" pitchFamily="34" charset="-120"/>
+              </a:rPr>
+              <a:t>02 · THE SWITCH</a:t>
+            </a:r>
+            <a:endParaRPr lang="en-US" sz="1466" dirty="0"/>
+          </a:p>
+        </p:txBody>
+      </p:sp>
+      <p:sp>
+        <p:nvSpPr>
+          <p:cNvPr id="3" name="Text 1"/>
+          <p:cNvSpPr/>
+          <p:nvPr/>
+        </p:nvSpPr>
+        <p:spPr>
+          <a:xfrm>
+            <a:off x="9929314" y="406400"/>
+            <a:ext cx="1614191" cy="260747"/>
+          </a:xfrm>
+          <a:prstGeom prst="rect">
+            <a:avLst/>
+          </a:prstGeom>
+          <a:noFill/>
+          <a:ln/>
+        </p:spPr>
+        <p:txBody>
+          <a:bodyPr wrap="square" lIns="0" tIns="0" rIns="0" bIns="0" rtlCol="0" anchor="t"/>
+          <a:lstStyle/>
+          <a:p>
+            <a:pPr algn="l" indent="0" marL="0">
+              <a:lnSpc>
+                <a:spcPts val="2053"/>
+              </a:lnSpc>
+              <a:buNone/>
+            </a:pPr>
+            <a:r>
+              <a:rPr lang="en-US" sz="1466" dirty="0">
+                <a:solidFill>
+                  <a:srgbClr val="666666"/>
+                </a:solidFill>
+                <a:latin typeface="GeistMono" pitchFamily="34" charset="0"/>
+                <a:ea typeface="GeistMono" pitchFamily="34" charset="-122"/>
+                <a:cs typeface="GeistMono" pitchFamily="34" charset="-120"/>
+              </a:rPr>
+              <a:t>SHEET 02 / 06</a:t>
+            </a:r>
+            <a:endParaRPr lang="en-US" sz="1466" dirty="0"/>
+          </a:p>
+        </p:txBody>
+      </p:sp>
+      <p:sp>
+        <p:nvSpPr>
+          <p:cNvPr id="4" name="Text 2"/>
+          <p:cNvSpPr/>
+          <p:nvPr/>
+        </p:nvSpPr>
+        <p:spPr>
+          <a:xfrm>
+            <a:off x="677098" y="768747"/>
+            <a:ext cx="11051451" cy="506214"/>
+          </a:xfrm>
+          <a:prstGeom prst="rect">
+            <a:avLst/>
+          </a:prstGeom>
+          <a:noFill/>
+          <a:ln/>
+        </p:spPr>
+        <p:txBody>
+          <a:bodyPr wrap="square" lIns="0" tIns="0" rIns="0" bIns="0" rtlCol="0" anchor="t"/>
+          <a:lstStyle/>
+          <a:p>
+            <a:pPr algn="l" indent="0" marL="0">
+              <a:lnSpc>
+                <a:spcPts val="3986"/>
+              </a:lnSpc>
+              <a:buNone/>
+            </a:pPr>
+            <a:r>
+              <a:rPr lang="en-US" sz="3066" b="1" dirty="0">
+                <a:solidFill>
+                  <a:srgbClr val="000000"/>
+                </a:solidFill>
+                <a:latin typeface="Geist" pitchFamily="34" charset="0"/>
+                <a:ea typeface="Geist" pitchFamily="34" charset="-122"/>
+                <a:cs typeface="Geist" pitchFamily="34" charset="-120"/>
+              </a:rPr>
+              <a:t>An SLO is not a quality metric. It is a switch.</a:t>
+            </a:r>
+            <a:endParaRPr lang="en-US" sz="3066" dirty="0"/>
+          </a:p>
+        </p:txBody>
+      </p:sp>
+      <p:sp>
+        <p:nvSpPr>
+          <p:cNvPr id="5" name="Text 3"/>
+          <p:cNvSpPr/>
+          <p:nvPr/>
+        </p:nvSpPr>
+        <p:spPr>
+          <a:xfrm>
+            <a:off x="677098" y="1444228"/>
+            <a:ext cx="10834756" cy="12700"/>
+          </a:xfrm>
+          <a:prstGeom prst="rect">
+            <a:avLst/>
+          </a:prstGeom>
+          <a:solidFill>
+            <a:srgbClr val="000000"/>
+          </a:solidFill>
+          <a:ln/>
+        </p:spPr>
+        <p:txBody>
+          <a:bodyPr wrap="square" rtlCol="0" anchor="ctr"/>
+          <a:lstStyle/>
+          <a:p>
+            <a:pPr indent="0" marL="0">
+              <a:buNone/>
+            </a:pPr>
+            <a:endParaRPr lang="en-US" dirty="0"/>
+          </a:p>
+        </p:txBody>
+      </p:sp>
+      <p:sp>
+        <p:nvSpPr>
+          <p:cNvPr id="6" name="Text 4"/>
+          <p:cNvSpPr/>
+          <p:nvPr/>
+        </p:nvSpPr>
+        <p:spPr>
+          <a:xfrm>
+            <a:off x="689795" y="1791295"/>
+            <a:ext cx="5292612" cy="599281"/>
+          </a:xfrm>
+          <a:prstGeom prst="rect">
+            <a:avLst/>
+          </a:prstGeom>
+          <a:noFill/>
+          <a:ln/>
+        </p:spPr>
+        <p:txBody>
+          <a:bodyPr wrap="square" lIns="237037" tIns="186244" rIns="237037" bIns="152381" rtlCol="0" anchor="t"/>
+          <a:lstStyle/>
+          <a:p>
+            <a:pPr algn="l" indent="0" marL="0">
+              <a:lnSpc>
+                <a:spcPts val="2053"/>
+              </a:lnSpc>
+              <a:buNone/>
+            </a:pPr>
+            <a:r>
+              <a:rPr lang="en-US" sz="1466" dirty="0">
+                <a:solidFill>
+                  <a:srgbClr val="666666"/>
+                </a:solidFill>
+                <a:latin typeface="GeistMono" pitchFamily="34" charset="0"/>
+                <a:ea typeface="GeistMono" pitchFamily="34" charset="-122"/>
+                <a:cs typeface="GeistMono" pitchFamily="34" charset="-120"/>
+              </a:rPr>
+              <a:t>READ AS A METRIC</a:t>
+            </a:r>
+            <a:endParaRPr lang="en-US" sz="1466" dirty="0"/>
+          </a:p>
+        </p:txBody>
+      </p:sp>
+      <p:sp>
+        <p:nvSpPr>
+          <p:cNvPr id="7" name="Text 5"/>
+          <p:cNvSpPr/>
+          <p:nvPr/>
+        </p:nvSpPr>
+        <p:spPr>
+          <a:xfrm>
+            <a:off x="689795" y="2390577"/>
+            <a:ext cx="5188835" cy="2617589"/>
+          </a:xfrm>
+          <a:prstGeom prst="rect">
+            <a:avLst/>
+          </a:prstGeom>
+          <a:noFill/>
+          <a:ln/>
+        </p:spPr>
+        <p:txBody>
+          <a:bodyPr wrap="square" lIns="118519" tIns="0" rIns="0" bIns="0" rtlCol="0" anchor="t"/>
+          <a:lstStyle/>
+          <a:p>
+            <a:pPr algn="l" marL="118519" indent="-118519">
+              <a:lnSpc>
+                <a:spcPts val="2706"/>
+              </a:lnSpc>
+              <a:buSzPct val="100000"/>
+              <a:buChar char="•"/>
+            </a:pPr>
+            <a:r>
+              <a:rPr lang="en-US" sz="1866" dirty="0">
+                <a:solidFill>
+                  <a:srgbClr val="000000"/>
+                </a:solidFill>
+                <a:latin typeface="Geist" pitchFamily="34" charset="0"/>
+                <a:ea typeface="Geist" pitchFamily="34" charset="-122"/>
+                <a:cs typeface="Geist" pitchFamily="34" charset="-120"/>
+              </a:rPr>
+              <a:t>It describes how the service behaved.</a:t>
+            </a:r>
+            <a:endParaRPr lang="en-US" sz="1866" dirty="0"/>
+          </a:p>
+          <a:p>
+            <a:pPr algn="l" marL="118519" indent="-118519">
+              <a:lnSpc>
+                <a:spcPts val="2706"/>
+              </a:lnSpc>
+              <a:buSzPct val="100000"/>
+              <a:buChar char="•"/>
+            </a:pPr>
+            <a:r>
+              <a:rPr lang="en-US" sz="1866" dirty="0">
+                <a:solidFill>
+                  <a:srgbClr val="000000"/>
+                </a:solidFill>
+                <a:latin typeface="Geist" pitchFamily="34" charset="0"/>
+                <a:ea typeface="Geist" pitchFamily="34" charset="-122"/>
+                <a:cs typeface="Geist" pitchFamily="34" charset="-120"/>
+              </a:rPr>
+              <a:t>It gets reported, compared, discussed.</a:t>
+            </a:r>
+            <a:endParaRPr lang="en-US" sz="1866" dirty="0"/>
+          </a:p>
+          <a:p>
+            <a:pPr algn="l" marL="118519" indent="-118519">
+              <a:lnSpc>
+                <a:spcPts val="2706"/>
+              </a:lnSpc>
+              <a:buSzPct val="100000"/>
+              <a:buChar char="•"/>
+            </a:pPr>
+            <a:r>
+              <a:rPr lang="en-US" sz="1866" dirty="0">
+                <a:solidFill>
+                  <a:srgbClr val="000000"/>
+                </a:solidFill>
+                <a:latin typeface="Geist" pitchFamily="34" charset="0"/>
+                <a:ea typeface="Geist" pitchFamily="34" charset="-122"/>
+                <a:cs typeface="Geist" pitchFamily="34" charset="-120"/>
+              </a:rPr>
+              <a:t>Nothing about next week has to change.</a:t>
+            </a:r>
+            <a:endParaRPr lang="en-US" sz="1866" dirty="0"/>
+          </a:p>
+        </p:txBody>
+      </p:sp>
+      <p:sp>
+        <p:nvSpPr>
+          <p:cNvPr id="8" name="Shape 6"/>
+          <p:cNvSpPr/>
+          <p:nvPr/>
+        </p:nvSpPr>
+        <p:spPr>
+          <a:xfrm>
+            <a:off x="926670" y="2626717"/>
+            <a:ext cx="4715085" cy="0"/>
+          </a:xfrm>
+          <a:prstGeom prst="line">
+            <a:avLst/>
+          </a:prstGeom>
+          <a:noFill/>
+          <a:ln w="12698">
+            <a:solidFill>
+              <a:srgbClr val="000000"/>
+            </a:solidFill>
+            <a:prstDash val="solid"/>
+          </a:ln>
+        </p:spPr>
+      </p:sp>
+      <p:sp>
+        <p:nvSpPr>
+          <p:cNvPr id="9" name="Text 7"/>
+          <p:cNvSpPr/>
+          <p:nvPr/>
+        </p:nvSpPr>
+        <p:spPr>
+          <a:xfrm>
+            <a:off x="926670" y="2633067"/>
+            <a:ext cx="4286702" cy="343694"/>
+          </a:xfrm>
+          <a:prstGeom prst="rect">
+            <a:avLst/>
+          </a:prstGeom>
+          <a:noFill/>
+          <a:ln/>
+        </p:spPr>
+        <p:txBody>
+          <a:bodyPr wrap="square" lIns="0" tIns="0" rIns="0" bIns="0" rtlCol="0" anchor="t"/>
+          <a:lstStyle/>
+          <a:p>
+            <a:pPr algn="l" indent="0" marL="0">
+              <a:lnSpc>
+                <a:spcPts val="2706"/>
+              </a:lnSpc>
+              <a:buNone/>
+            </a:pPr>
+            <a:r>
+              <a:rPr lang="en-US" sz="1866" dirty="0">
+                <a:solidFill>
+                  <a:srgbClr val="000000"/>
+                </a:solidFill>
+                <a:latin typeface="Geist" pitchFamily="34" charset="0"/>
+                <a:ea typeface="Geist" pitchFamily="34" charset="-122"/>
+                <a:cs typeface="Geist" pitchFamily="34" charset="-120"/>
+              </a:rPr>
+              <a:t>It describes how the service behaved.</a:t>
+            </a:r>
+            <a:endParaRPr lang="en-US" sz="1866" dirty="0"/>
+          </a:p>
+        </p:txBody>
+      </p:sp>
+      <p:sp>
+        <p:nvSpPr>
+          <p:cNvPr id="10" name="Shape 8"/>
+          <p:cNvSpPr/>
+          <p:nvPr/>
+        </p:nvSpPr>
+        <p:spPr>
+          <a:xfrm>
+            <a:off x="926670" y="3442891"/>
+            <a:ext cx="4715085" cy="0"/>
+          </a:xfrm>
+          <a:prstGeom prst="line">
+            <a:avLst/>
+          </a:prstGeom>
+          <a:noFill/>
+          <a:ln w="12698">
+            <a:solidFill>
+              <a:srgbClr val="000000"/>
+            </a:solidFill>
+            <a:prstDash val="solid"/>
+          </a:ln>
+        </p:spPr>
+      </p:sp>
+      <p:sp>
+        <p:nvSpPr>
+          <p:cNvPr id="11" name="Text 9"/>
+          <p:cNvSpPr/>
+          <p:nvPr/>
+        </p:nvSpPr>
+        <p:spPr>
+          <a:xfrm>
+            <a:off x="926670" y="3449241"/>
+            <a:ext cx="4286702" cy="343694"/>
+          </a:xfrm>
+          <a:prstGeom prst="rect">
+            <a:avLst/>
+          </a:prstGeom>
+          <a:noFill/>
+          <a:ln/>
+        </p:spPr>
+        <p:txBody>
+          <a:bodyPr wrap="square" lIns="0" tIns="0" rIns="0" bIns="0" rtlCol="0" anchor="t"/>
+          <a:lstStyle/>
+          <a:p>
+            <a:pPr algn="l" indent="0" marL="0">
+              <a:lnSpc>
+                <a:spcPts val="2706"/>
+              </a:lnSpc>
+              <a:buNone/>
+            </a:pPr>
+            <a:r>
+              <a:rPr lang="en-US" sz="1866" dirty="0">
+                <a:solidFill>
+                  <a:srgbClr val="000000"/>
+                </a:solidFill>
+                <a:latin typeface="Geist" pitchFamily="34" charset="0"/>
+                <a:ea typeface="Geist" pitchFamily="34" charset="-122"/>
+                <a:cs typeface="Geist" pitchFamily="34" charset="-120"/>
+              </a:rPr>
+              <a:t>It gets reported, compared, discussed.</a:t>
+            </a:r>
+            <a:endParaRPr lang="en-US" sz="1866" dirty="0"/>
+          </a:p>
+        </p:txBody>
+      </p:sp>
+      <p:sp>
+        <p:nvSpPr>
+          <p:cNvPr id="12" name="Shape 10"/>
+          <p:cNvSpPr/>
+          <p:nvPr/>
+        </p:nvSpPr>
+        <p:spPr>
+          <a:xfrm>
+            <a:off x="926670" y="4259064"/>
+            <a:ext cx="4715085" cy="0"/>
+          </a:xfrm>
+          <a:prstGeom prst="line">
+            <a:avLst/>
+          </a:prstGeom>
+          <a:noFill/>
+          <a:ln w="12698">
+            <a:solidFill>
+              <a:srgbClr val="000000"/>
+            </a:solidFill>
+            <a:prstDash val="solid"/>
+          </a:ln>
+        </p:spPr>
+      </p:sp>
+      <p:sp>
+        <p:nvSpPr>
+          <p:cNvPr id="13" name="Text 11"/>
+          <p:cNvSpPr/>
+          <p:nvPr/>
+        </p:nvSpPr>
+        <p:spPr>
+          <a:xfrm>
+            <a:off x="926670" y="4265414"/>
+            <a:ext cx="4610471" cy="343694"/>
+          </a:xfrm>
+          <a:prstGeom prst="rect">
+            <a:avLst/>
+          </a:prstGeom>
+          <a:noFill/>
+          <a:ln/>
+        </p:spPr>
+        <p:txBody>
+          <a:bodyPr wrap="square" lIns="0" tIns="0" rIns="0" bIns="0" rtlCol="0" anchor="t"/>
+          <a:lstStyle/>
+          <a:p>
+            <a:pPr algn="l" indent="0" marL="0">
+              <a:lnSpc>
+                <a:spcPts val="2706"/>
+              </a:lnSpc>
+              <a:buNone/>
+            </a:pPr>
+            <a:r>
+              <a:rPr lang="en-US" sz="1866" dirty="0">
+                <a:solidFill>
+                  <a:srgbClr val="000000"/>
+                </a:solidFill>
+                <a:latin typeface="Geist" pitchFamily="34" charset="0"/>
+                <a:ea typeface="Geist" pitchFamily="34" charset="-122"/>
+                <a:cs typeface="Geist" pitchFamily="34" charset="-120"/>
+              </a:rPr>
+              <a:t>Nothing about next week has to change.</a:t>
+            </a:r>
+            <a:endParaRPr lang="en-US" sz="1866" dirty="0"/>
+          </a:p>
+        </p:txBody>
+      </p:sp>
+      <p:sp>
+        <p:nvSpPr>
+          <p:cNvPr id="14" name="Text 12"/>
+          <p:cNvSpPr/>
+          <p:nvPr/>
+        </p:nvSpPr>
+        <p:spPr>
+          <a:xfrm>
+            <a:off x="6310322" y="1740495"/>
+            <a:ext cx="5188835" cy="50800"/>
+          </a:xfrm>
+          <a:prstGeom prst="rect">
+            <a:avLst/>
+          </a:prstGeom>
+          <a:solidFill>
+            <a:srgbClr val="000000"/>
+          </a:solidFill>
+          <a:ln/>
+        </p:spPr>
+        <p:txBody>
+          <a:bodyPr wrap="square" rtlCol="0" anchor="ctr"/>
+          <a:lstStyle/>
+          <a:p>
+            <a:pPr indent="0" marL="0">
+              <a:buNone/>
+            </a:pPr>
+            <a:endParaRPr lang="en-US" dirty="0"/>
+          </a:p>
+        </p:txBody>
+      </p:sp>
+      <p:sp>
+        <p:nvSpPr>
+          <p:cNvPr id="15" name="Text 13"/>
+          <p:cNvSpPr/>
+          <p:nvPr/>
+        </p:nvSpPr>
+        <p:spPr>
+          <a:xfrm>
+            <a:off x="6310322" y="1791295"/>
+            <a:ext cx="5292612" cy="599281"/>
+          </a:xfrm>
+          <a:prstGeom prst="rect">
+            <a:avLst/>
+          </a:prstGeom>
+          <a:noFill/>
+          <a:ln/>
+        </p:spPr>
+        <p:txBody>
+          <a:bodyPr wrap="square" lIns="237037" tIns="186244" rIns="237037" bIns="152381" rtlCol="0" anchor="t"/>
+          <a:lstStyle/>
+          <a:p>
+            <a:pPr algn="l" indent="0" marL="0">
+              <a:lnSpc>
+                <a:spcPts val="2053"/>
+              </a:lnSpc>
+              <a:buNone/>
+            </a:pPr>
+            <a:r>
+              <a:rPr lang="en-US" sz="1466" dirty="0">
+                <a:solidFill>
+                  <a:srgbClr val="000000"/>
+                </a:solidFill>
+                <a:latin typeface="GeistMono" pitchFamily="34" charset="0"/>
+                <a:ea typeface="GeistMono" pitchFamily="34" charset="-122"/>
+                <a:cs typeface="GeistMono" pitchFamily="34" charset="-120"/>
+              </a:rPr>
+              <a:t>USED AS A SWITCH</a:t>
+            </a:r>
+            <a:endParaRPr lang="en-US" sz="1466" dirty="0"/>
+          </a:p>
+        </p:txBody>
+      </p:sp>
+      <p:sp>
+        <p:nvSpPr>
+          <p:cNvPr id="16" name="Text 14"/>
+          <p:cNvSpPr/>
+          <p:nvPr/>
+        </p:nvSpPr>
+        <p:spPr>
+          <a:xfrm>
+            <a:off x="6310322" y="2390577"/>
+            <a:ext cx="5188835" cy="2617589"/>
+          </a:xfrm>
+          <a:prstGeom prst="rect">
+            <a:avLst/>
+          </a:prstGeom>
+          <a:noFill/>
+          <a:ln/>
+        </p:spPr>
+        <p:txBody>
+          <a:bodyPr wrap="square" lIns="118519" tIns="0" rIns="0" bIns="0" rtlCol="0" anchor="t"/>
+          <a:lstStyle/>
+          <a:p>
+            <a:pPr algn="l" marL="118519" indent="-118519">
+              <a:lnSpc>
+                <a:spcPts val="2706"/>
+              </a:lnSpc>
+              <a:buSzPct val="100000"/>
+              <a:buChar char="•"/>
+            </a:pPr>
+            <a:r>
+              <a:rPr lang="en-US" sz="1866" dirty="0">
+                <a:solidFill>
+                  <a:srgbClr val="000000"/>
+                </a:solidFill>
+                <a:latin typeface="Geist" pitchFamily="34" charset="0"/>
+                <a:ea typeface="Geist" pitchFamily="34" charset="-122"/>
+                <a:cs typeface="Geist" pitchFamily="34" charset="-120"/>
+              </a:rPr>
+              <a:t>It has two positions and only two.</a:t>
+            </a:r>
+            <a:endParaRPr lang="en-US" sz="1866" dirty="0"/>
+          </a:p>
+          <a:p>
+            <a:pPr algn="l" marL="118519" indent="-118519">
+              <a:lnSpc>
+                <a:spcPts val="2706"/>
+              </a:lnSpc>
+              <a:buSzPct val="100000"/>
+              <a:buChar char="•"/>
+            </a:pPr>
+            <a:r>
+              <a:rPr lang="en-US" sz="1866" dirty="0">
+                <a:solidFill>
+                  <a:srgbClr val="000000"/>
+                </a:solidFill>
+                <a:latin typeface="Geist" pitchFamily="34" charset="0"/>
+                <a:ea typeface="Geist" pitchFamily="34" charset="-122"/>
+                <a:cs typeface="Geist" pitchFamily="34" charset="-120"/>
+              </a:rPr>
+              <a:t>Crossing it changes what ships next.</a:t>
+            </a:r>
+            <a:endParaRPr lang="en-US" sz="1866" dirty="0"/>
+          </a:p>
+          <a:p>
+            <a:pPr algn="l" marL="118519" indent="-118519">
+              <a:lnSpc>
+                <a:spcPts val="2706"/>
+              </a:lnSpc>
+              <a:buSzPct val="100000"/>
+              <a:buChar char="•"/>
+            </a:pPr>
+            <a:r>
+              <a:rPr lang="en-US" sz="1866" dirty="0">
+                <a:solidFill>
+                  <a:srgbClr val="000000"/>
+                </a:solidFill>
+                <a:latin typeface="Geist" pitchFamily="34" charset="0"/>
+                <a:ea typeface="Geist" pitchFamily="34" charset="-122"/>
+                <a:cs typeface="Geist" pitchFamily="34" charset="-120"/>
+              </a:rPr>
+              <a:t>No meeting is needed for it to fire.</a:t>
+            </a:r>
+            <a:endParaRPr lang="en-US" sz="1866" dirty="0"/>
+          </a:p>
+        </p:txBody>
+      </p:sp>
+      <p:sp>
+        <p:nvSpPr>
+          <p:cNvPr id="17" name="Shape 15"/>
+          <p:cNvSpPr/>
+          <p:nvPr/>
+        </p:nvSpPr>
+        <p:spPr>
+          <a:xfrm>
+            <a:off x="6547197" y="2626717"/>
+            <a:ext cx="4715085" cy="0"/>
+          </a:xfrm>
+          <a:prstGeom prst="line">
+            <a:avLst/>
+          </a:prstGeom>
+          <a:noFill/>
+          <a:ln w="12698">
+            <a:solidFill>
+              <a:srgbClr val="000000"/>
+            </a:solidFill>
+            <a:prstDash val="solid"/>
+          </a:ln>
+        </p:spPr>
+      </p:sp>
+      <p:sp>
+        <p:nvSpPr>
+          <p:cNvPr id="18" name="Text 16"/>
+          <p:cNvSpPr/>
+          <p:nvPr/>
+        </p:nvSpPr>
+        <p:spPr>
+          <a:xfrm>
+            <a:off x="6547197" y="2633067"/>
+            <a:ext cx="3794573" cy="343694"/>
+          </a:xfrm>
+          <a:prstGeom prst="rect">
+            <a:avLst/>
+          </a:prstGeom>
+          <a:noFill/>
+          <a:ln/>
+        </p:spPr>
+        <p:txBody>
+          <a:bodyPr wrap="square" lIns="0" tIns="0" rIns="0" bIns="0" rtlCol="0" anchor="t"/>
+          <a:lstStyle/>
+          <a:p>
+            <a:pPr algn="l" indent="0" marL="0">
+              <a:lnSpc>
+                <a:spcPts val="2706"/>
+              </a:lnSpc>
+              <a:buNone/>
+            </a:pPr>
+            <a:r>
+              <a:rPr lang="en-US" sz="1866" dirty="0">
+                <a:solidFill>
+                  <a:srgbClr val="000000"/>
+                </a:solidFill>
+                <a:latin typeface="Geist" pitchFamily="34" charset="0"/>
+                <a:ea typeface="Geist" pitchFamily="34" charset="-122"/>
+                <a:cs typeface="Geist" pitchFamily="34" charset="-120"/>
+              </a:rPr>
+              <a:t>It has two positions and only two.</a:t>
+            </a:r>
+            <a:endParaRPr lang="en-US" sz="1866" dirty="0"/>
+          </a:p>
+        </p:txBody>
+      </p:sp>
+      <p:sp>
+        <p:nvSpPr>
+          <p:cNvPr id="19" name="Shape 17"/>
+          <p:cNvSpPr/>
+          <p:nvPr/>
+        </p:nvSpPr>
+        <p:spPr>
+          <a:xfrm>
+            <a:off x="6547197" y="3442891"/>
+            <a:ext cx="4715085" cy="0"/>
+          </a:xfrm>
+          <a:prstGeom prst="line">
+            <a:avLst/>
+          </a:prstGeom>
+          <a:noFill/>
+          <a:ln w="12698">
+            <a:solidFill>
+              <a:srgbClr val="000000"/>
+            </a:solidFill>
+            <a:prstDash val="solid"/>
+          </a:ln>
+        </p:spPr>
+      </p:sp>
+      <p:sp>
+        <p:nvSpPr>
+          <p:cNvPr id="20" name="Text 18"/>
+          <p:cNvSpPr/>
+          <p:nvPr/>
+        </p:nvSpPr>
+        <p:spPr>
+          <a:xfrm>
+            <a:off x="6547197" y="3449241"/>
+            <a:ext cx="4157194" cy="343694"/>
+          </a:xfrm>
+          <a:prstGeom prst="rect">
+            <a:avLst/>
+          </a:prstGeom>
+          <a:noFill/>
+          <a:ln/>
+        </p:spPr>
+        <p:txBody>
+          <a:bodyPr wrap="square" lIns="0" tIns="0" rIns="0" bIns="0" rtlCol="0" anchor="t"/>
+          <a:lstStyle/>
+          <a:p>
+            <a:pPr algn="l" indent="0" marL="0">
+              <a:lnSpc>
+                <a:spcPts val="2706"/>
+              </a:lnSpc>
+              <a:buNone/>
+            </a:pPr>
+            <a:r>
+              <a:rPr lang="en-US" sz="1866" dirty="0">
+                <a:solidFill>
+                  <a:srgbClr val="000000"/>
+                </a:solidFill>
+                <a:latin typeface="Geist" pitchFamily="34" charset="0"/>
+                <a:ea typeface="Geist" pitchFamily="34" charset="-122"/>
+                <a:cs typeface="Geist" pitchFamily="34" charset="-120"/>
+              </a:rPr>
+              <a:t>Crossing it changes what ships next.</a:t>
+            </a:r>
+            <a:endParaRPr lang="en-US" sz="1866" dirty="0"/>
+          </a:p>
+        </p:txBody>
+      </p:sp>
+      <p:sp>
+        <p:nvSpPr>
+          <p:cNvPr id="21" name="Shape 19"/>
+          <p:cNvSpPr/>
+          <p:nvPr/>
+        </p:nvSpPr>
+        <p:spPr>
+          <a:xfrm>
+            <a:off x="6547197" y="4259064"/>
+            <a:ext cx="4715085" cy="0"/>
+          </a:xfrm>
+          <a:prstGeom prst="line">
+            <a:avLst/>
+          </a:prstGeom>
+          <a:noFill/>
+          <a:ln w="12698">
+            <a:solidFill>
+              <a:srgbClr val="000000"/>
+            </a:solidFill>
+            <a:prstDash val="solid"/>
+          </a:ln>
+        </p:spPr>
+      </p:sp>
+      <p:sp>
+        <p:nvSpPr>
+          <p:cNvPr id="22" name="Text 20"/>
+          <p:cNvSpPr/>
+          <p:nvPr/>
+        </p:nvSpPr>
+        <p:spPr>
+          <a:xfrm>
+            <a:off x="6547197" y="4265414"/>
+            <a:ext cx="3859327" cy="343694"/>
+          </a:xfrm>
+          <a:prstGeom prst="rect">
+            <a:avLst/>
+          </a:prstGeom>
+          <a:noFill/>
+          <a:ln/>
+        </p:spPr>
+        <p:txBody>
+          <a:bodyPr wrap="square" lIns="0" tIns="0" rIns="0" bIns="0" rtlCol="0" anchor="t"/>
+          <a:lstStyle/>
+          <a:p>
+            <a:pPr algn="l" indent="0" marL="0">
+              <a:lnSpc>
+                <a:spcPts val="2706"/>
+              </a:lnSpc>
+              <a:buNone/>
+            </a:pPr>
+            <a:r>
+              <a:rPr lang="en-US" sz="1866" dirty="0">
+                <a:solidFill>
+                  <a:srgbClr val="000000"/>
+                </a:solidFill>
+                <a:latin typeface="Geist" pitchFamily="34" charset="0"/>
+                <a:ea typeface="Geist" pitchFamily="34" charset="-122"/>
+                <a:cs typeface="Geist" pitchFamily="34" charset="-120"/>
+              </a:rPr>
+              <a:t>No meeting is needed for it to fire.</a:t>
+            </a:r>
+            <a:endParaRPr lang="en-US" sz="1866" dirty="0"/>
+          </a:p>
+        </p:txBody>
+      </p:sp>
+      <p:sp>
+        <p:nvSpPr>
+          <p:cNvPr id="23" name="Shape 21"/>
+          <p:cNvSpPr/>
+          <p:nvPr/>
+        </p:nvSpPr>
+        <p:spPr>
+          <a:xfrm>
+            <a:off x="677098" y="5332016"/>
+            <a:ext cx="10834756" cy="0"/>
+          </a:xfrm>
+          <a:prstGeom prst="line">
+            <a:avLst/>
+          </a:prstGeom>
+          <a:noFill/>
+          <a:ln w="12698">
+            <a:solidFill>
+              <a:srgbClr val="000000"/>
+            </a:solidFill>
+            <a:prstDash val="solid"/>
+          </a:ln>
+        </p:spPr>
+      </p:sp>
+      <p:sp>
+        <p:nvSpPr>
+          <p:cNvPr id="24" name="Text 22"/>
+          <p:cNvSpPr/>
+          <p:nvPr/>
+        </p:nvSpPr>
+        <p:spPr>
+          <a:xfrm>
+            <a:off x="677098" y="5541566"/>
+            <a:ext cx="11051451" cy="368300"/>
+          </a:xfrm>
+          <a:prstGeom prst="rect">
+            <a:avLst/>
+          </a:prstGeom>
+          <a:noFill/>
+          <a:ln/>
+        </p:spPr>
+        <p:txBody>
+          <a:bodyPr wrap="square" lIns="0" tIns="0" rIns="0" bIns="0" rtlCol="0" anchor="t"/>
+          <a:lstStyle/>
+          <a:p>
+            <a:pPr algn="l" indent="0" marL="0">
+              <a:lnSpc>
+                <a:spcPts val="2900"/>
+              </a:lnSpc>
+              <a:buNone/>
+            </a:pPr>
+            <a:r>
+              <a:rPr lang="en-US" sz="2000" b="1" dirty="0">
+                <a:solidFill>
+                  <a:srgbClr val="000000"/>
+                </a:solidFill>
+                <a:latin typeface="Geist" pitchFamily="34" charset="0"/>
+                <a:ea typeface="Geist" pitchFamily="34" charset="-122"/>
+                <a:cs typeface="Geist" pitchFamily="34" charset="-120"/>
+              </a:rPr>
+              <a:t>A target that has never stopped anything is a dashboard with a threshold drawn on it.</a:t>
+            </a:r>
+            <a:endParaRPr lang="en-US" sz="2000" dirty="0"/>
+          </a:p>
+        </p:txBody>
+      </p:sp>
+      <p:sp>
+        <p:nvSpPr>
+          <p:cNvPr id="25" name="Text 23"/>
+          <p:cNvSpPr/>
+          <p:nvPr/>
+        </p:nvSpPr>
+        <p:spPr>
+          <a:xfrm>
+            <a:off x="677098" y="6113066"/>
+            <a:ext cx="2210331" cy="236934"/>
+          </a:xfrm>
+          <a:prstGeom prst="rect">
+            <a:avLst/>
+          </a:prstGeom>
+          <a:noFill/>
+          <a:ln/>
+        </p:spPr>
+        <p:txBody>
+          <a:bodyPr wrap="square" lIns="0" tIns="0" rIns="0" bIns="0" rtlCol="0" anchor="t"/>
+          <a:lstStyle/>
+          <a:p>
+            <a:pPr algn="l" indent="0" marL="0">
+              <a:lnSpc>
+                <a:spcPts val="1866"/>
+              </a:lnSpc>
+              <a:buNone/>
+            </a:pPr>
+            <a:r>
+              <a:rPr lang="en-US" sz="1333" dirty="0">
+                <a:solidFill>
+                  <a:srgbClr val="666666"/>
+                </a:solidFill>
+                <a:latin typeface="GeistMono" pitchFamily="34" charset="0"/>
+                <a:ea typeface="GeistMono" pitchFamily="34" charset="-122"/>
+                <a:cs typeface="GeistMono" pitchFamily="34" charset="-120"/>
+              </a:rPr>
+              <a:t>SLO · OPERATING NOTE</a:t>
+            </a:r>
+            <a:endParaRPr lang="en-US" sz="1333" dirty="0"/>
+          </a:p>
+        </p:txBody>
+      </p:sp>
+      <p:sp>
+        <p:nvSpPr>
+          <p:cNvPr id="26" name="Text 24"/>
+          <p:cNvSpPr/>
+          <p:nvPr/>
+        </p:nvSpPr>
+        <p:spPr>
+          <a:xfrm>
+            <a:off x="6527755" y="6113066"/>
+            <a:ext cx="5083781" cy="236934"/>
+          </a:xfrm>
+          <a:prstGeom prst="rect">
+            <a:avLst/>
+          </a:prstGeom>
+          <a:noFill/>
+          <a:ln/>
+        </p:spPr>
+        <p:txBody>
+          <a:bodyPr wrap="square" lIns="0" tIns="0" rIns="0" bIns="0" rtlCol="0" anchor="t"/>
+          <a:lstStyle/>
+          <a:p>
+            <a:pPr algn="l" indent="0" marL="0">
+              <a:lnSpc>
+                <a:spcPts val="1866"/>
+              </a:lnSpc>
+              <a:buNone/>
+            </a:pPr>
+            <a:r>
+              <a:rPr lang="en-US" sz="1333" dirty="0">
+                <a:solidFill>
+                  <a:srgbClr val="666666"/>
+                </a:solidFill>
+                <a:latin typeface="GeistMono" pitchFamily="34" charset="0"/>
+                <a:ea typeface="GeistMono" pitchFamily="34" charset="-122"/>
+                <a:cs typeface="GeistMono" pitchFamily="34" charset="-120"/>
+              </a:rPr>
+              <a:t>Source: none — no figures appear in this deck.</a:t>
+            </a:r>
+            <a:endParaRPr lang="en-US" sz="1333" dirty="0"/>
+          </a:p>
+        </p:txBody>
+      </p:sp>
     </p:spTree>
   </p:cSld>
   <p:clrMapOvr>
@@ -1397,6 +3333,13 @@
 <file path=ppt/slides/slide3.xml><?xml version="1.0" encoding="utf-8"?>
 <p:sld xmlns:a="http://schemas.openxmlformats.org/drawingml/2006/main" xmlns:r="http://schemas.openxmlformats.org/officeDocument/2006/relationships" xmlns:p="http://schemas.openxmlformats.org/presentationml/2006/main">
   <p:cSld name="Slide 3">
+    <p:bg>
+      <p:bgPr>
+        <a:solidFill>
+          <a:srgbClr val="FFFFFF"/>
+        </a:solidFill>
+      </p:bgPr>
+    </p:bg>
     <p:spTree>
       <p:nvGrpSpPr>
         <p:cNvPr id="1" name=""/>
@@ -1411,30 +3354,941 @@
           <a:chExt cx="0" cy="0"/>
         </a:xfrm>
       </p:grpSpPr>
+      <p:sp>
+        <p:nvSpPr>
+          <p:cNvPr id="2" name="Text 0"/>
+          <p:cNvSpPr/>
+          <p:nvPr/>
+        </p:nvSpPr>
+        <p:spPr>
+          <a:xfrm>
+            <a:off x="677098" y="406400"/>
+            <a:ext cx="1862481" cy="260747"/>
+          </a:xfrm>
+          <a:prstGeom prst="rect">
+            <a:avLst/>
+          </a:prstGeom>
+          <a:noFill/>
+          <a:ln/>
+        </p:spPr>
+        <p:txBody>
+          <a:bodyPr wrap="square" lIns="0" tIns="0" rIns="0" bIns="0" rtlCol="0" anchor="t"/>
+          <a:lstStyle/>
+          <a:p>
+            <a:pPr algn="l" indent="0" marL="0">
+              <a:lnSpc>
+                <a:spcPts val="2053"/>
+              </a:lnSpc>
+              <a:buNone/>
+            </a:pPr>
+            <a:r>
+              <a:rPr lang="en-US" sz="1466" dirty="0">
+                <a:solidFill>
+                  <a:srgbClr val="666666"/>
+                </a:solidFill>
+                <a:latin typeface="GeistMono" pitchFamily="34" charset="0"/>
+                <a:ea typeface="GeistMono" pitchFamily="34" charset="-122"/>
+                <a:cs typeface="GeistMono" pitchFamily="34" charset="-120"/>
+              </a:rPr>
+              <a:t>03 · THE BUDGET</a:t>
+            </a:r>
+            <a:endParaRPr lang="en-US" sz="1466" dirty="0"/>
+          </a:p>
+        </p:txBody>
+      </p:sp>
+      <p:sp>
+        <p:nvSpPr>
+          <p:cNvPr id="3" name="Text 1"/>
+          <p:cNvSpPr/>
+          <p:nvPr/>
+        </p:nvSpPr>
+        <p:spPr>
+          <a:xfrm>
+            <a:off x="9929314" y="406400"/>
+            <a:ext cx="1614191" cy="260747"/>
+          </a:xfrm>
+          <a:prstGeom prst="rect">
+            <a:avLst/>
+          </a:prstGeom>
+          <a:noFill/>
+          <a:ln/>
+        </p:spPr>
+        <p:txBody>
+          <a:bodyPr wrap="square" lIns="0" tIns="0" rIns="0" bIns="0" rtlCol="0" anchor="t"/>
+          <a:lstStyle/>
+          <a:p>
+            <a:pPr algn="l" indent="0" marL="0">
+              <a:lnSpc>
+                <a:spcPts val="2053"/>
+              </a:lnSpc>
+              <a:buNone/>
+            </a:pPr>
+            <a:r>
+              <a:rPr lang="en-US" sz="1466" dirty="0">
+                <a:solidFill>
+                  <a:srgbClr val="666666"/>
+                </a:solidFill>
+                <a:latin typeface="GeistMono" pitchFamily="34" charset="0"/>
+                <a:ea typeface="GeistMono" pitchFamily="34" charset="-122"/>
+                <a:cs typeface="GeistMono" pitchFamily="34" charset="-120"/>
+              </a:rPr>
+              <a:t>SHEET 03 / 06</a:t>
+            </a:r>
+            <a:endParaRPr lang="en-US" sz="1466" dirty="0"/>
+          </a:p>
+        </p:txBody>
+      </p:sp>
+      <p:sp>
+        <p:nvSpPr>
+          <p:cNvPr id="4" name="Text 2"/>
+          <p:cNvSpPr/>
+          <p:nvPr/>
+        </p:nvSpPr>
+        <p:spPr>
+          <a:xfrm>
+            <a:off x="677098" y="768747"/>
+            <a:ext cx="11051451" cy="506214"/>
+          </a:xfrm>
+          <a:prstGeom prst="rect">
+            <a:avLst/>
+          </a:prstGeom>
+          <a:noFill/>
+          <a:ln/>
+        </p:spPr>
+        <p:txBody>
+          <a:bodyPr wrap="square" lIns="0" tIns="0" rIns="0" bIns="0" rtlCol="0" anchor="t"/>
+          <a:lstStyle/>
+          <a:p>
+            <a:pPr algn="l" indent="0" marL="0">
+              <a:lnSpc>
+                <a:spcPts val="3986"/>
+              </a:lnSpc>
+              <a:buNone/>
+            </a:pPr>
+            <a:r>
+              <a:rPr lang="en-US" sz="3066" b="1" dirty="0">
+                <a:solidFill>
+                  <a:srgbClr val="000000"/>
+                </a:solidFill>
+                <a:latin typeface="Geist" pitchFamily="34" charset="0"/>
+                <a:ea typeface="Geist" pitchFamily="34" charset="-122"/>
+                <a:cs typeface="Geist" pitchFamily="34" charset="-120"/>
+              </a:rPr>
+              <a:t>The error budget is the part that actually stops work</a:t>
+            </a:r>
+            <a:endParaRPr lang="en-US" sz="3066" dirty="0"/>
+          </a:p>
+        </p:txBody>
+      </p:sp>
+      <p:sp>
+        <p:nvSpPr>
+          <p:cNvPr id="5" name="Text 3"/>
+          <p:cNvSpPr/>
+          <p:nvPr/>
+        </p:nvSpPr>
+        <p:spPr>
+          <a:xfrm>
+            <a:off x="677098" y="1444228"/>
+            <a:ext cx="10834756" cy="12700"/>
+          </a:xfrm>
+          <a:prstGeom prst="rect">
+            <a:avLst/>
+          </a:prstGeom>
+          <a:solidFill>
+            <a:srgbClr val="000000"/>
+          </a:solidFill>
+          <a:ln/>
+        </p:spPr>
+        <p:txBody>
+          <a:bodyPr wrap="square" rtlCol="0" anchor="ctr"/>
+          <a:lstStyle/>
+          <a:p>
+            <a:pPr indent="0" marL="0">
+              <a:buNone/>
+            </a:pPr>
+            <a:endParaRPr lang="en-US" dirty="0"/>
+          </a:p>
+        </p:txBody>
+      </p:sp>
+      <p:sp>
+        <p:nvSpPr>
+          <p:cNvPr id="6" name="Text 4"/>
+          <p:cNvSpPr/>
+          <p:nvPr/>
+        </p:nvSpPr>
+        <p:spPr>
+          <a:xfrm>
+            <a:off x="689795" y="1791295"/>
+            <a:ext cx="2426042" cy="396081"/>
+          </a:xfrm>
+          <a:prstGeom prst="rect">
+            <a:avLst/>
+          </a:prstGeom>
+          <a:noFill/>
+          <a:ln/>
+        </p:spPr>
+        <p:txBody>
+          <a:bodyPr wrap="square" lIns="169312" tIns="135450" rIns="169312" bIns="0" rtlCol="0" anchor="t"/>
+          <a:lstStyle/>
+          <a:p>
+            <a:pPr algn="l" indent="0" marL="0">
+              <a:lnSpc>
+                <a:spcPts val="2053"/>
+              </a:lnSpc>
+              <a:buNone/>
+            </a:pPr>
+            <a:r>
+              <a:rPr lang="en-US" sz="1466" dirty="0">
+                <a:solidFill>
+                  <a:srgbClr val="666666"/>
+                </a:solidFill>
+                <a:latin typeface="GeistMono" pitchFamily="34" charset="0"/>
+                <a:ea typeface="GeistMono" pitchFamily="34" charset="-122"/>
+                <a:cs typeface="GeistMono" pitchFamily="34" charset="-120"/>
+              </a:rPr>
+              <a:t>01</a:t>
+            </a:r>
+            <a:endParaRPr lang="en-US" sz="1466" dirty="0"/>
+          </a:p>
+        </p:txBody>
+      </p:sp>
+      <p:sp>
+        <p:nvSpPr>
+          <p:cNvPr id="7" name="Text 5"/>
+          <p:cNvSpPr/>
+          <p:nvPr/>
+        </p:nvSpPr>
+        <p:spPr>
+          <a:xfrm>
+            <a:off x="689795" y="2187377"/>
+            <a:ext cx="2426042" cy="579834"/>
+          </a:xfrm>
+          <a:prstGeom prst="rect">
+            <a:avLst/>
+          </a:prstGeom>
+          <a:noFill/>
+          <a:ln/>
+        </p:spPr>
+        <p:txBody>
+          <a:bodyPr wrap="square" lIns="169312" tIns="67725" rIns="169312" bIns="169312" rtlCol="0" anchor="t"/>
+          <a:lstStyle/>
+          <a:p>
+            <a:pPr algn="l" indent="0" marL="0">
+              <a:lnSpc>
+                <a:spcPts val="2700"/>
+              </a:lnSpc>
+              <a:buNone/>
+            </a:pPr>
+            <a:r>
+              <a:rPr lang="en-US" sz="2000" b="1" dirty="0">
+                <a:solidFill>
+                  <a:srgbClr val="000000"/>
+                </a:solidFill>
+                <a:latin typeface="Geist" pitchFamily="34" charset="0"/>
+                <a:ea typeface="Geist" pitchFamily="34" charset="-122"/>
+                <a:cs typeface="Geist" pitchFamily="34" charset="-120"/>
+              </a:rPr>
+              <a:t>Name the target</a:t>
+            </a:r>
+            <a:endParaRPr lang="en-US" sz="2000" dirty="0"/>
+          </a:p>
+        </p:txBody>
+      </p:sp>
       <p:pic>
         <p:nvPicPr>
-          <p:cNvPr id="2" name="Image 0" descr="/tmp/slide-1787841960117-ui7xvjqyz2.png">    </p:cNvPr>
+          <p:cNvPr id="8" name="Image 0" descr="preencoded.png">    </p:cNvPr>
           <p:cNvPicPr>
             <a:picLocks noChangeAspect="1"/>
           </p:cNvPicPr>
           <p:nvPr/>
         </p:nvPicPr>
         <p:blipFill>
-          <a:blip r:embed="rId1"/>
+          <a:blip r:embed="rId1">
+            <a:extLst>
+              <a:ext uri="{96DAC541-7B7A-43D3-8B79-37D633B846F1}">
+                <asvg:svgBlip xmlns:asvg="http://schemas.microsoft.com/office/drawing/2016/SVG/main" r:embed="rId2"/>
+              </a:ext>
+            </a:extLst>
+          </a:blip>
           <a:stretch>
             <a:fillRect/>
           </a:stretch>
         </p:blipFill>
         <p:spPr>
           <a:xfrm>
-            <a:off x="0" y="0"/>
-            <a:ext cx="12188952" cy="6858000"/>
+            <a:off x="3080964" y="2186186"/>
+            <a:ext cx="406298" cy="135334"/>
           </a:xfrm>
           <a:prstGeom prst="rect">
             <a:avLst/>
           </a:prstGeom>
         </p:spPr>
       </p:pic>
+      <p:sp>
+        <p:nvSpPr>
+          <p:cNvPr id="9" name="Text 6"/>
+          <p:cNvSpPr/>
+          <p:nvPr/>
+        </p:nvSpPr>
+        <p:spPr>
+          <a:xfrm>
+            <a:off x="3499959" y="1791295"/>
+            <a:ext cx="2426042" cy="396081"/>
+          </a:xfrm>
+          <a:prstGeom prst="rect">
+            <a:avLst/>
+          </a:prstGeom>
+          <a:noFill/>
+          <a:ln/>
+        </p:spPr>
+        <p:txBody>
+          <a:bodyPr wrap="square" lIns="169312" tIns="135450" rIns="169312" bIns="0" rtlCol="0" anchor="t"/>
+          <a:lstStyle/>
+          <a:p>
+            <a:pPr algn="l" indent="0" marL="0">
+              <a:lnSpc>
+                <a:spcPts val="2053"/>
+              </a:lnSpc>
+              <a:buNone/>
+            </a:pPr>
+            <a:r>
+              <a:rPr lang="en-US" sz="1466" dirty="0">
+                <a:solidFill>
+                  <a:srgbClr val="666666"/>
+                </a:solidFill>
+                <a:latin typeface="GeistMono" pitchFamily="34" charset="0"/>
+                <a:ea typeface="GeistMono" pitchFamily="34" charset="-122"/>
+                <a:cs typeface="GeistMono" pitchFamily="34" charset="-120"/>
+              </a:rPr>
+              <a:t>02</a:t>
+            </a:r>
+            <a:endParaRPr lang="en-US" sz="1466" dirty="0"/>
+          </a:p>
+        </p:txBody>
+      </p:sp>
+      <p:sp>
+        <p:nvSpPr>
+          <p:cNvPr id="10" name="Text 7"/>
+          <p:cNvSpPr/>
+          <p:nvPr/>
+        </p:nvSpPr>
+        <p:spPr>
+          <a:xfrm>
+            <a:off x="3499959" y="2187377"/>
+            <a:ext cx="2426042" cy="579834"/>
+          </a:xfrm>
+          <a:prstGeom prst="rect">
+            <a:avLst/>
+          </a:prstGeom>
+          <a:noFill/>
+          <a:ln/>
+        </p:spPr>
+        <p:txBody>
+          <a:bodyPr wrap="square" lIns="169312" tIns="67725" rIns="169312" bIns="169312" rtlCol="0" anchor="t"/>
+          <a:lstStyle/>
+          <a:p>
+            <a:pPr algn="l" indent="0" marL="0">
+              <a:lnSpc>
+                <a:spcPts val="2700"/>
+              </a:lnSpc>
+              <a:buNone/>
+            </a:pPr>
+            <a:r>
+              <a:rPr lang="en-US" sz="2000" b="1" dirty="0">
+                <a:solidFill>
+                  <a:srgbClr val="000000"/>
+                </a:solidFill>
+                <a:latin typeface="Geist" pitchFamily="34" charset="0"/>
+                <a:ea typeface="Geist" pitchFamily="34" charset="-122"/>
+                <a:cs typeface="Geist" pitchFamily="34" charset="-120"/>
+              </a:rPr>
+              <a:t>Spend the budget</a:t>
+            </a:r>
+            <a:endParaRPr lang="en-US" sz="2000" dirty="0"/>
+          </a:p>
+        </p:txBody>
+      </p:sp>
+      <p:pic>
+        <p:nvPicPr>
+          <p:cNvPr id="11" name="Image 1" descr="preencoded.png">    </p:cNvPr>
+          <p:cNvPicPr>
+            <a:picLocks noChangeAspect="1"/>
+          </p:cNvPicPr>
+          <p:nvPr/>
+        </p:nvPicPr>
+        <p:blipFill>
+          <a:blip r:embed="rId3">
+            <a:extLst>
+              <a:ext uri="{96DAC541-7B7A-43D3-8B79-37D633B846F1}">
+                <asvg:svgBlip xmlns:asvg="http://schemas.microsoft.com/office/drawing/2016/SVG/main" r:embed="rId4"/>
+              </a:ext>
+            </a:extLst>
+          </a:blip>
+          <a:stretch>
+            <a:fillRect/>
+          </a:stretch>
+        </p:blipFill>
+        <p:spPr>
+          <a:xfrm>
+            <a:off x="5891128" y="2186186"/>
+            <a:ext cx="406298" cy="135334"/>
+          </a:xfrm>
+          <a:prstGeom prst="rect">
+            <a:avLst/>
+          </a:prstGeom>
+        </p:spPr>
+      </p:pic>
+      <p:sp>
+        <p:nvSpPr>
+          <p:cNvPr id="12" name="Text 8"/>
+          <p:cNvSpPr/>
+          <p:nvPr/>
+        </p:nvSpPr>
+        <p:spPr>
+          <a:xfrm>
+            <a:off x="6310124" y="1791295"/>
+            <a:ext cx="2426042" cy="396081"/>
+          </a:xfrm>
+          <a:prstGeom prst="rect">
+            <a:avLst/>
+          </a:prstGeom>
+          <a:noFill/>
+          <a:ln/>
+        </p:spPr>
+        <p:txBody>
+          <a:bodyPr wrap="square" lIns="169312" tIns="135450" rIns="169312" bIns="0" rtlCol="0" anchor="t"/>
+          <a:lstStyle/>
+          <a:p>
+            <a:pPr algn="l" indent="0" marL="0">
+              <a:lnSpc>
+                <a:spcPts val="2053"/>
+              </a:lnSpc>
+              <a:buNone/>
+            </a:pPr>
+            <a:r>
+              <a:rPr lang="en-US" sz="1466" dirty="0">
+                <a:solidFill>
+                  <a:srgbClr val="666666"/>
+                </a:solidFill>
+                <a:latin typeface="GeistMono" pitchFamily="34" charset="0"/>
+                <a:ea typeface="GeistMono" pitchFamily="34" charset="-122"/>
+                <a:cs typeface="GeistMono" pitchFamily="34" charset="-120"/>
+              </a:rPr>
+              <a:t>03</a:t>
+            </a:r>
+            <a:endParaRPr lang="en-US" sz="1466" dirty="0"/>
+          </a:p>
+        </p:txBody>
+      </p:sp>
+      <p:sp>
+        <p:nvSpPr>
+          <p:cNvPr id="13" name="Text 9"/>
+          <p:cNvSpPr/>
+          <p:nvPr/>
+        </p:nvSpPr>
+        <p:spPr>
+          <a:xfrm>
+            <a:off x="6310124" y="2187377"/>
+            <a:ext cx="2426042" cy="579834"/>
+          </a:xfrm>
+          <a:prstGeom prst="rect">
+            <a:avLst/>
+          </a:prstGeom>
+          <a:noFill/>
+          <a:ln/>
+        </p:spPr>
+        <p:txBody>
+          <a:bodyPr wrap="square" lIns="169312" tIns="67725" rIns="169312" bIns="169312" rtlCol="0" anchor="t"/>
+          <a:lstStyle/>
+          <a:p>
+            <a:pPr algn="l" indent="0" marL="0">
+              <a:lnSpc>
+                <a:spcPts val="2700"/>
+              </a:lnSpc>
+              <a:buNone/>
+            </a:pPr>
+            <a:r>
+              <a:rPr lang="en-US" sz="2000" b="1" dirty="0">
+                <a:solidFill>
+                  <a:srgbClr val="000000"/>
+                </a:solidFill>
+                <a:latin typeface="Geist" pitchFamily="34" charset="0"/>
+                <a:ea typeface="Geist" pitchFamily="34" charset="-122"/>
+                <a:cs typeface="Geist" pitchFamily="34" charset="-120"/>
+              </a:rPr>
+              <a:t>Hit the floor</a:t>
+            </a:r>
+            <a:endParaRPr lang="en-US" sz="2000" dirty="0"/>
+          </a:p>
+        </p:txBody>
+      </p:sp>
+      <p:pic>
+        <p:nvPicPr>
+          <p:cNvPr id="14" name="Image 2" descr="preencoded.png">    </p:cNvPr>
+          <p:cNvPicPr>
+            <a:picLocks noChangeAspect="1"/>
+          </p:cNvPicPr>
+          <p:nvPr/>
+        </p:nvPicPr>
+        <p:blipFill>
+          <a:blip r:embed="rId5">
+            <a:extLst>
+              <a:ext uri="{96DAC541-7B7A-43D3-8B79-37D633B846F1}">
+                <asvg:svgBlip xmlns:asvg="http://schemas.microsoft.com/office/drawing/2016/SVG/main" r:embed="rId6"/>
+              </a:ext>
+            </a:extLst>
+          </a:blip>
+          <a:stretch>
+            <a:fillRect/>
+          </a:stretch>
+        </p:blipFill>
+        <p:spPr>
+          <a:xfrm>
+            <a:off x="8701293" y="2186186"/>
+            <a:ext cx="406298" cy="135334"/>
+          </a:xfrm>
+          <a:prstGeom prst="rect">
+            <a:avLst/>
+          </a:prstGeom>
+        </p:spPr>
+      </p:pic>
+      <p:sp>
+        <p:nvSpPr>
+          <p:cNvPr id="15" name="Text 10"/>
+          <p:cNvSpPr/>
+          <p:nvPr/>
+        </p:nvSpPr>
+        <p:spPr>
+          <a:xfrm>
+            <a:off x="9120288" y="1740495"/>
+            <a:ext cx="2378472" cy="50800"/>
+          </a:xfrm>
+          <a:prstGeom prst="rect">
+            <a:avLst/>
+          </a:prstGeom>
+          <a:solidFill>
+            <a:srgbClr val="000000"/>
+          </a:solidFill>
+          <a:ln/>
+        </p:spPr>
+        <p:txBody>
+          <a:bodyPr wrap="square" rtlCol="0" anchor="ctr"/>
+          <a:lstStyle/>
+          <a:p>
+            <a:pPr indent="0" marL="0">
+              <a:buNone/>
+            </a:pPr>
+            <a:endParaRPr lang="en-US" dirty="0"/>
+          </a:p>
+        </p:txBody>
+      </p:sp>
+      <p:sp>
+        <p:nvSpPr>
+          <p:cNvPr id="16" name="Text 11"/>
+          <p:cNvSpPr/>
+          <p:nvPr/>
+        </p:nvSpPr>
+        <p:spPr>
+          <a:xfrm>
+            <a:off x="9120288" y="1791295"/>
+            <a:ext cx="2426042" cy="396081"/>
+          </a:xfrm>
+          <a:prstGeom prst="rect">
+            <a:avLst/>
+          </a:prstGeom>
+          <a:noFill/>
+          <a:ln/>
+        </p:spPr>
+        <p:txBody>
+          <a:bodyPr wrap="square" lIns="169312" tIns="135450" rIns="169312" bIns="0" rtlCol="0" anchor="t"/>
+          <a:lstStyle/>
+          <a:p>
+            <a:pPr algn="l" indent="0" marL="0">
+              <a:lnSpc>
+                <a:spcPts val="2053"/>
+              </a:lnSpc>
+              <a:buNone/>
+            </a:pPr>
+            <a:r>
+              <a:rPr lang="en-US" sz="1466" dirty="0">
+                <a:solidFill>
+                  <a:srgbClr val="000000"/>
+                </a:solidFill>
+                <a:latin typeface="GeistMono" pitchFamily="34" charset="0"/>
+                <a:ea typeface="GeistMono" pitchFamily="34" charset="-122"/>
+                <a:cs typeface="GeistMono" pitchFamily="34" charset="-120"/>
+              </a:rPr>
+              <a:t>04</a:t>
+            </a:r>
+            <a:endParaRPr lang="en-US" sz="1466" dirty="0"/>
+          </a:p>
+        </p:txBody>
+      </p:sp>
+      <p:sp>
+        <p:nvSpPr>
+          <p:cNvPr id="17" name="Text 12"/>
+          <p:cNvSpPr/>
+          <p:nvPr/>
+        </p:nvSpPr>
+        <p:spPr>
+          <a:xfrm>
+            <a:off x="9120288" y="2187377"/>
+            <a:ext cx="2426042" cy="579834"/>
+          </a:xfrm>
+          <a:prstGeom prst="rect">
+            <a:avLst/>
+          </a:prstGeom>
+          <a:noFill/>
+          <a:ln/>
+        </p:spPr>
+        <p:txBody>
+          <a:bodyPr wrap="square" lIns="169312" tIns="67725" rIns="169312" bIns="169312" rtlCol="0" anchor="t"/>
+          <a:lstStyle/>
+          <a:p>
+            <a:pPr algn="l" indent="0" marL="0">
+              <a:lnSpc>
+                <a:spcPts val="2700"/>
+              </a:lnSpc>
+              <a:buNone/>
+            </a:pPr>
+            <a:r>
+              <a:rPr lang="en-US" sz="2000" b="1" dirty="0">
+                <a:solidFill>
+                  <a:srgbClr val="000000"/>
+                </a:solidFill>
+                <a:latin typeface="Geist" pitchFamily="34" charset="0"/>
+                <a:ea typeface="Geist" pitchFamily="34" charset="-122"/>
+                <a:cs typeface="Geist" pitchFamily="34" charset="-120"/>
+              </a:rPr>
+              <a:t>Stop the work</a:t>
+            </a:r>
+            <a:endParaRPr lang="en-US" sz="2000" dirty="0"/>
+          </a:p>
+        </p:txBody>
+      </p:sp>
+      <p:sp>
+        <p:nvSpPr>
+          <p:cNvPr id="18" name="Text 13"/>
+          <p:cNvSpPr/>
+          <p:nvPr/>
+        </p:nvSpPr>
+        <p:spPr>
+          <a:xfrm>
+            <a:off x="677098" y="3300413"/>
+            <a:ext cx="5318514" cy="260747"/>
+          </a:xfrm>
+          <a:prstGeom prst="rect">
+            <a:avLst/>
+          </a:prstGeom>
+          <a:noFill/>
+          <a:ln/>
+        </p:spPr>
+        <p:txBody>
+          <a:bodyPr wrap="square" lIns="0" tIns="0" rIns="0" bIns="0" rtlCol="0" anchor="t"/>
+          <a:lstStyle/>
+          <a:p>
+            <a:pPr algn="l" indent="0" marL="0">
+              <a:lnSpc>
+                <a:spcPts val="2053"/>
+              </a:lnSpc>
+              <a:spcAft>
+                <a:spcPts val="1067"/>
+              </a:spcAft>
+              <a:buNone/>
+            </a:pPr>
+            <a:r>
+              <a:rPr lang="en-US" sz="1466" dirty="0">
+                <a:solidFill>
+                  <a:srgbClr val="666666"/>
+                </a:solidFill>
+                <a:latin typeface="GeistMono" pitchFamily="34" charset="0"/>
+                <a:ea typeface="GeistMono" pitchFamily="34" charset="-122"/>
+                <a:cs typeface="GeistMono" pitchFamily="34" charset="-120"/>
+              </a:rPr>
+              <a:t>WHAT MAKES IT A BUDGET</a:t>
+            </a:r>
+            <a:endParaRPr lang="en-US" sz="1466" dirty="0"/>
+          </a:p>
+        </p:txBody>
+      </p:sp>
+      <p:sp>
+        <p:nvSpPr>
+          <p:cNvPr id="19" name="Text 14"/>
+          <p:cNvSpPr/>
+          <p:nvPr/>
+        </p:nvSpPr>
+        <p:spPr>
+          <a:xfrm>
+            <a:off x="677098" y="3696494"/>
+            <a:ext cx="5318514" cy="1374775"/>
+          </a:xfrm>
+          <a:prstGeom prst="rect">
+            <a:avLst/>
+          </a:prstGeom>
+          <a:noFill/>
+          <a:ln/>
+        </p:spPr>
+        <p:txBody>
+          <a:bodyPr wrap="square" lIns="0" tIns="0" rIns="0" bIns="0" rtlCol="0" anchor="t"/>
+          <a:lstStyle/>
+          <a:p>
+            <a:pPr algn="l" indent="0" marL="0">
+              <a:lnSpc>
+                <a:spcPts val="2706"/>
+              </a:lnSpc>
+              <a:buNone/>
+            </a:pPr>
+            <a:r>
+              <a:rPr lang="en-US" sz="1866" dirty="0">
+                <a:solidFill>
+                  <a:srgbClr val="000000"/>
+                </a:solidFill>
+                <a:latin typeface="Geist" pitchFamily="34" charset="0"/>
+                <a:ea typeface="Geist" pitchFamily="34" charset="-122"/>
+                <a:cs typeface="Geist" pitchFamily="34" charset="-120"/>
+              </a:rPr>
+              <a:t>Every failed request draws down the same account. Nobody has to agree that the service is bad — the account has already said so, and it says so the same way every week.</a:t>
+            </a:r>
+            <a:endParaRPr lang="en-US" sz="1866" dirty="0"/>
+          </a:p>
+        </p:txBody>
+      </p:sp>
+      <p:sp>
+        <p:nvSpPr>
+          <p:cNvPr id="20" name="Text 15"/>
+          <p:cNvSpPr/>
+          <p:nvPr/>
+        </p:nvSpPr>
+        <p:spPr>
+          <a:xfrm>
+            <a:off x="6297625" y="3300413"/>
+            <a:ext cx="5318514" cy="260747"/>
+          </a:xfrm>
+          <a:prstGeom prst="rect">
+            <a:avLst/>
+          </a:prstGeom>
+          <a:noFill/>
+          <a:ln/>
+        </p:spPr>
+        <p:txBody>
+          <a:bodyPr wrap="square" lIns="0" tIns="0" rIns="0" bIns="0" rtlCol="0" anchor="t"/>
+          <a:lstStyle/>
+          <a:p>
+            <a:pPr algn="l" indent="0" marL="0">
+              <a:lnSpc>
+                <a:spcPts val="2053"/>
+              </a:lnSpc>
+              <a:spcAft>
+                <a:spcPts val="1067"/>
+              </a:spcAft>
+              <a:buNone/>
+            </a:pPr>
+            <a:r>
+              <a:rPr lang="en-US" sz="1466" dirty="0">
+                <a:solidFill>
+                  <a:srgbClr val="666666"/>
+                </a:solidFill>
+                <a:latin typeface="GeistMono" pitchFamily="34" charset="0"/>
+                <a:ea typeface="GeistMono" pitchFamily="34" charset="-122"/>
+                <a:cs typeface="GeistMono" pitchFamily="34" charset="-120"/>
+              </a:rPr>
+              <a:t>WHAT MAKES IT A SWITCH</a:t>
+            </a:r>
+            <a:endParaRPr lang="en-US" sz="1466" dirty="0"/>
+          </a:p>
+        </p:txBody>
+      </p:sp>
+      <p:sp>
+        <p:nvSpPr>
+          <p:cNvPr id="21" name="Text 16"/>
+          <p:cNvSpPr/>
+          <p:nvPr/>
+        </p:nvSpPr>
+        <p:spPr>
+          <a:xfrm>
+            <a:off x="6297625" y="3696494"/>
+            <a:ext cx="5318514" cy="1374775"/>
+          </a:xfrm>
+          <a:prstGeom prst="rect">
+            <a:avLst/>
+          </a:prstGeom>
+          <a:noFill/>
+          <a:ln/>
+        </p:spPr>
+        <p:txBody>
+          <a:bodyPr wrap="square" lIns="0" tIns="0" rIns="0" bIns="0" rtlCol="0" anchor="t"/>
+          <a:lstStyle/>
+          <a:p>
+            <a:pPr algn="l" indent="0" marL="0">
+              <a:lnSpc>
+                <a:spcPts val="2706"/>
+              </a:lnSpc>
+              <a:buNone/>
+            </a:pPr>
+            <a:r>
+              <a:rPr lang="en-US" sz="1866" dirty="0">
+                <a:solidFill>
+                  <a:srgbClr val="000000"/>
+                </a:solidFill>
+                <a:latin typeface="Geist" pitchFamily="34" charset="0"/>
+                <a:ea typeface="Geist" pitchFamily="34" charset="-122"/>
+                <a:cs typeface="Geist" pitchFamily="34" charset="-120"/>
+              </a:rPr>
+              <a:t>Reaching the floor is not a discussion item. It is the condition on a rule written before anyone was upset, and a rule spent with no consequence was never a rule.</a:t>
+            </a:r>
+            <a:endParaRPr lang="en-US" sz="1866" dirty="0"/>
+          </a:p>
+        </p:txBody>
+      </p:sp>
+      <p:sp>
+        <p:nvSpPr>
+          <p:cNvPr id="22" name="Shape 17"/>
+          <p:cNvSpPr/>
+          <p:nvPr/>
+        </p:nvSpPr>
+        <p:spPr>
+          <a:xfrm>
+            <a:off x="677098" y="5332016"/>
+            <a:ext cx="10834756" cy="0"/>
+          </a:xfrm>
+          <a:prstGeom prst="line">
+            <a:avLst/>
+          </a:prstGeom>
+          <a:noFill/>
+          <a:ln w="12698">
+            <a:solidFill>
+              <a:srgbClr val="000000"/>
+            </a:solidFill>
+            <a:prstDash val="solid"/>
+          </a:ln>
+        </p:spPr>
+      </p:sp>
+      <p:sp>
+        <p:nvSpPr>
+          <p:cNvPr id="23" name="Text 18"/>
+          <p:cNvSpPr/>
+          <p:nvPr/>
+        </p:nvSpPr>
+        <p:spPr>
+          <a:xfrm>
+            <a:off x="677098" y="5541566"/>
+            <a:ext cx="11051451" cy="368300"/>
+          </a:xfrm>
+          <a:prstGeom prst="rect">
+            <a:avLst/>
+          </a:prstGeom>
+          <a:noFill/>
+          <a:ln/>
+        </p:spPr>
+        <p:txBody>
+          <a:bodyPr wrap="square" lIns="0" tIns="0" rIns="0" bIns="0" rtlCol="0" anchor="t"/>
+          <a:lstStyle/>
+          <a:p>
+            <a:pPr algn="l" indent="0" marL="0">
+              <a:lnSpc>
+                <a:spcPts val="2900"/>
+              </a:lnSpc>
+              <a:buNone/>
+            </a:pPr>
+            <a:r>
+              <a:rPr lang="en-US" sz="2000" b="1" dirty="0">
+                <a:solidFill>
+                  <a:srgbClr val="000000"/>
+                </a:solidFill>
+                <a:latin typeface="Geist" pitchFamily="34" charset="0"/>
+                <a:ea typeface="Geist" pitchFamily="34" charset="-122"/>
+                <a:cs typeface="Geist" pitchFamily="34" charset="-120"/>
+              </a:rPr>
+              <a:t>A budget nobody spends was never a promise.</a:t>
+            </a:r>
+            <a:endParaRPr lang="en-US" sz="2000" dirty="0"/>
+          </a:p>
+        </p:txBody>
+      </p:sp>
+      <p:sp>
+        <p:nvSpPr>
+          <p:cNvPr id="24" name="Text 19"/>
+          <p:cNvSpPr/>
+          <p:nvPr/>
+        </p:nvSpPr>
+        <p:spPr>
+          <a:xfrm>
+            <a:off x="677098" y="6113066"/>
+            <a:ext cx="2210331" cy="236934"/>
+          </a:xfrm>
+          <a:prstGeom prst="rect">
+            <a:avLst/>
+          </a:prstGeom>
+          <a:noFill/>
+          <a:ln/>
+        </p:spPr>
+        <p:txBody>
+          <a:bodyPr wrap="square" lIns="0" tIns="0" rIns="0" bIns="0" rtlCol="0" anchor="t"/>
+          <a:lstStyle/>
+          <a:p>
+            <a:pPr algn="l" indent="0" marL="0">
+              <a:lnSpc>
+                <a:spcPts val="1866"/>
+              </a:lnSpc>
+              <a:buNone/>
+            </a:pPr>
+            <a:r>
+              <a:rPr lang="en-US" sz="1333" dirty="0">
+                <a:solidFill>
+                  <a:srgbClr val="666666"/>
+                </a:solidFill>
+                <a:latin typeface="GeistMono" pitchFamily="34" charset="0"/>
+                <a:ea typeface="GeistMono" pitchFamily="34" charset="-122"/>
+                <a:cs typeface="GeistMono" pitchFamily="34" charset="-120"/>
+              </a:rPr>
+              <a:t>SLO · OPERATING NOTE</a:t>
+            </a:r>
+            <a:endParaRPr lang="en-US" sz="1333" dirty="0"/>
+          </a:p>
+        </p:txBody>
+      </p:sp>
+      <p:sp>
+        <p:nvSpPr>
+          <p:cNvPr id="25" name="Text 20"/>
+          <p:cNvSpPr/>
+          <p:nvPr/>
+        </p:nvSpPr>
+        <p:spPr>
+          <a:xfrm>
+            <a:off x="6527755" y="6113066"/>
+            <a:ext cx="5083781" cy="236934"/>
+          </a:xfrm>
+          <a:prstGeom prst="rect">
+            <a:avLst/>
+          </a:prstGeom>
+          <a:noFill/>
+          <a:ln/>
+        </p:spPr>
+        <p:txBody>
+          <a:bodyPr wrap="square" lIns="0" tIns="0" rIns="0" bIns="0" rtlCol="0" anchor="t"/>
+          <a:lstStyle/>
+          <a:p>
+            <a:pPr algn="l" indent="0" marL="0">
+              <a:lnSpc>
+                <a:spcPts val="1866"/>
+              </a:lnSpc>
+              <a:buNone/>
+            </a:pPr>
+            <a:r>
+              <a:rPr lang="en-US" sz="1333" dirty="0">
+                <a:solidFill>
+                  <a:srgbClr val="666666"/>
+                </a:solidFill>
+                <a:latin typeface="GeistMono" pitchFamily="34" charset="0"/>
+                <a:ea typeface="GeistMono" pitchFamily="34" charset="-122"/>
+                <a:cs typeface="GeistMono" pitchFamily="34" charset="-120"/>
+              </a:rPr>
+              <a:t>Source: none — no figures appear in this deck.</a:t>
+            </a:r>
+            <a:endParaRPr lang="en-US" sz="1333" dirty="0"/>
+          </a:p>
+        </p:txBody>
+      </p:sp>
     </p:spTree>
   </p:cSld>
   <p:clrMapOvr>
@@ -1446,6 +4300,13 @@
 <file path=ppt/slides/slide4.xml><?xml version="1.0" encoding="utf-8"?>
 <p:sld xmlns:a="http://schemas.openxmlformats.org/drawingml/2006/main" xmlns:r="http://schemas.openxmlformats.org/officeDocument/2006/relationships" xmlns:p="http://schemas.openxmlformats.org/presentationml/2006/main">
   <p:cSld name="Slide 4">
+    <p:bg>
+      <p:bgPr>
+        <a:solidFill>
+          <a:srgbClr val="FFFFFF"/>
+        </a:solidFill>
+      </p:bgPr>
+    </p:bg>
     <p:spTree>
       <p:nvGrpSpPr>
         <p:cNvPr id="1" name=""/>
@@ -1460,30 +4321,1355 @@
           <a:chExt cx="0" cy="0"/>
         </a:xfrm>
       </p:grpSpPr>
-      <p:pic>
-        <p:nvPicPr>
-          <p:cNvPr id="2" name="Image 0" descr="/tmp/slide-1787841960381-zbmwig55bwl.png">    </p:cNvPr>
-          <p:cNvPicPr>
-            <a:picLocks noChangeAspect="1"/>
-          </p:cNvPicPr>
-          <p:nvPr/>
-        </p:nvPicPr>
-        <p:blipFill>
-          <a:blip r:embed="rId1"/>
-          <a:stretch>
-            <a:fillRect/>
-          </a:stretch>
-        </p:blipFill>
-        <p:spPr>
-          <a:xfrm>
-            <a:off x="0" y="0"/>
-            <a:ext cx="12188952" cy="6858000"/>
-          </a:xfrm>
-          <a:prstGeom prst="rect">
-            <a:avLst/>
-          </a:prstGeom>
-        </p:spPr>
-      </p:pic>
+      <p:sp>
+        <p:nvSpPr>
+          <p:cNvPr id="2" name="Text 0"/>
+          <p:cNvSpPr/>
+          <p:nvPr/>
+        </p:nvSpPr>
+        <p:spPr>
+          <a:xfrm>
+            <a:off x="677098" y="406400"/>
+            <a:ext cx="2359062" cy="260747"/>
+          </a:xfrm>
+          <a:prstGeom prst="rect">
+            <a:avLst/>
+          </a:prstGeom>
+          <a:noFill/>
+          <a:ln/>
+        </p:spPr>
+        <p:txBody>
+          <a:bodyPr wrap="square" lIns="0" tIns="0" rIns="0" bIns="0" rtlCol="0" anchor="t"/>
+          <a:lstStyle/>
+          <a:p>
+            <a:pPr algn="l" indent="0" marL="0">
+              <a:lnSpc>
+                <a:spcPts val="2053"/>
+              </a:lnSpc>
+              <a:buNone/>
+            </a:pPr>
+            <a:r>
+              <a:rPr lang="en-US" sz="1466" dirty="0">
+                <a:solidFill>
+                  <a:srgbClr val="666666"/>
+                </a:solidFill>
+                <a:latin typeface="GeistMono" pitchFamily="34" charset="0"/>
+                <a:ea typeface="GeistMono" pitchFamily="34" charset="-122"/>
+                <a:cs typeface="GeistMono" pitchFamily="34" charset="-120"/>
+              </a:rPr>
+              <a:t>04 · THE EXCLUSIONS</a:t>
+            </a:r>
+            <a:endParaRPr lang="en-US" sz="1466" dirty="0"/>
+          </a:p>
+        </p:txBody>
+      </p:sp>
+      <p:sp>
+        <p:nvSpPr>
+          <p:cNvPr id="3" name="Text 1"/>
+          <p:cNvSpPr/>
+          <p:nvPr/>
+        </p:nvSpPr>
+        <p:spPr>
+          <a:xfrm>
+            <a:off x="9929314" y="406400"/>
+            <a:ext cx="1614191" cy="260747"/>
+          </a:xfrm>
+          <a:prstGeom prst="rect">
+            <a:avLst/>
+          </a:prstGeom>
+          <a:noFill/>
+          <a:ln/>
+        </p:spPr>
+        <p:txBody>
+          <a:bodyPr wrap="square" lIns="0" tIns="0" rIns="0" bIns="0" rtlCol="0" anchor="t"/>
+          <a:lstStyle/>
+          <a:p>
+            <a:pPr algn="l" indent="0" marL="0">
+              <a:lnSpc>
+                <a:spcPts val="2053"/>
+              </a:lnSpc>
+              <a:buNone/>
+            </a:pPr>
+            <a:r>
+              <a:rPr lang="en-US" sz="1466" dirty="0">
+                <a:solidFill>
+                  <a:srgbClr val="666666"/>
+                </a:solidFill>
+                <a:latin typeface="GeistMono" pitchFamily="34" charset="0"/>
+                <a:ea typeface="GeistMono" pitchFamily="34" charset="-122"/>
+                <a:cs typeface="GeistMono" pitchFamily="34" charset="-120"/>
+              </a:rPr>
+              <a:t>SHEET 04 / 06</a:t>
+            </a:r>
+            <a:endParaRPr lang="en-US" sz="1466" dirty="0"/>
+          </a:p>
+        </p:txBody>
+      </p:sp>
+      <p:sp>
+        <p:nvSpPr>
+          <p:cNvPr id="4" name="Text 2"/>
+          <p:cNvSpPr/>
+          <p:nvPr/>
+        </p:nvSpPr>
+        <p:spPr>
+          <a:xfrm>
+            <a:off x="677098" y="768747"/>
+            <a:ext cx="11051451" cy="506214"/>
+          </a:xfrm>
+          <a:prstGeom prst="rect">
+            <a:avLst/>
+          </a:prstGeom>
+          <a:noFill/>
+          <a:ln/>
+        </p:spPr>
+        <p:txBody>
+          <a:bodyPr wrap="square" lIns="0" tIns="0" rIns="0" bIns="0" rtlCol="0" anchor="t"/>
+          <a:lstStyle/>
+          <a:p>
+            <a:pPr algn="l" indent="0" marL="0">
+              <a:lnSpc>
+                <a:spcPts val="3986"/>
+              </a:lnSpc>
+              <a:buNone/>
+            </a:pPr>
+            <a:r>
+              <a:rPr lang="en-US" sz="3066" b="1" dirty="0">
+                <a:solidFill>
+                  <a:srgbClr val="000000"/>
+                </a:solidFill>
+                <a:latin typeface="Geist" pitchFamily="34" charset="0"/>
+                <a:ea typeface="Geist" pitchFamily="34" charset="-122"/>
+                <a:cs typeface="Geist" pitchFamily="34" charset="-120"/>
+              </a:rPr>
+              <a:t>The exclusions are the promise, written down</a:t>
+            </a:r>
+            <a:endParaRPr lang="en-US" sz="3066" dirty="0"/>
+          </a:p>
+        </p:txBody>
+      </p:sp>
+      <p:sp>
+        <p:nvSpPr>
+          <p:cNvPr id="5" name="Text 3"/>
+          <p:cNvSpPr/>
+          <p:nvPr/>
+        </p:nvSpPr>
+        <p:spPr>
+          <a:xfrm>
+            <a:off x="677098" y="1444228"/>
+            <a:ext cx="10834756" cy="12700"/>
+          </a:xfrm>
+          <a:prstGeom prst="rect">
+            <a:avLst/>
+          </a:prstGeom>
+          <a:solidFill>
+            <a:srgbClr val="000000"/>
+          </a:solidFill>
+          <a:ln/>
+        </p:spPr>
+        <p:txBody>
+          <a:bodyPr wrap="square" rtlCol="0" anchor="ctr"/>
+          <a:lstStyle/>
+          <a:p>
+            <a:pPr indent="0" marL="0">
+              <a:buNone/>
+            </a:pPr>
+            <a:endParaRPr lang="en-US" dirty="0"/>
+          </a:p>
+        </p:txBody>
+      </p:sp>
+      <p:sp>
+        <p:nvSpPr>
+          <p:cNvPr id="6" name="Text 4"/>
+          <p:cNvSpPr/>
+          <p:nvPr/>
+        </p:nvSpPr>
+        <p:spPr>
+          <a:xfrm>
+            <a:off x="677098" y="1727795"/>
+            <a:ext cx="10834756" cy="3327003"/>
+          </a:xfrm>
+          <a:prstGeom prst="rect">
+            <a:avLst/>
+          </a:prstGeom>
+          <a:noFill/>
+          <a:ln w="12698">
+            <a:solidFill>
+              <a:srgbClr val="000000"/>
+            </a:solidFill>
+          </a:ln>
+        </p:spPr>
+        <p:txBody>
+          <a:bodyPr wrap="square" rtlCol="0" anchor="ctr"/>
+          <a:lstStyle/>
+          <a:p>
+            <a:pPr indent="0" marL="0">
+              <a:buNone/>
+            </a:pPr>
+            <a:endParaRPr lang="en-US" dirty="0"/>
+          </a:p>
+        </p:txBody>
+      </p:sp>
+      <p:sp>
+        <p:nvSpPr>
+          <p:cNvPr id="7" name="Text 5"/>
+          <p:cNvSpPr/>
+          <p:nvPr/>
+        </p:nvSpPr>
+        <p:spPr>
+          <a:xfrm>
+            <a:off x="689795" y="1740495"/>
+            <a:ext cx="10809363" cy="594916"/>
+          </a:xfrm>
+          <a:prstGeom prst="rect">
+            <a:avLst/>
+          </a:prstGeom>
+          <a:solidFill>
+            <a:srgbClr val="F2F2F2"/>
+          </a:solidFill>
+          <a:ln/>
+        </p:spPr>
+        <p:txBody>
+          <a:bodyPr wrap="square" rtlCol="0" anchor="ctr"/>
+          <a:lstStyle/>
+          <a:p>
+            <a:pPr indent="0" marL="0">
+              <a:buNone/>
+            </a:pPr>
+            <a:endParaRPr lang="en-US" dirty="0"/>
+          </a:p>
+        </p:txBody>
+      </p:sp>
+      <p:sp>
+        <p:nvSpPr>
+          <p:cNvPr id="8" name="Shape 6"/>
+          <p:cNvSpPr/>
+          <p:nvPr/>
+        </p:nvSpPr>
+        <p:spPr>
+          <a:xfrm>
+            <a:off x="689795" y="2329061"/>
+            <a:ext cx="10809363" cy="0"/>
+          </a:xfrm>
+          <a:prstGeom prst="line">
+            <a:avLst/>
+          </a:prstGeom>
+          <a:noFill/>
+          <a:ln w="12698">
+            <a:solidFill>
+              <a:srgbClr val="000000"/>
+            </a:solidFill>
+            <a:prstDash val="solid"/>
+          </a:ln>
+        </p:spPr>
+      </p:sp>
+      <p:sp>
+        <p:nvSpPr>
+          <p:cNvPr id="9" name="Text 7"/>
+          <p:cNvSpPr/>
+          <p:nvPr/>
+        </p:nvSpPr>
+        <p:spPr>
+          <a:xfrm>
+            <a:off x="689795" y="1791295"/>
+            <a:ext cx="1874218" cy="531416"/>
+          </a:xfrm>
+          <a:prstGeom prst="rect">
+            <a:avLst/>
+          </a:prstGeom>
+          <a:noFill/>
+          <a:ln/>
+        </p:spPr>
+        <p:txBody>
+          <a:bodyPr wrap="square" lIns="203175" tIns="135450" rIns="203175" bIns="135450" rtlCol="0" anchor="t"/>
+          <a:lstStyle/>
+          <a:p>
+            <a:pPr algn="l" indent="0" marL="0">
+              <a:lnSpc>
+                <a:spcPts val="2053"/>
+              </a:lnSpc>
+              <a:buNone/>
+            </a:pPr>
+            <a:r>
+              <a:rPr lang="en-US" sz="1466" dirty="0">
+                <a:solidFill>
+                  <a:srgbClr val="666666"/>
+                </a:solidFill>
+                <a:latin typeface="GeistMono" pitchFamily="34" charset="0"/>
+                <a:ea typeface="GeistMono" pitchFamily="34" charset="-122"/>
+                <a:cs typeface="GeistMono" pitchFamily="34" charset="-120"/>
+              </a:rPr>
+              <a:t>AXIS</a:t>
+            </a:r>
+            <a:endParaRPr lang="en-US" sz="1466" dirty="0"/>
+          </a:p>
+        </p:txBody>
+      </p:sp>
+      <p:sp>
+        <p:nvSpPr>
+          <p:cNvPr id="10" name="Shape 8"/>
+          <p:cNvSpPr/>
+          <p:nvPr/>
+        </p:nvSpPr>
+        <p:spPr>
+          <a:xfrm>
+            <a:off x="2533612" y="1740495"/>
+            <a:ext cx="0" cy="582216"/>
+          </a:xfrm>
+          <a:prstGeom prst="line">
+            <a:avLst/>
+          </a:prstGeom>
+          <a:noFill/>
+          <a:ln w="12698">
+            <a:solidFill>
+              <a:srgbClr val="000000"/>
+            </a:solidFill>
+            <a:prstDash val="solid"/>
+          </a:ln>
+        </p:spPr>
+      </p:sp>
+      <p:sp>
+        <p:nvSpPr>
+          <p:cNvPr id="11" name="Text 9"/>
+          <p:cNvSpPr/>
+          <p:nvPr/>
+        </p:nvSpPr>
+        <p:spPr>
+          <a:xfrm>
+            <a:off x="2539960" y="1791295"/>
+            <a:ext cx="4562513" cy="531416"/>
+          </a:xfrm>
+          <a:prstGeom prst="rect">
+            <a:avLst/>
+          </a:prstGeom>
+          <a:noFill/>
+          <a:ln/>
+        </p:spPr>
+        <p:txBody>
+          <a:bodyPr wrap="square" lIns="203175" tIns="135450" rIns="203175" bIns="135450" rtlCol="0" anchor="t"/>
+          <a:lstStyle/>
+          <a:p>
+            <a:pPr algn="l" indent="0" marL="0">
+              <a:lnSpc>
+                <a:spcPts val="2053"/>
+              </a:lnSpc>
+              <a:buNone/>
+            </a:pPr>
+            <a:r>
+              <a:rPr lang="en-US" sz="1466" dirty="0">
+                <a:solidFill>
+                  <a:srgbClr val="666666"/>
+                </a:solidFill>
+                <a:latin typeface="GeistMono" pitchFamily="34" charset="0"/>
+                <a:ea typeface="GeistMono" pitchFamily="34" charset="-122"/>
+                <a:cs typeface="GeistMono" pitchFamily="34" charset="-120"/>
+              </a:rPr>
+              <a:t>IN THE PROMISE</a:t>
+            </a:r>
+            <a:endParaRPr lang="en-US" sz="1466" dirty="0"/>
+          </a:p>
+        </p:txBody>
+      </p:sp>
+      <p:sp>
+        <p:nvSpPr>
+          <p:cNvPr id="12" name="Shape 10"/>
+          <p:cNvSpPr/>
+          <p:nvPr/>
+        </p:nvSpPr>
+        <p:spPr>
+          <a:xfrm>
+            <a:off x="7019360" y="1740495"/>
+            <a:ext cx="0" cy="582216"/>
+          </a:xfrm>
+          <a:prstGeom prst="line">
+            <a:avLst/>
+          </a:prstGeom>
+          <a:noFill/>
+          <a:ln w="12698">
+            <a:solidFill>
+              <a:srgbClr val="000000"/>
+            </a:solidFill>
+            <a:prstDash val="solid"/>
+          </a:ln>
+        </p:spPr>
+      </p:sp>
+      <p:sp>
+        <p:nvSpPr>
+          <p:cNvPr id="13" name="Text 11"/>
+          <p:cNvSpPr/>
+          <p:nvPr/>
+        </p:nvSpPr>
+        <p:spPr>
+          <a:xfrm>
+            <a:off x="7025709" y="1740495"/>
+            <a:ext cx="4473052" cy="50800"/>
+          </a:xfrm>
+          <a:prstGeom prst="rect">
+            <a:avLst/>
+          </a:prstGeom>
+          <a:solidFill>
+            <a:srgbClr val="000000"/>
+          </a:solidFill>
+          <a:ln/>
+        </p:spPr>
+        <p:txBody>
+          <a:bodyPr wrap="square" rtlCol="0" anchor="ctr"/>
+          <a:lstStyle/>
+          <a:p>
+            <a:pPr indent="0" marL="0">
+              <a:buNone/>
+            </a:pPr>
+            <a:endParaRPr lang="en-US" dirty="0"/>
+          </a:p>
+        </p:txBody>
+      </p:sp>
+      <p:sp>
+        <p:nvSpPr>
+          <p:cNvPr id="14" name="Text 12"/>
+          <p:cNvSpPr/>
+          <p:nvPr/>
+        </p:nvSpPr>
+        <p:spPr>
+          <a:xfrm>
+            <a:off x="7025709" y="1791295"/>
+            <a:ext cx="4562513" cy="531416"/>
+          </a:xfrm>
+          <a:prstGeom prst="rect">
+            <a:avLst/>
+          </a:prstGeom>
+          <a:noFill/>
+          <a:ln/>
+        </p:spPr>
+        <p:txBody>
+          <a:bodyPr wrap="square" lIns="203175" tIns="135450" rIns="203175" bIns="135450" rtlCol="0" anchor="t"/>
+          <a:lstStyle/>
+          <a:p>
+            <a:pPr algn="l" indent="0" marL="0">
+              <a:lnSpc>
+                <a:spcPts val="2053"/>
+              </a:lnSpc>
+              <a:buNone/>
+            </a:pPr>
+            <a:r>
+              <a:rPr lang="en-US" sz="1466" dirty="0">
+                <a:solidFill>
+                  <a:srgbClr val="666666"/>
+                </a:solidFill>
+                <a:latin typeface="GeistMono" pitchFamily="34" charset="0"/>
+                <a:ea typeface="GeistMono" pitchFamily="34" charset="-122"/>
+                <a:cs typeface="GeistMono" pitchFamily="34" charset="-120"/>
+              </a:rPr>
+              <a:t>OUT, BY NAME</a:t>
+            </a:r>
+            <a:endParaRPr lang="en-US" sz="1466" dirty="0"/>
+          </a:p>
+        </p:txBody>
+      </p:sp>
+      <p:sp>
+        <p:nvSpPr>
+          <p:cNvPr id="15" name="Text 13"/>
+          <p:cNvSpPr/>
+          <p:nvPr/>
+        </p:nvSpPr>
+        <p:spPr>
+          <a:xfrm>
+            <a:off x="892944" y="2538611"/>
+            <a:ext cx="869118" cy="260747"/>
+          </a:xfrm>
+          <a:prstGeom prst="rect">
+            <a:avLst/>
+          </a:prstGeom>
+          <a:noFill/>
+          <a:ln/>
+        </p:spPr>
+        <p:txBody>
+          <a:bodyPr wrap="square" lIns="0" tIns="0" rIns="0" bIns="0" rtlCol="0" anchor="t"/>
+          <a:lstStyle/>
+          <a:p>
+            <a:pPr algn="l" indent="0" marL="0">
+              <a:lnSpc>
+                <a:spcPts val="2053"/>
+              </a:lnSpc>
+              <a:buNone/>
+            </a:pPr>
+            <a:r>
+              <a:rPr lang="en-US" sz="1466" dirty="0">
+                <a:solidFill>
+                  <a:srgbClr val="666666"/>
+                </a:solidFill>
+                <a:latin typeface="GeistMono" pitchFamily="34" charset="0"/>
+                <a:ea typeface="GeistMono" pitchFamily="34" charset="-122"/>
+                <a:cs typeface="GeistMono" pitchFamily="34" charset="-120"/>
+              </a:rPr>
+              <a:t>SURFACE</a:t>
+            </a:r>
+            <a:endParaRPr lang="en-US" sz="1466" dirty="0"/>
+          </a:p>
+        </p:txBody>
+      </p:sp>
+      <p:sp>
+        <p:nvSpPr>
+          <p:cNvPr id="16" name="Shape 14"/>
+          <p:cNvSpPr/>
+          <p:nvPr/>
+        </p:nvSpPr>
+        <p:spPr>
+          <a:xfrm>
+            <a:off x="2533612" y="2335411"/>
+            <a:ext cx="0" cy="667147"/>
+          </a:xfrm>
+          <a:prstGeom prst="line">
+            <a:avLst/>
+          </a:prstGeom>
+          <a:noFill/>
+          <a:ln w="12698">
+            <a:solidFill>
+              <a:srgbClr val="000000"/>
+            </a:solidFill>
+            <a:prstDash val="solid"/>
+          </a:ln>
+        </p:spPr>
+      </p:sp>
+      <p:sp>
+        <p:nvSpPr>
+          <p:cNvPr id="17" name="Text 15"/>
+          <p:cNvSpPr/>
+          <p:nvPr/>
+        </p:nvSpPr>
+        <p:spPr>
+          <a:xfrm>
+            <a:off x="2743109" y="2497138"/>
+            <a:ext cx="3276543" cy="343694"/>
+          </a:xfrm>
+          <a:prstGeom prst="rect">
+            <a:avLst/>
+          </a:prstGeom>
+          <a:noFill/>
+          <a:ln/>
+        </p:spPr>
+        <p:txBody>
+          <a:bodyPr wrap="square" lIns="0" tIns="0" rIns="0" bIns="0" rtlCol="0" anchor="t"/>
+          <a:lstStyle/>
+          <a:p>
+            <a:pPr algn="l" indent="0" marL="0">
+              <a:lnSpc>
+                <a:spcPts val="2706"/>
+              </a:lnSpc>
+              <a:buNone/>
+            </a:pPr>
+            <a:r>
+              <a:rPr lang="en-US" sz="1866" dirty="0">
+                <a:solidFill>
+                  <a:srgbClr val="000000"/>
+                </a:solidFill>
+                <a:latin typeface="Geist" pitchFamily="34" charset="0"/>
+                <a:ea typeface="Geist" pitchFamily="34" charset="-122"/>
+                <a:cs typeface="Geist" pitchFamily="34" charset="-120"/>
+              </a:rPr>
+              <a:t>The path a user is waiting on</a:t>
+            </a:r>
+            <a:endParaRPr lang="en-US" sz="1866" dirty="0"/>
+          </a:p>
+        </p:txBody>
+      </p:sp>
+      <p:sp>
+        <p:nvSpPr>
+          <p:cNvPr id="18" name="Shape 16"/>
+          <p:cNvSpPr/>
+          <p:nvPr/>
+        </p:nvSpPr>
+        <p:spPr>
+          <a:xfrm>
+            <a:off x="7019360" y="2335411"/>
+            <a:ext cx="0" cy="667147"/>
+          </a:xfrm>
+          <a:prstGeom prst="line">
+            <a:avLst/>
+          </a:prstGeom>
+          <a:noFill/>
+          <a:ln w="12698">
+            <a:solidFill>
+              <a:srgbClr val="000000"/>
+            </a:solidFill>
+            <a:prstDash val="solid"/>
+          </a:ln>
+        </p:spPr>
+      </p:sp>
+      <p:sp>
+        <p:nvSpPr>
+          <p:cNvPr id="19" name="Text 17"/>
+          <p:cNvSpPr/>
+          <p:nvPr/>
+        </p:nvSpPr>
+        <p:spPr>
+          <a:xfrm>
+            <a:off x="7228858" y="2497138"/>
+            <a:ext cx="3341296" cy="343694"/>
+          </a:xfrm>
+          <a:prstGeom prst="rect">
+            <a:avLst/>
+          </a:prstGeom>
+          <a:noFill/>
+          <a:ln/>
+        </p:spPr>
+        <p:txBody>
+          <a:bodyPr wrap="square" lIns="0" tIns="0" rIns="0" bIns="0" rtlCol="0" anchor="t"/>
+          <a:lstStyle/>
+          <a:p>
+            <a:pPr algn="l" indent="0" marL="0">
+              <a:lnSpc>
+                <a:spcPts val="2706"/>
+              </a:lnSpc>
+              <a:buNone/>
+            </a:pPr>
+            <a:r>
+              <a:rPr lang="en-US" sz="1866" dirty="0">
+                <a:solidFill>
+                  <a:srgbClr val="000000"/>
+                </a:solidFill>
+                <a:latin typeface="Geist" pitchFamily="34" charset="0"/>
+                <a:ea typeface="Geist" pitchFamily="34" charset="-122"/>
+                <a:cs typeface="Geist" pitchFamily="34" charset="-120"/>
+              </a:rPr>
+              <a:t>Internal jobs nobody waits on</a:t>
+            </a:r>
+            <a:endParaRPr lang="en-US" sz="1866" dirty="0"/>
+          </a:p>
+        </p:txBody>
+      </p:sp>
+      <p:sp>
+        <p:nvSpPr>
+          <p:cNvPr id="20" name="Shape 18"/>
+          <p:cNvSpPr/>
+          <p:nvPr/>
+        </p:nvSpPr>
+        <p:spPr>
+          <a:xfrm>
+            <a:off x="689795" y="3008908"/>
+            <a:ext cx="10809363" cy="0"/>
+          </a:xfrm>
+          <a:prstGeom prst="line">
+            <a:avLst/>
+          </a:prstGeom>
+          <a:noFill/>
+          <a:ln w="12698">
+            <a:solidFill>
+              <a:srgbClr val="000000"/>
+            </a:solidFill>
+            <a:prstDash val="solid"/>
+          </a:ln>
+        </p:spPr>
+      </p:sp>
+      <p:sp>
+        <p:nvSpPr>
+          <p:cNvPr id="21" name="Text 19"/>
+          <p:cNvSpPr/>
+          <p:nvPr/>
+        </p:nvSpPr>
+        <p:spPr>
+          <a:xfrm>
+            <a:off x="892944" y="3218458"/>
+            <a:ext cx="620827" cy="260747"/>
+          </a:xfrm>
+          <a:prstGeom prst="rect">
+            <a:avLst/>
+          </a:prstGeom>
+          <a:noFill/>
+          <a:ln/>
+        </p:spPr>
+        <p:txBody>
+          <a:bodyPr wrap="square" lIns="0" tIns="0" rIns="0" bIns="0" rtlCol="0" anchor="t"/>
+          <a:lstStyle/>
+          <a:p>
+            <a:pPr algn="l" indent="0" marL="0">
+              <a:lnSpc>
+                <a:spcPts val="2053"/>
+              </a:lnSpc>
+              <a:buNone/>
+            </a:pPr>
+            <a:r>
+              <a:rPr lang="en-US" sz="1466" dirty="0">
+                <a:solidFill>
+                  <a:srgbClr val="666666"/>
+                </a:solidFill>
+                <a:latin typeface="GeistMono" pitchFamily="34" charset="0"/>
+                <a:ea typeface="GeistMono" pitchFamily="34" charset="-122"/>
+                <a:cs typeface="GeistMono" pitchFamily="34" charset="-120"/>
+              </a:rPr>
+              <a:t>FAULT</a:t>
+            </a:r>
+            <a:endParaRPr lang="en-US" sz="1466" dirty="0"/>
+          </a:p>
+        </p:txBody>
+      </p:sp>
+      <p:sp>
+        <p:nvSpPr>
+          <p:cNvPr id="22" name="Shape 20"/>
+          <p:cNvSpPr/>
+          <p:nvPr/>
+        </p:nvSpPr>
+        <p:spPr>
+          <a:xfrm>
+            <a:off x="2533612" y="3015258"/>
+            <a:ext cx="0" cy="667147"/>
+          </a:xfrm>
+          <a:prstGeom prst="line">
+            <a:avLst/>
+          </a:prstGeom>
+          <a:noFill/>
+          <a:ln w="12698">
+            <a:solidFill>
+              <a:srgbClr val="000000"/>
+            </a:solidFill>
+            <a:prstDash val="solid"/>
+          </a:ln>
+        </p:spPr>
+      </p:sp>
+      <p:sp>
+        <p:nvSpPr>
+          <p:cNvPr id="23" name="Text 21"/>
+          <p:cNvSpPr/>
+          <p:nvPr/>
+        </p:nvSpPr>
+        <p:spPr>
+          <a:xfrm>
+            <a:off x="2743109" y="3176984"/>
+            <a:ext cx="3665066" cy="343694"/>
+          </a:xfrm>
+          <a:prstGeom prst="rect">
+            <a:avLst/>
+          </a:prstGeom>
+          <a:noFill/>
+          <a:ln/>
+        </p:spPr>
+        <p:txBody>
+          <a:bodyPr wrap="square" lIns="0" tIns="0" rIns="0" bIns="0" rtlCol="0" anchor="t"/>
+          <a:lstStyle/>
+          <a:p>
+            <a:pPr algn="l" indent="0" marL="0">
+              <a:lnSpc>
+                <a:spcPts val="2706"/>
+              </a:lnSpc>
+              <a:buNone/>
+            </a:pPr>
+            <a:r>
+              <a:rPr lang="en-US" sz="1866" dirty="0">
+                <a:solidFill>
+                  <a:srgbClr val="000000"/>
+                </a:solidFill>
+                <a:latin typeface="Geist" pitchFamily="34" charset="0"/>
+                <a:ea typeface="Geist" pitchFamily="34" charset="-122"/>
+                <a:cs typeface="Geist" pitchFamily="34" charset="-120"/>
+              </a:rPr>
+              <a:t>What our own edge can observe</a:t>
+            </a:r>
+            <a:endParaRPr lang="en-US" sz="1866" dirty="0"/>
+          </a:p>
+        </p:txBody>
+      </p:sp>
+      <p:sp>
+        <p:nvSpPr>
+          <p:cNvPr id="24" name="Shape 22"/>
+          <p:cNvSpPr/>
+          <p:nvPr/>
+        </p:nvSpPr>
+        <p:spPr>
+          <a:xfrm>
+            <a:off x="7019360" y="3015258"/>
+            <a:ext cx="0" cy="667147"/>
+          </a:xfrm>
+          <a:prstGeom prst="line">
+            <a:avLst/>
+          </a:prstGeom>
+          <a:noFill/>
+          <a:ln w="12698">
+            <a:solidFill>
+              <a:srgbClr val="000000"/>
+            </a:solidFill>
+            <a:prstDash val="solid"/>
+          </a:ln>
+        </p:spPr>
+      </p:sp>
+      <p:sp>
+        <p:nvSpPr>
+          <p:cNvPr id="25" name="Text 23"/>
+          <p:cNvSpPr/>
+          <p:nvPr/>
+        </p:nvSpPr>
+        <p:spPr>
+          <a:xfrm>
+            <a:off x="7228858" y="3176984"/>
+            <a:ext cx="3600312" cy="343694"/>
+          </a:xfrm>
+          <a:prstGeom prst="rect">
+            <a:avLst/>
+          </a:prstGeom>
+          <a:noFill/>
+          <a:ln/>
+        </p:spPr>
+        <p:txBody>
+          <a:bodyPr wrap="square" lIns="0" tIns="0" rIns="0" bIns="0" rtlCol="0" anchor="t"/>
+          <a:lstStyle/>
+          <a:p>
+            <a:pPr algn="l" indent="0" marL="0">
+              <a:lnSpc>
+                <a:spcPts val="2706"/>
+              </a:lnSpc>
+              <a:buNone/>
+            </a:pPr>
+            <a:r>
+              <a:rPr lang="en-US" sz="1866" dirty="0">
+                <a:solidFill>
+                  <a:srgbClr val="000000"/>
+                </a:solidFill>
+                <a:latin typeface="Geist" pitchFamily="34" charset="0"/>
+                <a:ea typeface="Geist" pitchFamily="34" charset="-122"/>
+                <a:cs typeface="Geist" pitchFamily="34" charset="-120"/>
+              </a:rPr>
+              <a:t>The client's network and device</a:t>
+            </a:r>
+            <a:endParaRPr lang="en-US" sz="1866" dirty="0"/>
+          </a:p>
+        </p:txBody>
+      </p:sp>
+      <p:sp>
+        <p:nvSpPr>
+          <p:cNvPr id="26" name="Shape 24"/>
+          <p:cNvSpPr/>
+          <p:nvPr/>
+        </p:nvSpPr>
+        <p:spPr>
+          <a:xfrm>
+            <a:off x="689795" y="3688755"/>
+            <a:ext cx="10809363" cy="0"/>
+          </a:xfrm>
+          <a:prstGeom prst="line">
+            <a:avLst/>
+          </a:prstGeom>
+          <a:noFill/>
+          <a:ln w="12698">
+            <a:solidFill>
+              <a:srgbClr val="000000"/>
+            </a:solidFill>
+            <a:prstDash val="solid"/>
+          </a:ln>
+        </p:spPr>
+      </p:sp>
+      <p:sp>
+        <p:nvSpPr>
+          <p:cNvPr id="27" name="Text 25"/>
+          <p:cNvSpPr/>
+          <p:nvPr/>
+        </p:nvSpPr>
+        <p:spPr>
+          <a:xfrm>
+            <a:off x="892944" y="3898305"/>
+            <a:ext cx="993364" cy="260747"/>
+          </a:xfrm>
+          <a:prstGeom prst="rect">
+            <a:avLst/>
+          </a:prstGeom>
+          <a:noFill/>
+          <a:ln/>
+        </p:spPr>
+        <p:txBody>
+          <a:bodyPr wrap="square" lIns="0" tIns="0" rIns="0" bIns="0" rtlCol="0" anchor="t"/>
+          <a:lstStyle/>
+          <a:p>
+            <a:pPr algn="l" indent="0" marL="0">
+              <a:lnSpc>
+                <a:spcPts val="2053"/>
+              </a:lnSpc>
+              <a:buNone/>
+            </a:pPr>
+            <a:r>
+              <a:rPr lang="en-US" sz="1466" dirty="0">
+                <a:solidFill>
+                  <a:srgbClr val="666666"/>
+                </a:solidFill>
+                <a:latin typeface="GeistMono" pitchFamily="34" charset="0"/>
+                <a:ea typeface="GeistMono" pitchFamily="34" charset="-122"/>
+                <a:cs typeface="GeistMono" pitchFamily="34" charset="-120"/>
+              </a:rPr>
+              <a:t>CALENDAR</a:t>
+            </a:r>
+            <a:endParaRPr lang="en-US" sz="1466" dirty="0"/>
+          </a:p>
+        </p:txBody>
+      </p:sp>
+      <p:sp>
+        <p:nvSpPr>
+          <p:cNvPr id="28" name="Shape 26"/>
+          <p:cNvSpPr/>
+          <p:nvPr/>
+        </p:nvSpPr>
+        <p:spPr>
+          <a:xfrm>
+            <a:off x="2533612" y="3695105"/>
+            <a:ext cx="0" cy="667147"/>
+          </a:xfrm>
+          <a:prstGeom prst="line">
+            <a:avLst/>
+          </a:prstGeom>
+          <a:noFill/>
+          <a:ln w="12698">
+            <a:solidFill>
+              <a:srgbClr val="000000"/>
+            </a:solidFill>
+            <a:prstDash val="solid"/>
+          </a:ln>
+        </p:spPr>
+      </p:sp>
+      <p:sp>
+        <p:nvSpPr>
+          <p:cNvPr id="29" name="Text 27"/>
+          <p:cNvSpPr/>
+          <p:nvPr/>
+        </p:nvSpPr>
+        <p:spPr>
+          <a:xfrm>
+            <a:off x="2743109" y="3856831"/>
+            <a:ext cx="2098023" cy="343694"/>
+          </a:xfrm>
+          <a:prstGeom prst="rect">
+            <a:avLst/>
+          </a:prstGeom>
+          <a:noFill/>
+          <a:ln/>
+        </p:spPr>
+        <p:txBody>
+          <a:bodyPr wrap="square" lIns="0" tIns="0" rIns="0" bIns="0" rtlCol="0" anchor="t"/>
+          <a:lstStyle/>
+          <a:p>
+            <a:pPr algn="l" indent="0" marL="0">
+              <a:lnSpc>
+                <a:spcPts val="2706"/>
+              </a:lnSpc>
+              <a:buNone/>
+            </a:pPr>
+            <a:r>
+              <a:rPr lang="en-US" sz="1866" dirty="0">
+                <a:solidFill>
+                  <a:srgbClr val="000000"/>
+                </a:solidFill>
+                <a:latin typeface="Geist" pitchFamily="34" charset="0"/>
+                <a:ea typeface="Geist" pitchFamily="34" charset="-122"/>
+                <a:cs typeface="Geist" pitchFamily="34" charset="-120"/>
+              </a:rPr>
+              <a:t>The ordinary week</a:t>
+            </a:r>
+            <a:endParaRPr lang="en-US" sz="1866" dirty="0"/>
+          </a:p>
+        </p:txBody>
+      </p:sp>
+      <p:sp>
+        <p:nvSpPr>
+          <p:cNvPr id="30" name="Shape 28"/>
+          <p:cNvSpPr/>
+          <p:nvPr/>
+        </p:nvSpPr>
+        <p:spPr>
+          <a:xfrm>
+            <a:off x="7019360" y="3695105"/>
+            <a:ext cx="0" cy="667147"/>
+          </a:xfrm>
+          <a:prstGeom prst="line">
+            <a:avLst/>
+          </a:prstGeom>
+          <a:noFill/>
+          <a:ln w="12698">
+            <a:solidFill>
+              <a:srgbClr val="000000"/>
+            </a:solidFill>
+            <a:prstDash val="solid"/>
+          </a:ln>
+        </p:spPr>
+      </p:sp>
+      <p:sp>
+        <p:nvSpPr>
+          <p:cNvPr id="31" name="Text 29"/>
+          <p:cNvSpPr/>
+          <p:nvPr/>
+        </p:nvSpPr>
+        <p:spPr>
+          <a:xfrm>
+            <a:off x="7228858" y="3856831"/>
+            <a:ext cx="3716869" cy="343694"/>
+          </a:xfrm>
+          <a:prstGeom prst="rect">
+            <a:avLst/>
+          </a:prstGeom>
+          <a:noFill/>
+          <a:ln/>
+        </p:spPr>
+        <p:txBody>
+          <a:bodyPr wrap="square" lIns="0" tIns="0" rIns="0" bIns="0" rtlCol="0" anchor="t"/>
+          <a:lstStyle/>
+          <a:p>
+            <a:pPr algn="l" indent="0" marL="0">
+              <a:lnSpc>
+                <a:spcPts val="2706"/>
+              </a:lnSpc>
+              <a:buNone/>
+            </a:pPr>
+            <a:r>
+              <a:rPr lang="en-US" sz="1866" dirty="0">
+                <a:solidFill>
+                  <a:srgbClr val="000000"/>
+                </a:solidFill>
+                <a:latin typeface="Geist" pitchFamily="34" charset="0"/>
+                <a:ea typeface="Geist" pitchFamily="34" charset="-122"/>
+                <a:cs typeface="Geist" pitchFamily="34" charset="-120"/>
+              </a:rPr>
+              <a:t>A declared maintenance window</a:t>
+            </a:r>
+            <a:endParaRPr lang="en-US" sz="1866" dirty="0"/>
+          </a:p>
+        </p:txBody>
+      </p:sp>
+      <p:sp>
+        <p:nvSpPr>
+          <p:cNvPr id="32" name="Shape 30"/>
+          <p:cNvSpPr/>
+          <p:nvPr/>
+        </p:nvSpPr>
+        <p:spPr>
+          <a:xfrm>
+            <a:off x="689795" y="4368602"/>
+            <a:ext cx="10809363" cy="0"/>
+          </a:xfrm>
+          <a:prstGeom prst="line">
+            <a:avLst/>
+          </a:prstGeom>
+          <a:noFill/>
+          <a:ln w="12698">
+            <a:solidFill>
+              <a:srgbClr val="000000"/>
+            </a:solidFill>
+            <a:prstDash val="solid"/>
+          </a:ln>
+        </p:spPr>
+      </p:sp>
+      <p:sp>
+        <p:nvSpPr>
+          <p:cNvPr id="33" name="Text 31"/>
+          <p:cNvSpPr/>
+          <p:nvPr/>
+        </p:nvSpPr>
+        <p:spPr>
+          <a:xfrm>
+            <a:off x="892944" y="4578152"/>
+            <a:ext cx="1117408" cy="260747"/>
+          </a:xfrm>
+          <a:prstGeom prst="rect">
+            <a:avLst/>
+          </a:prstGeom>
+          <a:noFill/>
+          <a:ln/>
+        </p:spPr>
+        <p:txBody>
+          <a:bodyPr wrap="square" lIns="0" tIns="0" rIns="0" bIns="0" rtlCol="0" anchor="t"/>
+          <a:lstStyle/>
+          <a:p>
+            <a:pPr algn="l" indent="0" marL="0">
+              <a:lnSpc>
+                <a:spcPts val="2053"/>
+              </a:lnSpc>
+              <a:buNone/>
+            </a:pPr>
+            <a:r>
+              <a:rPr lang="en-US" sz="1466" dirty="0">
+                <a:solidFill>
+                  <a:srgbClr val="666666"/>
+                </a:solidFill>
+                <a:latin typeface="GeistMono" pitchFamily="34" charset="0"/>
+                <a:ea typeface="GeistMono" pitchFamily="34" charset="-122"/>
+                <a:cs typeface="GeistMono" pitchFamily="34" charset="-120"/>
+              </a:rPr>
+              <a:t>OWNERSHIP</a:t>
+            </a:r>
+            <a:endParaRPr lang="en-US" sz="1466" dirty="0"/>
+          </a:p>
+        </p:txBody>
+      </p:sp>
+      <p:sp>
+        <p:nvSpPr>
+          <p:cNvPr id="34" name="Shape 32"/>
+          <p:cNvSpPr/>
+          <p:nvPr/>
+        </p:nvSpPr>
+        <p:spPr>
+          <a:xfrm>
+            <a:off x="2533612" y="4374952"/>
+            <a:ext cx="0" cy="667147"/>
+          </a:xfrm>
+          <a:prstGeom prst="line">
+            <a:avLst/>
+          </a:prstGeom>
+          <a:noFill/>
+          <a:ln w="12698">
+            <a:solidFill>
+              <a:srgbClr val="000000"/>
+            </a:solidFill>
+            <a:prstDash val="solid"/>
+          </a:ln>
+        </p:spPr>
+      </p:sp>
+      <p:sp>
+        <p:nvSpPr>
+          <p:cNvPr id="35" name="Text 33"/>
+          <p:cNvSpPr/>
+          <p:nvPr/>
+        </p:nvSpPr>
+        <p:spPr>
+          <a:xfrm>
+            <a:off x="2743109" y="4536678"/>
+            <a:ext cx="3224740" cy="343694"/>
+          </a:xfrm>
+          <a:prstGeom prst="rect">
+            <a:avLst/>
+          </a:prstGeom>
+          <a:noFill/>
+          <a:ln/>
+        </p:spPr>
+        <p:txBody>
+          <a:bodyPr wrap="square" lIns="0" tIns="0" rIns="0" bIns="0" rtlCol="0" anchor="t"/>
+          <a:lstStyle/>
+          <a:p>
+            <a:pPr algn="l" indent="0" marL="0">
+              <a:lnSpc>
+                <a:spcPts val="2706"/>
+              </a:lnSpc>
+              <a:buNone/>
+            </a:pPr>
+            <a:r>
+              <a:rPr lang="en-US" sz="1866" dirty="0">
+                <a:solidFill>
+                  <a:srgbClr val="000000"/>
+                </a:solidFill>
+                <a:latin typeface="Geist" pitchFamily="34" charset="0"/>
+                <a:ea typeface="Geist" pitchFamily="34" charset="-122"/>
+                <a:cs typeface="Geist" pitchFamily="34" charset="-120"/>
+              </a:rPr>
+              <a:t>What this service itself does</a:t>
+            </a:r>
+            <a:endParaRPr lang="en-US" sz="1866" dirty="0"/>
+          </a:p>
+        </p:txBody>
+      </p:sp>
+      <p:sp>
+        <p:nvSpPr>
+          <p:cNvPr id="36" name="Shape 34"/>
+          <p:cNvSpPr/>
+          <p:nvPr/>
+        </p:nvSpPr>
+        <p:spPr>
+          <a:xfrm>
+            <a:off x="7019360" y="4374952"/>
+            <a:ext cx="0" cy="667147"/>
+          </a:xfrm>
+          <a:prstGeom prst="line">
+            <a:avLst/>
+          </a:prstGeom>
+          <a:noFill/>
+          <a:ln w="12698">
+            <a:solidFill>
+              <a:srgbClr val="000000"/>
+            </a:solidFill>
+            <a:prstDash val="solid"/>
+          </a:ln>
+        </p:spPr>
+      </p:sp>
+      <p:sp>
+        <p:nvSpPr>
+          <p:cNvPr id="37" name="Text 35"/>
+          <p:cNvSpPr/>
+          <p:nvPr/>
+        </p:nvSpPr>
+        <p:spPr>
+          <a:xfrm>
+            <a:off x="7228858" y="4536678"/>
+            <a:ext cx="3354247" cy="343694"/>
+          </a:xfrm>
+          <a:prstGeom prst="rect">
+            <a:avLst/>
+          </a:prstGeom>
+          <a:noFill/>
+          <a:ln/>
+        </p:spPr>
+        <p:txBody>
+          <a:bodyPr wrap="square" lIns="0" tIns="0" rIns="0" bIns="0" rtlCol="0" anchor="t"/>
+          <a:lstStyle/>
+          <a:p>
+            <a:pPr algn="l" indent="0" marL="0">
+              <a:lnSpc>
+                <a:spcPts val="2706"/>
+              </a:lnSpc>
+              <a:buNone/>
+            </a:pPr>
+            <a:r>
+              <a:rPr lang="en-US" sz="1866" dirty="0">
+                <a:solidFill>
+                  <a:srgbClr val="000000"/>
+                </a:solidFill>
+                <a:latin typeface="Geist" pitchFamily="34" charset="0"/>
+                <a:ea typeface="Geist" pitchFamily="34" charset="-122"/>
+                <a:cs typeface="Geist" pitchFamily="34" charset="-120"/>
+              </a:rPr>
+              <a:t>What a dependency promises</a:t>
+            </a:r>
+            <a:endParaRPr lang="en-US" sz="1866" dirty="0"/>
+          </a:p>
+        </p:txBody>
+      </p:sp>
+      <p:sp>
+        <p:nvSpPr>
+          <p:cNvPr id="38" name="Shape 36"/>
+          <p:cNvSpPr/>
+          <p:nvPr/>
+        </p:nvSpPr>
+        <p:spPr>
+          <a:xfrm>
+            <a:off x="677098" y="5332016"/>
+            <a:ext cx="10834756" cy="0"/>
+          </a:xfrm>
+          <a:prstGeom prst="line">
+            <a:avLst/>
+          </a:prstGeom>
+          <a:noFill/>
+          <a:ln w="12698">
+            <a:solidFill>
+              <a:srgbClr val="000000"/>
+            </a:solidFill>
+            <a:prstDash val="solid"/>
+          </a:ln>
+        </p:spPr>
+      </p:sp>
+      <p:sp>
+        <p:nvSpPr>
+          <p:cNvPr id="39" name="Text 37"/>
+          <p:cNvSpPr/>
+          <p:nvPr/>
+        </p:nvSpPr>
+        <p:spPr>
+          <a:xfrm>
+            <a:off x="677098" y="5541566"/>
+            <a:ext cx="11051451" cy="368300"/>
+          </a:xfrm>
+          <a:prstGeom prst="rect">
+            <a:avLst/>
+          </a:prstGeom>
+          <a:noFill/>
+          <a:ln/>
+        </p:spPr>
+        <p:txBody>
+          <a:bodyPr wrap="square" lIns="0" tIns="0" rIns="0" bIns="0" rtlCol="0" anchor="t"/>
+          <a:lstStyle/>
+          <a:p>
+            <a:pPr algn="l" indent="0" marL="0">
+              <a:lnSpc>
+                <a:spcPts val="2900"/>
+              </a:lnSpc>
+              <a:buNone/>
+            </a:pPr>
+            <a:r>
+              <a:rPr lang="en-US" sz="2000" b="1" dirty="0">
+                <a:solidFill>
+                  <a:srgbClr val="000000"/>
+                </a:solidFill>
+                <a:latin typeface="Geist" pitchFamily="34" charset="0"/>
+                <a:ea typeface="Geist" pitchFamily="34" charset="-122"/>
+                <a:cs typeface="Geist" pitchFamily="34" charset="-120"/>
+              </a:rPr>
+              <a:t>An exclusion you never wrote down becomes an argument during the incident.</a:t>
+            </a:r>
+            <a:endParaRPr lang="en-US" sz="2000" dirty="0"/>
+          </a:p>
+        </p:txBody>
+      </p:sp>
+      <p:sp>
+        <p:nvSpPr>
+          <p:cNvPr id="40" name="Text 38"/>
+          <p:cNvSpPr/>
+          <p:nvPr/>
+        </p:nvSpPr>
+        <p:spPr>
+          <a:xfrm>
+            <a:off x="677098" y="6113066"/>
+            <a:ext cx="2210331" cy="236934"/>
+          </a:xfrm>
+          <a:prstGeom prst="rect">
+            <a:avLst/>
+          </a:prstGeom>
+          <a:noFill/>
+          <a:ln/>
+        </p:spPr>
+        <p:txBody>
+          <a:bodyPr wrap="square" lIns="0" tIns="0" rIns="0" bIns="0" rtlCol="0" anchor="t"/>
+          <a:lstStyle/>
+          <a:p>
+            <a:pPr algn="l" indent="0" marL="0">
+              <a:lnSpc>
+                <a:spcPts val="1866"/>
+              </a:lnSpc>
+              <a:buNone/>
+            </a:pPr>
+            <a:r>
+              <a:rPr lang="en-US" sz="1333" dirty="0">
+                <a:solidFill>
+                  <a:srgbClr val="666666"/>
+                </a:solidFill>
+                <a:latin typeface="GeistMono" pitchFamily="34" charset="0"/>
+                <a:ea typeface="GeistMono" pitchFamily="34" charset="-122"/>
+                <a:cs typeface="GeistMono" pitchFamily="34" charset="-120"/>
+              </a:rPr>
+              <a:t>SLO · OPERATING NOTE</a:t>
+            </a:r>
+            <a:endParaRPr lang="en-US" sz="1333" dirty="0"/>
+          </a:p>
+        </p:txBody>
+      </p:sp>
+      <p:sp>
+        <p:nvSpPr>
+          <p:cNvPr id="41" name="Text 39"/>
+          <p:cNvSpPr/>
+          <p:nvPr/>
+        </p:nvSpPr>
+        <p:spPr>
+          <a:xfrm>
+            <a:off x="6527755" y="6113066"/>
+            <a:ext cx="5083781" cy="236934"/>
+          </a:xfrm>
+          <a:prstGeom prst="rect">
+            <a:avLst/>
+          </a:prstGeom>
+          <a:noFill/>
+          <a:ln/>
+        </p:spPr>
+        <p:txBody>
+          <a:bodyPr wrap="square" lIns="0" tIns="0" rIns="0" bIns="0" rtlCol="0" anchor="t"/>
+          <a:lstStyle/>
+          <a:p>
+            <a:pPr algn="l" indent="0" marL="0">
+              <a:lnSpc>
+                <a:spcPts val="1866"/>
+              </a:lnSpc>
+              <a:buNone/>
+            </a:pPr>
+            <a:r>
+              <a:rPr lang="en-US" sz="1333" dirty="0">
+                <a:solidFill>
+                  <a:srgbClr val="666666"/>
+                </a:solidFill>
+                <a:latin typeface="GeistMono" pitchFamily="34" charset="0"/>
+                <a:ea typeface="GeistMono" pitchFamily="34" charset="-122"/>
+                <a:cs typeface="GeistMono" pitchFamily="34" charset="-120"/>
+              </a:rPr>
+              <a:t>Source: none — no figures appear in this deck.</a:t>
+            </a:r>
+            <a:endParaRPr lang="en-US" sz="1333" dirty="0"/>
+          </a:p>
+        </p:txBody>
+      </p:sp>
     </p:spTree>
   </p:cSld>
   <p:clrMapOvr>
@@ -1495,6 +5681,13 @@
 <file path=ppt/slides/slide5.xml><?xml version="1.0" encoding="utf-8"?>
 <p:sld xmlns:a="http://schemas.openxmlformats.org/drawingml/2006/main" xmlns:r="http://schemas.openxmlformats.org/officeDocument/2006/relationships" xmlns:p="http://schemas.openxmlformats.org/presentationml/2006/main">
   <p:cSld name="Slide 5">
+    <p:bg>
+      <p:bgPr>
+        <a:solidFill>
+          <a:srgbClr val="FFFFFF"/>
+        </a:solidFill>
+      </p:bgPr>
+    </p:bg>
     <p:spTree>
       <p:nvGrpSpPr>
         <p:cNvPr id="1" name=""/>
@@ -1509,30 +5702,812 @@
           <a:chExt cx="0" cy="0"/>
         </a:xfrm>
       </p:grpSpPr>
-      <p:pic>
-        <p:nvPicPr>
-          <p:cNvPr id="2" name="Image 0" descr="/tmp/slide-1787841960643-bgipa4btbge.png">    </p:cNvPr>
-          <p:cNvPicPr>
-            <a:picLocks noChangeAspect="1"/>
-          </p:cNvPicPr>
-          <p:nvPr/>
-        </p:nvPicPr>
-        <p:blipFill>
-          <a:blip r:embed="rId1"/>
-          <a:stretch>
-            <a:fillRect/>
-          </a:stretch>
-        </p:blipFill>
-        <p:spPr>
-          <a:xfrm>
-            <a:off x="0" y="0"/>
-            <a:ext cx="12188952" cy="6858000"/>
-          </a:xfrm>
-          <a:prstGeom prst="rect">
-            <a:avLst/>
-          </a:prstGeom>
-        </p:spPr>
-      </p:pic>
+      <p:sp>
+        <p:nvSpPr>
+          <p:cNvPr id="2" name="Text 0"/>
+          <p:cNvSpPr/>
+          <p:nvPr/>
+        </p:nvSpPr>
+        <p:spPr>
+          <a:xfrm>
+            <a:off x="677098" y="406400"/>
+            <a:ext cx="2731599" cy="260747"/>
+          </a:xfrm>
+          <a:prstGeom prst="rect">
+            <a:avLst/>
+          </a:prstGeom>
+          <a:noFill/>
+          <a:ln/>
+        </p:spPr>
+        <p:txBody>
+          <a:bodyPr wrap="square" lIns="0" tIns="0" rIns="0" bIns="0" rtlCol="0" anchor="t"/>
+          <a:lstStyle/>
+          <a:p>
+            <a:pPr algn="l" indent="0" marL="0">
+              <a:lnSpc>
+                <a:spcPts val="2053"/>
+              </a:lnSpc>
+              <a:buNone/>
+            </a:pPr>
+            <a:r>
+              <a:rPr lang="en-US" sz="1466" dirty="0">
+                <a:solidFill>
+                  <a:srgbClr val="666666"/>
+                </a:solidFill>
+                <a:latin typeface="GeistMono" pitchFamily="34" charset="0"/>
+                <a:ea typeface="GeistMono" pitchFamily="34" charset="-122"/>
+                <a:cs typeface="GeistMono" pitchFamily="34" charset="-120"/>
+              </a:rPr>
+              <a:t>05 · THE FAILURE MODES</a:t>
+            </a:r>
+            <a:endParaRPr lang="en-US" sz="1466" dirty="0"/>
+          </a:p>
+        </p:txBody>
+      </p:sp>
+      <p:sp>
+        <p:nvSpPr>
+          <p:cNvPr id="3" name="Text 1"/>
+          <p:cNvSpPr/>
+          <p:nvPr/>
+        </p:nvSpPr>
+        <p:spPr>
+          <a:xfrm>
+            <a:off x="9929314" y="406400"/>
+            <a:ext cx="1614191" cy="260747"/>
+          </a:xfrm>
+          <a:prstGeom prst="rect">
+            <a:avLst/>
+          </a:prstGeom>
+          <a:noFill/>
+          <a:ln/>
+        </p:spPr>
+        <p:txBody>
+          <a:bodyPr wrap="square" lIns="0" tIns="0" rIns="0" bIns="0" rtlCol="0" anchor="t"/>
+          <a:lstStyle/>
+          <a:p>
+            <a:pPr algn="l" indent="0" marL="0">
+              <a:lnSpc>
+                <a:spcPts val="2053"/>
+              </a:lnSpc>
+              <a:buNone/>
+            </a:pPr>
+            <a:r>
+              <a:rPr lang="en-US" sz="1466" dirty="0">
+                <a:solidFill>
+                  <a:srgbClr val="666666"/>
+                </a:solidFill>
+                <a:latin typeface="GeistMono" pitchFamily="34" charset="0"/>
+                <a:ea typeface="GeistMono" pitchFamily="34" charset="-122"/>
+                <a:cs typeface="GeistMono" pitchFamily="34" charset="-120"/>
+              </a:rPr>
+              <a:t>SHEET 05 / 06</a:t>
+            </a:r>
+            <a:endParaRPr lang="en-US" sz="1466" dirty="0"/>
+          </a:p>
+        </p:txBody>
+      </p:sp>
+      <p:sp>
+        <p:nvSpPr>
+          <p:cNvPr id="4" name="Text 2"/>
+          <p:cNvSpPr/>
+          <p:nvPr/>
+        </p:nvSpPr>
+        <p:spPr>
+          <a:xfrm>
+            <a:off x="677098" y="768747"/>
+            <a:ext cx="11051451" cy="506214"/>
+          </a:xfrm>
+          <a:prstGeom prst="rect">
+            <a:avLst/>
+          </a:prstGeom>
+          <a:noFill/>
+          <a:ln/>
+        </p:spPr>
+        <p:txBody>
+          <a:bodyPr wrap="square" lIns="0" tIns="0" rIns="0" bIns="0" rtlCol="0" anchor="t"/>
+          <a:lstStyle/>
+          <a:p>
+            <a:pPr algn="l" indent="0" marL="0">
+              <a:lnSpc>
+                <a:spcPts val="3986"/>
+              </a:lnSpc>
+              <a:buNone/>
+            </a:pPr>
+            <a:r>
+              <a:rPr lang="en-US" sz="3066" b="1" dirty="0">
+                <a:solidFill>
+                  <a:srgbClr val="000000"/>
+                </a:solidFill>
+                <a:latin typeface="Geist" pitchFamily="34" charset="0"/>
+                <a:ea typeface="Geist" pitchFamily="34" charset="-122"/>
+                <a:cs typeface="Geist" pitchFamily="34" charset="-120"/>
+              </a:rPr>
+              <a:t>Three ways an SLO stops being a switch</a:t>
+            </a:r>
+            <a:endParaRPr lang="en-US" sz="3066" dirty="0"/>
+          </a:p>
+        </p:txBody>
+      </p:sp>
+      <p:sp>
+        <p:nvSpPr>
+          <p:cNvPr id="5" name="Text 3"/>
+          <p:cNvSpPr/>
+          <p:nvPr/>
+        </p:nvSpPr>
+        <p:spPr>
+          <a:xfrm>
+            <a:off x="677098" y="1444228"/>
+            <a:ext cx="10834756" cy="12700"/>
+          </a:xfrm>
+          <a:prstGeom prst="rect">
+            <a:avLst/>
+          </a:prstGeom>
+          <a:solidFill>
+            <a:srgbClr val="000000"/>
+          </a:solidFill>
+          <a:ln/>
+        </p:spPr>
+        <p:txBody>
+          <a:bodyPr wrap="square" rtlCol="0" anchor="ctr"/>
+          <a:lstStyle/>
+          <a:p>
+            <a:pPr indent="0" marL="0">
+              <a:buNone/>
+            </a:pPr>
+            <a:endParaRPr lang="en-US" dirty="0"/>
+          </a:p>
+        </p:txBody>
+      </p:sp>
+      <p:sp>
+        <p:nvSpPr>
+          <p:cNvPr id="6" name="Text 4"/>
+          <p:cNvSpPr/>
+          <p:nvPr/>
+        </p:nvSpPr>
+        <p:spPr>
+          <a:xfrm>
+            <a:off x="677098" y="1727795"/>
+            <a:ext cx="11051451" cy="343694"/>
+          </a:xfrm>
+          <a:prstGeom prst="rect">
+            <a:avLst/>
+          </a:prstGeom>
+          <a:noFill/>
+          <a:ln/>
+        </p:spPr>
+        <p:txBody>
+          <a:bodyPr wrap="square" lIns="0" tIns="0" rIns="0" bIns="0" rtlCol="0" anchor="t"/>
+          <a:lstStyle/>
+          <a:p>
+            <a:pPr algn="l" indent="0" marL="0">
+              <a:lnSpc>
+                <a:spcPts val="2706"/>
+              </a:lnSpc>
+              <a:spcAft>
+                <a:spcPts val="1866"/>
+              </a:spcAft>
+              <a:buNone/>
+            </a:pPr>
+            <a:r>
+              <a:rPr lang="en-US" sz="1866" dirty="0">
+                <a:solidFill>
+                  <a:srgbClr val="000000"/>
+                </a:solidFill>
+                <a:latin typeface="Geist" pitchFamily="34" charset="0"/>
+                <a:ea typeface="Geist" pitchFamily="34" charset="-122"/>
+                <a:cs typeface="Geist" pitchFamily="34" charset="-120"/>
+              </a:rPr>
+              <a:t>The number stays exactly where it was. What goes missing is the rule attached to it.</a:t>
+            </a:r>
+            <a:endParaRPr lang="en-US" sz="1866" dirty="0"/>
+          </a:p>
+        </p:txBody>
+      </p:sp>
+      <p:sp>
+        <p:nvSpPr>
+          <p:cNvPr id="7" name="Text 5"/>
+          <p:cNvSpPr/>
+          <p:nvPr/>
+        </p:nvSpPr>
+        <p:spPr>
+          <a:xfrm>
+            <a:off x="892944" y="2524323"/>
+            <a:ext cx="3105350" cy="260747"/>
+          </a:xfrm>
+          <a:prstGeom prst="rect">
+            <a:avLst/>
+          </a:prstGeom>
+          <a:noFill/>
+          <a:ln/>
+        </p:spPr>
+        <p:txBody>
+          <a:bodyPr wrap="square" lIns="0" tIns="0" rIns="0" bIns="0" rtlCol="0" anchor="t"/>
+          <a:lstStyle/>
+          <a:p>
+            <a:pPr algn="l" indent="0" marL="0">
+              <a:lnSpc>
+                <a:spcPts val="2053"/>
+              </a:lnSpc>
+              <a:buNone/>
+            </a:pPr>
+            <a:r>
+              <a:rPr lang="en-US" sz="1466" dirty="0">
+                <a:solidFill>
+                  <a:srgbClr val="666666"/>
+                </a:solidFill>
+                <a:latin typeface="GeistMono" pitchFamily="34" charset="0"/>
+                <a:ea typeface="GeistMono" pitchFamily="34" charset="-122"/>
+                <a:cs typeface="GeistMono" pitchFamily="34" charset="-120"/>
+              </a:rPr>
+              <a:t>01</a:t>
+            </a:r>
+            <a:endParaRPr lang="en-US" sz="1466" dirty="0"/>
+          </a:p>
+        </p:txBody>
+      </p:sp>
+      <p:sp>
+        <p:nvSpPr>
+          <p:cNvPr id="8" name="Text 6"/>
+          <p:cNvSpPr/>
+          <p:nvPr/>
+        </p:nvSpPr>
+        <p:spPr>
+          <a:xfrm>
+            <a:off x="892944" y="2920405"/>
+            <a:ext cx="3105350" cy="342900"/>
+          </a:xfrm>
+          <a:prstGeom prst="rect">
+            <a:avLst/>
+          </a:prstGeom>
+          <a:noFill/>
+          <a:ln/>
+        </p:spPr>
+        <p:txBody>
+          <a:bodyPr wrap="square" lIns="0" tIns="0" rIns="0" bIns="0" rtlCol="0" anchor="t"/>
+          <a:lstStyle/>
+          <a:p>
+            <a:pPr algn="l" indent="0" marL="0">
+              <a:lnSpc>
+                <a:spcPts val="2700"/>
+              </a:lnSpc>
+              <a:spcBef>
+                <a:spcPts val="1067"/>
+              </a:spcBef>
+              <a:buNone/>
+            </a:pPr>
+            <a:r>
+              <a:rPr lang="en-US" sz="2000" b="1" dirty="0">
+                <a:solidFill>
+                  <a:srgbClr val="000000"/>
+                </a:solidFill>
+                <a:latin typeface="Geist" pitchFamily="34" charset="0"/>
+                <a:ea typeface="Geist" pitchFamily="34" charset="-122"/>
+                <a:cs typeface="Geist" pitchFamily="34" charset="-120"/>
+              </a:rPr>
+              <a:t>A target nobody chose</a:t>
+            </a:r>
+            <a:endParaRPr lang="en-US" sz="2000" dirty="0"/>
+          </a:p>
+        </p:txBody>
+      </p:sp>
+      <p:sp>
+        <p:nvSpPr>
+          <p:cNvPr id="9" name="Shape 7"/>
+          <p:cNvSpPr/>
+          <p:nvPr/>
+        </p:nvSpPr>
+        <p:spPr>
+          <a:xfrm>
+            <a:off x="892944" y="3288506"/>
+            <a:ext cx="3044461" cy="0"/>
+          </a:xfrm>
+          <a:prstGeom prst="line">
+            <a:avLst/>
+          </a:prstGeom>
+          <a:noFill/>
+          <a:ln w="12698">
+            <a:solidFill>
+              <a:srgbClr val="000000"/>
+            </a:solidFill>
+            <a:prstDash val="solid"/>
+          </a:ln>
+        </p:spPr>
+      </p:sp>
+      <p:sp>
+        <p:nvSpPr>
+          <p:cNvPr id="10" name="Text 8"/>
+          <p:cNvSpPr/>
+          <p:nvPr/>
+        </p:nvSpPr>
+        <p:spPr>
+          <a:xfrm>
+            <a:off x="892944" y="3464123"/>
+            <a:ext cx="3105350" cy="1374775"/>
+          </a:xfrm>
+          <a:prstGeom prst="rect">
+            <a:avLst/>
+          </a:prstGeom>
+          <a:noFill/>
+          <a:ln/>
+        </p:spPr>
+        <p:txBody>
+          <a:bodyPr wrap="square" lIns="0" tIns="0" rIns="0" bIns="0" rtlCol="0" anchor="t"/>
+          <a:lstStyle/>
+          <a:p>
+            <a:pPr algn="l" indent="0" marL="0">
+              <a:lnSpc>
+                <a:spcPts val="2706"/>
+              </a:lnSpc>
+              <a:buNone/>
+            </a:pPr>
+            <a:r>
+              <a:rPr lang="en-US" sz="1866" dirty="0">
+                <a:solidFill>
+                  <a:srgbClr val="000000"/>
+                </a:solidFill>
+                <a:latin typeface="Geist" pitchFamily="34" charset="0"/>
+                <a:ea typeface="Geist" pitchFamily="34" charset="-122"/>
+                <a:cs typeface="Geist" pitchFamily="34" charset="-120"/>
+              </a:rPr>
+              <a:t>It came off a vendor page. Nobody in the room would defend it, so nobody enforces it either.</a:t>
+            </a:r>
+            <a:endParaRPr lang="en-US" sz="1866" dirty="0"/>
+          </a:p>
+        </p:txBody>
+      </p:sp>
+      <p:sp>
+        <p:nvSpPr>
+          <p:cNvPr id="11" name="Text 9"/>
+          <p:cNvSpPr/>
+          <p:nvPr/>
+        </p:nvSpPr>
+        <p:spPr>
+          <a:xfrm>
+            <a:off x="4572246" y="2524323"/>
+            <a:ext cx="3105350" cy="260747"/>
+          </a:xfrm>
+          <a:prstGeom prst="rect">
+            <a:avLst/>
+          </a:prstGeom>
+          <a:noFill/>
+          <a:ln/>
+        </p:spPr>
+        <p:txBody>
+          <a:bodyPr wrap="square" lIns="0" tIns="0" rIns="0" bIns="0" rtlCol="0" anchor="t"/>
+          <a:lstStyle/>
+          <a:p>
+            <a:pPr algn="l" indent="0" marL="0">
+              <a:lnSpc>
+                <a:spcPts val="2053"/>
+              </a:lnSpc>
+              <a:buNone/>
+            </a:pPr>
+            <a:r>
+              <a:rPr lang="en-US" sz="1466" dirty="0">
+                <a:solidFill>
+                  <a:srgbClr val="666666"/>
+                </a:solidFill>
+                <a:latin typeface="GeistMono" pitchFamily="34" charset="0"/>
+                <a:ea typeface="GeistMono" pitchFamily="34" charset="-122"/>
+                <a:cs typeface="GeistMono" pitchFamily="34" charset="-120"/>
+              </a:rPr>
+              <a:t>02</a:t>
+            </a:r>
+            <a:endParaRPr lang="en-US" sz="1466" dirty="0"/>
+          </a:p>
+        </p:txBody>
+      </p:sp>
+      <p:sp>
+        <p:nvSpPr>
+          <p:cNvPr id="12" name="Text 10"/>
+          <p:cNvSpPr/>
+          <p:nvPr/>
+        </p:nvSpPr>
+        <p:spPr>
+          <a:xfrm>
+            <a:off x="4572246" y="2920405"/>
+            <a:ext cx="3105350" cy="342900"/>
+          </a:xfrm>
+          <a:prstGeom prst="rect">
+            <a:avLst/>
+          </a:prstGeom>
+          <a:noFill/>
+          <a:ln/>
+        </p:spPr>
+        <p:txBody>
+          <a:bodyPr wrap="square" lIns="0" tIns="0" rIns="0" bIns="0" rtlCol="0" anchor="t"/>
+          <a:lstStyle/>
+          <a:p>
+            <a:pPr algn="l" indent="0" marL="0">
+              <a:lnSpc>
+                <a:spcPts val="2700"/>
+              </a:lnSpc>
+              <a:spcBef>
+                <a:spcPts val="1067"/>
+              </a:spcBef>
+              <a:buNone/>
+            </a:pPr>
+            <a:r>
+              <a:rPr lang="en-US" sz="2000" b="1" dirty="0">
+                <a:solidFill>
+                  <a:srgbClr val="000000"/>
+                </a:solidFill>
+                <a:latin typeface="Geist" pitchFamily="34" charset="0"/>
+                <a:ea typeface="Geist" pitchFamily="34" charset="-122"/>
+                <a:cs typeface="Geist" pitchFamily="34" charset="-120"/>
+              </a:rPr>
+              <a:t>A budget with no teeth</a:t>
+            </a:r>
+            <a:endParaRPr lang="en-US" sz="2000" dirty="0"/>
+          </a:p>
+        </p:txBody>
+      </p:sp>
+      <p:sp>
+        <p:nvSpPr>
+          <p:cNvPr id="13" name="Shape 11"/>
+          <p:cNvSpPr/>
+          <p:nvPr/>
+        </p:nvSpPr>
+        <p:spPr>
+          <a:xfrm>
+            <a:off x="4572246" y="3288506"/>
+            <a:ext cx="3044461" cy="0"/>
+          </a:xfrm>
+          <a:prstGeom prst="line">
+            <a:avLst/>
+          </a:prstGeom>
+          <a:noFill/>
+          <a:ln w="12698">
+            <a:solidFill>
+              <a:srgbClr val="000000"/>
+            </a:solidFill>
+            <a:prstDash val="solid"/>
+          </a:ln>
+        </p:spPr>
+      </p:sp>
+      <p:sp>
+        <p:nvSpPr>
+          <p:cNvPr id="14" name="Text 12"/>
+          <p:cNvSpPr/>
+          <p:nvPr/>
+        </p:nvSpPr>
+        <p:spPr>
+          <a:xfrm>
+            <a:off x="4572246" y="3464123"/>
+            <a:ext cx="3105350" cy="1374775"/>
+          </a:xfrm>
+          <a:prstGeom prst="rect">
+            <a:avLst/>
+          </a:prstGeom>
+          <a:noFill/>
+          <a:ln/>
+        </p:spPr>
+        <p:txBody>
+          <a:bodyPr wrap="square" lIns="0" tIns="0" rIns="0" bIns="0" rtlCol="0" anchor="t"/>
+          <a:lstStyle/>
+          <a:p>
+            <a:pPr algn="l" indent="0" marL="0">
+              <a:lnSpc>
+                <a:spcPts val="2706"/>
+              </a:lnSpc>
+              <a:buNone/>
+            </a:pPr>
+            <a:r>
+              <a:rPr lang="en-US" sz="1866" dirty="0">
+                <a:solidFill>
+                  <a:srgbClr val="000000"/>
+                </a:solidFill>
+                <a:latin typeface="Geist" pitchFamily="34" charset="0"/>
+                <a:ea typeface="Geist" pitchFamily="34" charset="-122"/>
+                <a:cs typeface="Geist" pitchFamily="34" charset="-120"/>
+              </a:rPr>
+              <a:t>The chart turns red, the sprint carries on, and the budget quietly becomes a colour.</a:t>
+            </a:r>
+            <a:endParaRPr lang="en-US" sz="1866" dirty="0"/>
+          </a:p>
+        </p:txBody>
+      </p:sp>
+      <p:sp>
+        <p:nvSpPr>
+          <p:cNvPr id="15" name="Text 13"/>
+          <p:cNvSpPr/>
+          <p:nvPr/>
+        </p:nvSpPr>
+        <p:spPr>
+          <a:xfrm>
+            <a:off x="8251548" y="2524323"/>
+            <a:ext cx="3105350" cy="260747"/>
+          </a:xfrm>
+          <a:prstGeom prst="rect">
+            <a:avLst/>
+          </a:prstGeom>
+          <a:noFill/>
+          <a:ln/>
+        </p:spPr>
+        <p:txBody>
+          <a:bodyPr wrap="square" lIns="0" tIns="0" rIns="0" bIns="0" rtlCol="0" anchor="t"/>
+          <a:lstStyle/>
+          <a:p>
+            <a:pPr algn="l" indent="0" marL="0">
+              <a:lnSpc>
+                <a:spcPts val="2053"/>
+              </a:lnSpc>
+              <a:buNone/>
+            </a:pPr>
+            <a:r>
+              <a:rPr lang="en-US" sz="1466" dirty="0">
+                <a:solidFill>
+                  <a:srgbClr val="666666"/>
+                </a:solidFill>
+                <a:latin typeface="GeistMono" pitchFamily="34" charset="0"/>
+                <a:ea typeface="GeistMono" pitchFamily="34" charset="-122"/>
+                <a:cs typeface="GeistMono" pitchFamily="34" charset="-120"/>
+              </a:rPr>
+              <a:t>03</a:t>
+            </a:r>
+            <a:endParaRPr lang="en-US" sz="1466" dirty="0"/>
+          </a:p>
+        </p:txBody>
+      </p:sp>
+      <p:sp>
+        <p:nvSpPr>
+          <p:cNvPr id="16" name="Text 14"/>
+          <p:cNvSpPr/>
+          <p:nvPr/>
+        </p:nvSpPr>
+        <p:spPr>
+          <a:xfrm>
+            <a:off x="8251548" y="2920405"/>
+            <a:ext cx="3105350" cy="342900"/>
+          </a:xfrm>
+          <a:prstGeom prst="rect">
+            <a:avLst/>
+          </a:prstGeom>
+          <a:noFill/>
+          <a:ln/>
+        </p:spPr>
+        <p:txBody>
+          <a:bodyPr wrap="square" lIns="0" tIns="0" rIns="0" bIns="0" rtlCol="0" anchor="t"/>
+          <a:lstStyle/>
+          <a:p>
+            <a:pPr algn="l" indent="0" marL="0">
+              <a:lnSpc>
+                <a:spcPts val="2700"/>
+              </a:lnSpc>
+              <a:spcBef>
+                <a:spcPts val="1067"/>
+              </a:spcBef>
+              <a:buNone/>
+            </a:pPr>
+            <a:r>
+              <a:rPr lang="en-US" sz="2000" b="1" dirty="0">
+                <a:solidFill>
+                  <a:srgbClr val="000000"/>
+                </a:solidFill>
+                <a:latin typeface="Geist" pitchFamily="34" charset="0"/>
+                <a:ea typeface="Geist" pitchFamily="34" charset="-122"/>
+                <a:cs typeface="Geist" pitchFamily="34" charset="-120"/>
+              </a:rPr>
+              <a:t>An exception each time</a:t>
+            </a:r>
+            <a:endParaRPr lang="en-US" sz="2000" dirty="0"/>
+          </a:p>
+        </p:txBody>
+      </p:sp>
+      <p:sp>
+        <p:nvSpPr>
+          <p:cNvPr id="17" name="Shape 15"/>
+          <p:cNvSpPr/>
+          <p:nvPr/>
+        </p:nvSpPr>
+        <p:spPr>
+          <a:xfrm>
+            <a:off x="8251548" y="3288506"/>
+            <a:ext cx="3044461" cy="0"/>
+          </a:xfrm>
+          <a:prstGeom prst="line">
+            <a:avLst/>
+          </a:prstGeom>
+          <a:noFill/>
+          <a:ln w="12698">
+            <a:solidFill>
+              <a:srgbClr val="000000"/>
+            </a:solidFill>
+            <a:prstDash val="solid"/>
+          </a:ln>
+        </p:spPr>
+      </p:sp>
+      <p:sp>
+        <p:nvSpPr>
+          <p:cNvPr id="18" name="Text 16"/>
+          <p:cNvSpPr/>
+          <p:nvPr/>
+        </p:nvSpPr>
+        <p:spPr>
+          <a:xfrm>
+            <a:off x="8251548" y="3464123"/>
+            <a:ext cx="3105350" cy="1374775"/>
+          </a:xfrm>
+          <a:prstGeom prst="rect">
+            <a:avLst/>
+          </a:prstGeom>
+          <a:noFill/>
+          <a:ln/>
+        </p:spPr>
+        <p:txBody>
+          <a:bodyPr wrap="square" lIns="0" tIns="0" rIns="0" bIns="0" rtlCol="0" anchor="t"/>
+          <a:lstStyle/>
+          <a:p>
+            <a:pPr algn="l" indent="0" marL="0">
+              <a:lnSpc>
+                <a:spcPts val="2706"/>
+              </a:lnSpc>
+              <a:buNone/>
+            </a:pPr>
+            <a:r>
+              <a:rPr lang="en-US" sz="1866" dirty="0">
+                <a:solidFill>
+                  <a:srgbClr val="000000"/>
+                </a:solidFill>
+                <a:latin typeface="Geist" pitchFamily="34" charset="0"/>
+                <a:ea typeface="Geist" pitchFamily="34" charset="-122"/>
+                <a:cs typeface="Geist" pitchFamily="34" charset="-120"/>
+              </a:rPr>
+              <a:t>Every breach arrives with a good reason. A switch that bends has only one position.</a:t>
+            </a:r>
+            <a:endParaRPr lang="en-US" sz="1866" dirty="0"/>
+          </a:p>
+        </p:txBody>
+      </p:sp>
+      <p:sp>
+        <p:nvSpPr>
+          <p:cNvPr id="19" name="Shape 17"/>
+          <p:cNvSpPr/>
+          <p:nvPr/>
+        </p:nvSpPr>
+        <p:spPr>
+          <a:xfrm>
+            <a:off x="677098" y="5332016"/>
+            <a:ext cx="10834756" cy="0"/>
+          </a:xfrm>
+          <a:prstGeom prst="line">
+            <a:avLst/>
+          </a:prstGeom>
+          <a:noFill/>
+          <a:ln w="12698">
+            <a:solidFill>
+              <a:srgbClr val="000000"/>
+            </a:solidFill>
+            <a:prstDash val="solid"/>
+          </a:ln>
+        </p:spPr>
+      </p:sp>
+      <p:sp>
+        <p:nvSpPr>
+          <p:cNvPr id="20" name="Text 18"/>
+          <p:cNvSpPr/>
+          <p:nvPr/>
+        </p:nvSpPr>
+        <p:spPr>
+          <a:xfrm>
+            <a:off x="677098" y="5541566"/>
+            <a:ext cx="11051451" cy="368300"/>
+          </a:xfrm>
+          <a:prstGeom prst="rect">
+            <a:avLst/>
+          </a:prstGeom>
+          <a:noFill/>
+          <a:ln/>
+        </p:spPr>
+        <p:txBody>
+          <a:bodyPr wrap="square" lIns="0" tIns="0" rIns="0" bIns="0" rtlCol="0" anchor="t"/>
+          <a:lstStyle/>
+          <a:p>
+            <a:pPr algn="l" indent="0" marL="0">
+              <a:lnSpc>
+                <a:spcPts val="2900"/>
+              </a:lnSpc>
+              <a:buNone/>
+            </a:pPr>
+            <a:r>
+              <a:rPr lang="en-US" sz="2000" b="1" dirty="0">
+                <a:solidFill>
+                  <a:srgbClr val="000000"/>
+                </a:solidFill>
+                <a:latin typeface="Geist" pitchFamily="34" charset="0"/>
+                <a:ea typeface="Geist" pitchFamily="34" charset="-122"/>
+                <a:cs typeface="Geist" pitchFamily="34" charset="-120"/>
+              </a:rPr>
+              <a:t>Each of these is a decision nobody wrote down, showing up later as a habit.</a:t>
+            </a:r>
+            <a:endParaRPr lang="en-US" sz="2000" dirty="0"/>
+          </a:p>
+        </p:txBody>
+      </p:sp>
+      <p:sp>
+        <p:nvSpPr>
+          <p:cNvPr id="21" name="Text 19"/>
+          <p:cNvSpPr/>
+          <p:nvPr/>
+        </p:nvSpPr>
+        <p:spPr>
+          <a:xfrm>
+            <a:off x="677098" y="6113066"/>
+            <a:ext cx="2210331" cy="236934"/>
+          </a:xfrm>
+          <a:prstGeom prst="rect">
+            <a:avLst/>
+          </a:prstGeom>
+          <a:noFill/>
+          <a:ln/>
+        </p:spPr>
+        <p:txBody>
+          <a:bodyPr wrap="square" lIns="0" tIns="0" rIns="0" bIns="0" rtlCol="0" anchor="t"/>
+          <a:lstStyle/>
+          <a:p>
+            <a:pPr algn="l" indent="0" marL="0">
+              <a:lnSpc>
+                <a:spcPts val="1866"/>
+              </a:lnSpc>
+              <a:buNone/>
+            </a:pPr>
+            <a:r>
+              <a:rPr lang="en-US" sz="1333" dirty="0">
+                <a:solidFill>
+                  <a:srgbClr val="666666"/>
+                </a:solidFill>
+                <a:latin typeface="GeistMono" pitchFamily="34" charset="0"/>
+                <a:ea typeface="GeistMono" pitchFamily="34" charset="-122"/>
+                <a:cs typeface="GeistMono" pitchFamily="34" charset="-120"/>
+              </a:rPr>
+              <a:t>SLO · OPERATING NOTE</a:t>
+            </a:r>
+            <a:endParaRPr lang="en-US" sz="1333" dirty="0"/>
+          </a:p>
+        </p:txBody>
+      </p:sp>
+      <p:sp>
+        <p:nvSpPr>
+          <p:cNvPr id="22" name="Text 20"/>
+          <p:cNvSpPr/>
+          <p:nvPr/>
+        </p:nvSpPr>
+        <p:spPr>
+          <a:xfrm>
+            <a:off x="6527755" y="6113066"/>
+            <a:ext cx="5083781" cy="236934"/>
+          </a:xfrm>
+          <a:prstGeom prst="rect">
+            <a:avLst/>
+          </a:prstGeom>
+          <a:noFill/>
+          <a:ln/>
+        </p:spPr>
+        <p:txBody>
+          <a:bodyPr wrap="square" lIns="0" tIns="0" rIns="0" bIns="0" rtlCol="0" anchor="t"/>
+          <a:lstStyle/>
+          <a:p>
+            <a:pPr algn="l" indent="0" marL="0">
+              <a:lnSpc>
+                <a:spcPts val="1866"/>
+              </a:lnSpc>
+              <a:buNone/>
+            </a:pPr>
+            <a:r>
+              <a:rPr lang="en-US" sz="1333" dirty="0">
+                <a:solidFill>
+                  <a:srgbClr val="666666"/>
+                </a:solidFill>
+                <a:latin typeface="GeistMono" pitchFamily="34" charset="0"/>
+                <a:ea typeface="GeistMono" pitchFamily="34" charset="-122"/>
+                <a:cs typeface="GeistMono" pitchFamily="34" charset="-120"/>
+              </a:rPr>
+              <a:t>Source: none — no figures appear in this deck.</a:t>
+            </a:r>
+            <a:endParaRPr lang="en-US" sz="1333" dirty="0"/>
+          </a:p>
+        </p:txBody>
+      </p:sp>
     </p:spTree>
   </p:cSld>
   <p:clrMapOvr>
@@ -1544,6 +6519,13 @@
 <file path=ppt/slides/slide6.xml><?xml version="1.0" encoding="utf-8"?>
 <p:sld xmlns:a="http://schemas.openxmlformats.org/drawingml/2006/main" xmlns:r="http://schemas.openxmlformats.org/officeDocument/2006/relationships" xmlns:p="http://schemas.openxmlformats.org/presentationml/2006/main">
   <p:cSld name="Slide 6">
+    <p:bg>
+      <p:bgPr>
+        <a:solidFill>
+          <a:srgbClr val="FFFFFF"/>
+        </a:solidFill>
+      </p:bgPr>
+    </p:bg>
     <p:spTree>
       <p:nvGrpSpPr>
         <p:cNvPr id="1" name=""/>
@@ -1558,30 +6540,698 @@
           <a:chExt cx="0" cy="0"/>
         </a:xfrm>
       </p:grpSpPr>
-      <p:pic>
-        <p:nvPicPr>
-          <p:cNvPr id="2" name="Image 0" descr="/tmp/slide-1787841960907-kqi1trqh9mf.png">    </p:cNvPr>
-          <p:cNvPicPr>
-            <a:picLocks noChangeAspect="1"/>
-          </p:cNvPicPr>
-          <p:nvPr/>
-        </p:nvPicPr>
-        <p:blipFill>
-          <a:blip r:embed="rId1"/>
-          <a:stretch>
-            <a:fillRect/>
-          </a:stretch>
-        </p:blipFill>
-        <p:spPr>
-          <a:xfrm>
-            <a:off x="0" y="0"/>
-            <a:ext cx="12188952" cy="6858000"/>
-          </a:xfrm>
-          <a:prstGeom prst="rect">
-            <a:avLst/>
-          </a:prstGeom>
-        </p:spPr>
-      </p:pic>
+      <p:sp>
+        <p:nvSpPr>
+          <p:cNvPr id="2" name="Text 0"/>
+          <p:cNvSpPr/>
+          <p:nvPr/>
+        </p:nvSpPr>
+        <p:spPr>
+          <a:xfrm>
+            <a:off x="677098" y="406400"/>
+            <a:ext cx="2234816" cy="260747"/>
+          </a:xfrm>
+          <a:prstGeom prst="rect">
+            <a:avLst/>
+          </a:prstGeom>
+          <a:noFill/>
+          <a:ln/>
+        </p:spPr>
+        <p:txBody>
+          <a:bodyPr wrap="square" lIns="0" tIns="0" rIns="0" bIns="0" rtlCol="0" anchor="t"/>
+          <a:lstStyle/>
+          <a:p>
+            <a:pPr algn="l" indent="0" marL="0">
+              <a:lnSpc>
+                <a:spcPts val="2053"/>
+              </a:lnSpc>
+              <a:buNone/>
+            </a:pPr>
+            <a:r>
+              <a:rPr lang="en-US" sz="1466" dirty="0">
+                <a:solidFill>
+                  <a:srgbClr val="666666"/>
+                </a:solidFill>
+                <a:latin typeface="GeistMono" pitchFamily="34" charset="0"/>
+                <a:ea typeface="GeistMono" pitchFamily="34" charset="-122"/>
+                <a:cs typeface="GeistMono" pitchFamily="34" charset="-120"/>
+              </a:rPr>
+              <a:t>06 · THE DECISIONS</a:t>
+            </a:r>
+            <a:endParaRPr lang="en-US" sz="1466" dirty="0"/>
+          </a:p>
+        </p:txBody>
+      </p:sp>
+      <p:sp>
+        <p:nvSpPr>
+          <p:cNvPr id="3" name="Text 1"/>
+          <p:cNvSpPr/>
+          <p:nvPr/>
+        </p:nvSpPr>
+        <p:spPr>
+          <a:xfrm>
+            <a:off x="9929314" y="406400"/>
+            <a:ext cx="1614191" cy="260747"/>
+          </a:xfrm>
+          <a:prstGeom prst="rect">
+            <a:avLst/>
+          </a:prstGeom>
+          <a:noFill/>
+          <a:ln/>
+        </p:spPr>
+        <p:txBody>
+          <a:bodyPr wrap="square" lIns="0" tIns="0" rIns="0" bIns="0" rtlCol="0" anchor="t"/>
+          <a:lstStyle/>
+          <a:p>
+            <a:pPr algn="l" indent="0" marL="0">
+              <a:lnSpc>
+                <a:spcPts val="2053"/>
+              </a:lnSpc>
+              <a:buNone/>
+            </a:pPr>
+            <a:r>
+              <a:rPr lang="en-US" sz="1466" dirty="0">
+                <a:solidFill>
+                  <a:srgbClr val="666666"/>
+                </a:solidFill>
+                <a:latin typeface="GeistMono" pitchFamily="34" charset="0"/>
+                <a:ea typeface="GeistMono" pitchFamily="34" charset="-122"/>
+                <a:cs typeface="GeistMono" pitchFamily="34" charset="-120"/>
+              </a:rPr>
+              <a:t>SHEET 06 / 06</a:t>
+            </a:r>
+            <a:endParaRPr lang="en-US" sz="1466" dirty="0"/>
+          </a:p>
+        </p:txBody>
+      </p:sp>
+      <p:sp>
+        <p:nvSpPr>
+          <p:cNvPr id="4" name="Text 2"/>
+          <p:cNvSpPr/>
+          <p:nvPr/>
+        </p:nvSpPr>
+        <p:spPr>
+          <a:xfrm>
+            <a:off x="677098" y="768747"/>
+            <a:ext cx="11051451" cy="506214"/>
+          </a:xfrm>
+          <a:prstGeom prst="rect">
+            <a:avLst/>
+          </a:prstGeom>
+          <a:noFill/>
+          <a:ln/>
+        </p:spPr>
+        <p:txBody>
+          <a:bodyPr wrap="square" lIns="0" tIns="0" rIns="0" bIns="0" rtlCol="0" anchor="t"/>
+          <a:lstStyle/>
+          <a:p>
+            <a:pPr algn="l" indent="0" marL="0">
+              <a:lnSpc>
+                <a:spcPts val="3986"/>
+              </a:lnSpc>
+              <a:buNone/>
+            </a:pPr>
+            <a:r>
+              <a:rPr lang="en-US" sz="3066" b="1" dirty="0">
+                <a:solidFill>
+                  <a:srgbClr val="000000"/>
+                </a:solidFill>
+                <a:latin typeface="Geist" pitchFamily="34" charset="0"/>
+                <a:ea typeface="Geist" pitchFamily="34" charset="-122"/>
+                <a:cs typeface="Geist" pitchFamily="34" charset="-120"/>
+              </a:rPr>
+              <a:t>What we need to decide</a:t>
+            </a:r>
+            <a:endParaRPr lang="en-US" sz="3066" dirty="0"/>
+          </a:p>
+        </p:txBody>
+      </p:sp>
+      <p:sp>
+        <p:nvSpPr>
+          <p:cNvPr id="5" name="Text 3"/>
+          <p:cNvSpPr/>
+          <p:nvPr/>
+        </p:nvSpPr>
+        <p:spPr>
+          <a:xfrm>
+            <a:off x="677098" y="1444228"/>
+            <a:ext cx="10834756" cy="12700"/>
+          </a:xfrm>
+          <a:prstGeom prst="rect">
+            <a:avLst/>
+          </a:prstGeom>
+          <a:solidFill>
+            <a:srgbClr val="000000"/>
+          </a:solidFill>
+          <a:ln/>
+        </p:spPr>
+        <p:txBody>
+          <a:bodyPr wrap="square" rtlCol="0" anchor="ctr"/>
+          <a:lstStyle/>
+          <a:p>
+            <a:pPr indent="0" marL="0">
+              <a:buNone/>
+            </a:pPr>
+            <a:endParaRPr lang="en-US" dirty="0"/>
+          </a:p>
+        </p:txBody>
+      </p:sp>
+      <p:sp>
+        <p:nvSpPr>
+          <p:cNvPr id="6" name="Text 4"/>
+          <p:cNvSpPr/>
+          <p:nvPr/>
+        </p:nvSpPr>
+        <p:spPr>
+          <a:xfrm>
+            <a:off x="677098" y="1897063"/>
+            <a:ext cx="759643" cy="331986"/>
+          </a:xfrm>
+          <a:prstGeom prst="rect">
+            <a:avLst/>
+          </a:prstGeom>
+          <a:noFill/>
+          <a:ln/>
+        </p:spPr>
+        <p:txBody>
+          <a:bodyPr wrap="square" lIns="0" tIns="0" rIns="0" bIns="0" rtlCol="0" anchor="t"/>
+          <a:lstStyle/>
+          <a:p>
+            <a:pPr algn="l" indent="0" marL="0">
+              <a:lnSpc>
+                <a:spcPts val="2613"/>
+              </a:lnSpc>
+              <a:buNone/>
+            </a:pPr>
+            <a:r>
+              <a:rPr lang="en-US" sz="1866" dirty="0">
+                <a:solidFill>
+                  <a:srgbClr val="666666"/>
+                </a:solidFill>
+                <a:latin typeface="GeistMono" pitchFamily="34" charset="0"/>
+                <a:ea typeface="GeistMono" pitchFamily="34" charset="-122"/>
+                <a:cs typeface="GeistMono" pitchFamily="34" charset="-120"/>
+              </a:rPr>
+              <a:t>01</a:t>
+            </a:r>
+            <a:endParaRPr lang="en-US" sz="1866" dirty="0"/>
+          </a:p>
+        </p:txBody>
+      </p:sp>
+      <p:sp>
+        <p:nvSpPr>
+          <p:cNvPr id="7" name="Text 5"/>
+          <p:cNvSpPr/>
+          <p:nvPr/>
+        </p:nvSpPr>
+        <p:spPr>
+          <a:xfrm>
+            <a:off x="1692645" y="1897063"/>
+            <a:ext cx="10015593" cy="365522"/>
+          </a:xfrm>
+          <a:prstGeom prst="rect">
+            <a:avLst/>
+          </a:prstGeom>
+          <a:noFill/>
+          <a:ln/>
+        </p:spPr>
+        <p:txBody>
+          <a:bodyPr wrap="square" lIns="0" tIns="0" rIns="0" bIns="0" rtlCol="0" anchor="t"/>
+          <a:lstStyle/>
+          <a:p>
+            <a:pPr algn="l" indent="0" marL="0">
+              <a:lnSpc>
+                <a:spcPts val="2880"/>
+              </a:lnSpc>
+              <a:buNone/>
+            </a:pPr>
+            <a:r>
+              <a:rPr lang="en-US" sz="2133" b="1" dirty="0">
+                <a:solidFill>
+                  <a:srgbClr val="000000"/>
+                </a:solidFill>
+                <a:latin typeface="Geist" pitchFamily="34" charset="0"/>
+                <a:ea typeface="Geist" pitchFamily="34" charset="-122"/>
+                <a:cs typeface="Geist" pitchFamily="34" charset="-120"/>
+              </a:rPr>
+              <a:t>What actually stops</a:t>
+            </a:r>
+            <a:endParaRPr lang="en-US" sz="2133" dirty="0"/>
+          </a:p>
+        </p:txBody>
+      </p:sp>
+      <p:sp>
+        <p:nvSpPr>
+          <p:cNvPr id="8" name="Text 6"/>
+          <p:cNvSpPr/>
+          <p:nvPr/>
+        </p:nvSpPr>
+        <p:spPr>
+          <a:xfrm>
+            <a:off x="1692645" y="2347119"/>
+            <a:ext cx="10015593" cy="343694"/>
+          </a:xfrm>
+          <a:prstGeom prst="rect">
+            <a:avLst/>
+          </a:prstGeom>
+          <a:noFill/>
+          <a:ln/>
+        </p:spPr>
+        <p:txBody>
+          <a:bodyPr wrap="square" lIns="0" tIns="0" rIns="0" bIns="0" rtlCol="0" anchor="t"/>
+          <a:lstStyle/>
+          <a:p>
+            <a:pPr algn="l" indent="0" marL="0">
+              <a:lnSpc>
+                <a:spcPts val="2706"/>
+              </a:lnSpc>
+              <a:spcBef>
+                <a:spcPts val="667"/>
+              </a:spcBef>
+              <a:buNone/>
+            </a:pPr>
+            <a:r>
+              <a:rPr lang="en-US" sz="1866" dirty="0">
+                <a:solidFill>
+                  <a:srgbClr val="000000"/>
+                </a:solidFill>
+                <a:latin typeface="Geist" pitchFamily="34" charset="0"/>
+                <a:ea typeface="Geist" pitchFamily="34" charset="-122"/>
+                <a:cs typeface="Geist" pitchFamily="34" charset="-120"/>
+              </a:rPr>
+              <a:t>Name the work that halts when the budget is gone, and the work that does not.</a:t>
+            </a:r>
+            <a:endParaRPr lang="en-US" sz="1866" dirty="0"/>
+          </a:p>
+        </p:txBody>
+      </p:sp>
+      <p:sp>
+        <p:nvSpPr>
+          <p:cNvPr id="9" name="Text 7"/>
+          <p:cNvSpPr/>
+          <p:nvPr/>
+        </p:nvSpPr>
+        <p:spPr>
+          <a:xfrm>
+            <a:off x="677098" y="2998192"/>
+            <a:ext cx="759643" cy="331986"/>
+          </a:xfrm>
+          <a:prstGeom prst="rect">
+            <a:avLst/>
+          </a:prstGeom>
+          <a:noFill/>
+          <a:ln/>
+        </p:spPr>
+        <p:txBody>
+          <a:bodyPr wrap="square" lIns="0" tIns="0" rIns="0" bIns="0" rtlCol="0" anchor="t"/>
+          <a:lstStyle/>
+          <a:p>
+            <a:pPr algn="l" indent="0" marL="0">
+              <a:lnSpc>
+                <a:spcPts val="2613"/>
+              </a:lnSpc>
+              <a:buNone/>
+            </a:pPr>
+            <a:r>
+              <a:rPr lang="en-US" sz="1866" dirty="0">
+                <a:solidFill>
+                  <a:srgbClr val="666666"/>
+                </a:solidFill>
+                <a:latin typeface="GeistMono" pitchFamily="34" charset="0"/>
+                <a:ea typeface="GeistMono" pitchFamily="34" charset="-122"/>
+                <a:cs typeface="GeistMono" pitchFamily="34" charset="-120"/>
+              </a:rPr>
+              <a:t>02</a:t>
+            </a:r>
+            <a:endParaRPr lang="en-US" sz="1866" dirty="0"/>
+          </a:p>
+        </p:txBody>
+      </p:sp>
+      <p:sp>
+        <p:nvSpPr>
+          <p:cNvPr id="10" name="Text 8"/>
+          <p:cNvSpPr/>
+          <p:nvPr/>
+        </p:nvSpPr>
+        <p:spPr>
+          <a:xfrm>
+            <a:off x="1692645" y="2998192"/>
+            <a:ext cx="10015593" cy="365522"/>
+          </a:xfrm>
+          <a:prstGeom prst="rect">
+            <a:avLst/>
+          </a:prstGeom>
+          <a:noFill/>
+          <a:ln/>
+        </p:spPr>
+        <p:txBody>
+          <a:bodyPr wrap="square" lIns="0" tIns="0" rIns="0" bIns="0" rtlCol="0" anchor="t"/>
+          <a:lstStyle/>
+          <a:p>
+            <a:pPr algn="l" indent="0" marL="0">
+              <a:lnSpc>
+                <a:spcPts val="2880"/>
+              </a:lnSpc>
+              <a:buNone/>
+            </a:pPr>
+            <a:r>
+              <a:rPr lang="en-US" sz="2133" b="1" dirty="0">
+                <a:solidFill>
+                  <a:srgbClr val="000000"/>
+                </a:solidFill>
+                <a:latin typeface="Geist" pitchFamily="34" charset="0"/>
+                <a:ea typeface="Geist" pitchFamily="34" charset="-122"/>
+                <a:cs typeface="Geist" pitchFamily="34" charset="-120"/>
+              </a:rPr>
+              <a:t>Who declares it</a:t>
+            </a:r>
+            <a:endParaRPr lang="en-US" sz="2133" dirty="0"/>
+          </a:p>
+        </p:txBody>
+      </p:sp>
+      <p:sp>
+        <p:nvSpPr>
+          <p:cNvPr id="11" name="Text 9"/>
+          <p:cNvSpPr/>
+          <p:nvPr/>
+        </p:nvSpPr>
+        <p:spPr>
+          <a:xfrm>
+            <a:off x="1692645" y="3448248"/>
+            <a:ext cx="10015593" cy="343694"/>
+          </a:xfrm>
+          <a:prstGeom prst="rect">
+            <a:avLst/>
+          </a:prstGeom>
+          <a:noFill/>
+          <a:ln/>
+        </p:spPr>
+        <p:txBody>
+          <a:bodyPr wrap="square" lIns="0" tIns="0" rIns="0" bIns="0" rtlCol="0" anchor="t"/>
+          <a:lstStyle/>
+          <a:p>
+            <a:pPr algn="l" indent="0" marL="0">
+              <a:lnSpc>
+                <a:spcPts val="2706"/>
+              </a:lnSpc>
+              <a:spcBef>
+                <a:spcPts val="667"/>
+              </a:spcBef>
+              <a:buNone/>
+            </a:pPr>
+            <a:r>
+              <a:rPr lang="en-US" sz="1866" dirty="0">
+                <a:solidFill>
+                  <a:srgbClr val="000000"/>
+                </a:solidFill>
+                <a:latin typeface="Geist" pitchFamily="34" charset="0"/>
+                <a:ea typeface="Geist" pitchFamily="34" charset="-122"/>
+                <a:cs typeface="Geist" pitchFamily="34" charset="-120"/>
+              </a:rPr>
+              <a:t>One role who can say the budget is gone without convening anyone.</a:t>
+            </a:r>
+            <a:endParaRPr lang="en-US" sz="1866" dirty="0"/>
+          </a:p>
+        </p:txBody>
+      </p:sp>
+      <p:sp>
+        <p:nvSpPr>
+          <p:cNvPr id="12" name="Text 10"/>
+          <p:cNvSpPr/>
+          <p:nvPr/>
+        </p:nvSpPr>
+        <p:spPr>
+          <a:xfrm>
+            <a:off x="677098" y="4099322"/>
+            <a:ext cx="759643" cy="331986"/>
+          </a:xfrm>
+          <a:prstGeom prst="rect">
+            <a:avLst/>
+          </a:prstGeom>
+          <a:noFill/>
+          <a:ln/>
+        </p:spPr>
+        <p:txBody>
+          <a:bodyPr wrap="square" lIns="0" tIns="0" rIns="0" bIns="0" rtlCol="0" anchor="t"/>
+          <a:lstStyle/>
+          <a:p>
+            <a:pPr algn="l" indent="0" marL="0">
+              <a:lnSpc>
+                <a:spcPts val="2613"/>
+              </a:lnSpc>
+              <a:buNone/>
+            </a:pPr>
+            <a:r>
+              <a:rPr lang="en-US" sz="1866" dirty="0">
+                <a:solidFill>
+                  <a:srgbClr val="666666"/>
+                </a:solidFill>
+                <a:latin typeface="GeistMono" pitchFamily="34" charset="0"/>
+                <a:ea typeface="GeistMono" pitchFamily="34" charset="-122"/>
+                <a:cs typeface="GeistMono" pitchFamily="34" charset="-120"/>
+              </a:rPr>
+              <a:t>03</a:t>
+            </a:r>
+            <a:endParaRPr lang="en-US" sz="1866" dirty="0"/>
+          </a:p>
+        </p:txBody>
+      </p:sp>
+      <p:sp>
+        <p:nvSpPr>
+          <p:cNvPr id="13" name="Text 11"/>
+          <p:cNvSpPr/>
+          <p:nvPr/>
+        </p:nvSpPr>
+        <p:spPr>
+          <a:xfrm>
+            <a:off x="1692645" y="4099322"/>
+            <a:ext cx="10015593" cy="365522"/>
+          </a:xfrm>
+          <a:prstGeom prst="rect">
+            <a:avLst/>
+          </a:prstGeom>
+          <a:noFill/>
+          <a:ln/>
+        </p:spPr>
+        <p:txBody>
+          <a:bodyPr wrap="square" lIns="0" tIns="0" rIns="0" bIns="0" rtlCol="0" anchor="t"/>
+          <a:lstStyle/>
+          <a:p>
+            <a:pPr algn="l" indent="0" marL="0">
+              <a:lnSpc>
+                <a:spcPts val="2880"/>
+              </a:lnSpc>
+              <a:buNone/>
+            </a:pPr>
+            <a:r>
+              <a:rPr lang="en-US" sz="2133" b="1" dirty="0">
+                <a:solidFill>
+                  <a:srgbClr val="000000"/>
+                </a:solidFill>
+                <a:latin typeface="Geist" pitchFamily="34" charset="0"/>
+                <a:ea typeface="Geist" pitchFamily="34" charset="-122"/>
+                <a:cs typeface="Geist" pitchFamily="34" charset="-120"/>
+              </a:rPr>
+              <a:t>What we refuse to promise</a:t>
+            </a:r>
+            <a:endParaRPr lang="en-US" sz="2133" dirty="0"/>
+          </a:p>
+        </p:txBody>
+      </p:sp>
+      <p:sp>
+        <p:nvSpPr>
+          <p:cNvPr id="14" name="Text 12"/>
+          <p:cNvSpPr/>
+          <p:nvPr/>
+        </p:nvSpPr>
+        <p:spPr>
+          <a:xfrm>
+            <a:off x="1692645" y="4549378"/>
+            <a:ext cx="10015593" cy="343694"/>
+          </a:xfrm>
+          <a:prstGeom prst="rect">
+            <a:avLst/>
+          </a:prstGeom>
+          <a:noFill/>
+          <a:ln/>
+        </p:spPr>
+        <p:txBody>
+          <a:bodyPr wrap="square" lIns="0" tIns="0" rIns="0" bIns="0" rtlCol="0" anchor="t"/>
+          <a:lstStyle/>
+          <a:p>
+            <a:pPr algn="l" indent="0" marL="0">
+              <a:lnSpc>
+                <a:spcPts val="2706"/>
+              </a:lnSpc>
+              <a:spcBef>
+                <a:spcPts val="667"/>
+              </a:spcBef>
+              <a:buNone/>
+            </a:pPr>
+            <a:r>
+              <a:rPr lang="en-US" sz="1866" dirty="0">
+                <a:solidFill>
+                  <a:srgbClr val="000000"/>
+                </a:solidFill>
+                <a:latin typeface="Geist" pitchFamily="34" charset="0"/>
+                <a:ea typeface="Geist" pitchFamily="34" charset="-122"/>
+                <a:cs typeface="Geist" pitchFamily="34" charset="-120"/>
+              </a:rPr>
+              <a:t>The exclusions, written down before the first incident asks for them.</a:t>
+            </a:r>
+            <a:endParaRPr lang="en-US" sz="1866" dirty="0"/>
+          </a:p>
+        </p:txBody>
+      </p:sp>
+      <p:sp>
+        <p:nvSpPr>
+          <p:cNvPr id="15" name="Shape 13"/>
+          <p:cNvSpPr/>
+          <p:nvPr/>
+        </p:nvSpPr>
+        <p:spPr>
+          <a:xfrm>
+            <a:off x="677098" y="5308402"/>
+            <a:ext cx="10834756" cy="0"/>
+          </a:xfrm>
+          <a:prstGeom prst="line">
+            <a:avLst/>
+          </a:prstGeom>
+          <a:noFill/>
+          <a:ln w="38095">
+            <a:solidFill>
+              <a:srgbClr val="000000"/>
+            </a:solidFill>
+            <a:prstDash val="solid"/>
+          </a:ln>
+        </p:spPr>
+      </p:sp>
+      <p:sp>
+        <p:nvSpPr>
+          <p:cNvPr id="16" name="Text 14"/>
+          <p:cNvSpPr/>
+          <p:nvPr/>
+        </p:nvSpPr>
+        <p:spPr>
+          <a:xfrm>
+            <a:off x="677098" y="5530652"/>
+            <a:ext cx="11051451" cy="379214"/>
+          </a:xfrm>
+          <a:prstGeom prst="rect">
+            <a:avLst/>
+          </a:prstGeom>
+          <a:noFill/>
+          <a:ln/>
+        </p:spPr>
+        <p:txBody>
+          <a:bodyPr wrap="square" lIns="0" tIns="0" rIns="0" bIns="0" rtlCol="0" anchor="t"/>
+          <a:lstStyle/>
+          <a:p>
+            <a:pPr algn="l" indent="0" marL="0">
+              <a:lnSpc>
+                <a:spcPts val="2986"/>
+              </a:lnSpc>
+              <a:buNone/>
+            </a:pPr>
+            <a:r>
+              <a:rPr lang="en-US" sz="2133" b="1" dirty="0">
+                <a:solidFill>
+                  <a:srgbClr val="000000"/>
+                </a:solidFill>
+                <a:latin typeface="Geist" pitchFamily="34" charset="0"/>
+                <a:ea typeface="Geist" pitchFamily="34" charset="-122"/>
+                <a:cs typeface="Geist" pitchFamily="34" charset="-120"/>
+              </a:rPr>
+              <a:t>Until these three are answered, we have a metric — and metrics stop nothing.</a:t>
+            </a:r>
+            <a:endParaRPr lang="en-US" sz="2133" dirty="0"/>
+          </a:p>
+        </p:txBody>
+      </p:sp>
+      <p:sp>
+        <p:nvSpPr>
+          <p:cNvPr id="17" name="Text 15"/>
+          <p:cNvSpPr/>
+          <p:nvPr/>
+        </p:nvSpPr>
+        <p:spPr>
+          <a:xfrm>
+            <a:off x="677098" y="6113066"/>
+            <a:ext cx="2210331" cy="236934"/>
+          </a:xfrm>
+          <a:prstGeom prst="rect">
+            <a:avLst/>
+          </a:prstGeom>
+          <a:noFill/>
+          <a:ln/>
+        </p:spPr>
+        <p:txBody>
+          <a:bodyPr wrap="square" lIns="0" tIns="0" rIns="0" bIns="0" rtlCol="0" anchor="t"/>
+          <a:lstStyle/>
+          <a:p>
+            <a:pPr algn="l" indent="0" marL="0">
+              <a:lnSpc>
+                <a:spcPts val="1866"/>
+              </a:lnSpc>
+              <a:buNone/>
+            </a:pPr>
+            <a:r>
+              <a:rPr lang="en-US" sz="1333" dirty="0">
+                <a:solidFill>
+                  <a:srgbClr val="666666"/>
+                </a:solidFill>
+                <a:latin typeface="GeistMono" pitchFamily="34" charset="0"/>
+                <a:ea typeface="GeistMono" pitchFamily="34" charset="-122"/>
+                <a:cs typeface="GeistMono" pitchFamily="34" charset="-120"/>
+              </a:rPr>
+              <a:t>SLO · OPERATING NOTE</a:t>
+            </a:r>
+            <a:endParaRPr lang="en-US" sz="1333" dirty="0"/>
+          </a:p>
+        </p:txBody>
+      </p:sp>
+      <p:sp>
+        <p:nvSpPr>
+          <p:cNvPr id="18" name="Text 16"/>
+          <p:cNvSpPr/>
+          <p:nvPr/>
+        </p:nvSpPr>
+        <p:spPr>
+          <a:xfrm>
+            <a:off x="6527755" y="6113066"/>
+            <a:ext cx="5083781" cy="236934"/>
+          </a:xfrm>
+          <a:prstGeom prst="rect">
+            <a:avLst/>
+          </a:prstGeom>
+          <a:noFill/>
+          <a:ln/>
+        </p:spPr>
+        <p:txBody>
+          <a:bodyPr wrap="square" lIns="0" tIns="0" rIns="0" bIns="0" rtlCol="0" anchor="t"/>
+          <a:lstStyle/>
+          <a:p>
+            <a:pPr algn="l" indent="0" marL="0">
+              <a:lnSpc>
+                <a:spcPts val="1866"/>
+              </a:lnSpc>
+              <a:buNone/>
+            </a:pPr>
+            <a:r>
+              <a:rPr lang="en-US" sz="1333" dirty="0">
+                <a:solidFill>
+                  <a:srgbClr val="666666"/>
+                </a:solidFill>
+                <a:latin typeface="GeistMono" pitchFamily="34" charset="0"/>
+                <a:ea typeface="GeistMono" pitchFamily="34" charset="-122"/>
+                <a:cs typeface="GeistMono" pitchFamily="34" charset="-120"/>
+              </a:rPr>
+              <a:t>Source: none — no figures appear in this deck.</a:t>
+            </a:r>
+            <a:endParaRPr lang="en-US" sz="1333" dirty="0"/>
+          </a:p>
+        </p:txBody>
+      </p:sp>
     </p:spTree>
   </p:cSld>
   <p:clrMapOvr>

--- a/decks/slo/slo.pptx
+++ b/decks/slo/slo.pptx
@@ -1338,7 +1338,7 @@
           <a:ln/>
         </p:spPr>
         <p:txBody>
-          <a:bodyPr wrap="square" lIns="0" tIns="0" rIns="0" bIns="0" rtlCol="0" anchor="t"/>
+          <a:bodyPr wrap="none" lIns="0" tIns="0" rIns="0" bIns="0" rtlCol="0" anchor="t"/>
           <a:lstStyle/>
           <a:p>
             <a:pPr algn="l" indent="0" marL="0">
@@ -1380,7 +1380,7 @@
           <a:ln/>
         </p:spPr>
         <p:txBody>
-          <a:bodyPr wrap="square" lIns="0" tIns="0" rIns="0" bIns="0" rtlCol="0" anchor="t"/>
+          <a:bodyPr wrap="none" lIns="0" tIns="0" rIns="0" bIns="0" rtlCol="0" anchor="t"/>
           <a:lstStyle/>
           <a:p>
             <a:pPr algn="l" indent="0" marL="0">
@@ -1422,7 +1422,7 @@
           <a:ln/>
         </p:spPr>
         <p:txBody>
-          <a:bodyPr wrap="square" lIns="0" tIns="0" rIns="0" bIns="0" rtlCol="0" anchor="t"/>
+          <a:bodyPr wrap="none" lIns="0" tIns="0" rIns="0" bIns="0" rtlCol="0" anchor="t"/>
           <a:lstStyle/>
           <a:p>
             <a:pPr algn="l" indent="0" marL="0">
@@ -1494,7 +1494,9 @@
           <a:ln/>
         </p:spPr>
         <p:txBody>
-          <a:bodyPr wrap="square" lIns="0" tIns="0" rIns="0" bIns="0" rtlCol="0" anchor="t"/>
+          <a:bodyPr wrap="square" lIns="0" tIns="0" rIns="0" bIns="0" rtlCol="0" anchor="t">
+            <a:normAutofit/>
+          </a:bodyPr>
           <a:lstStyle/>
           <a:p>
             <a:pPr algn="l" indent="0" marL="0">
@@ -1576,7 +1578,9 @@
           <a:ln/>
         </p:spPr>
         <p:txBody>
-          <a:bodyPr wrap="square" lIns="0" tIns="0" rIns="0" bIns="0" rtlCol="0" anchor="t"/>
+          <a:bodyPr wrap="square" lIns="0" tIns="0" rIns="0" bIns="0" rtlCol="0" anchor="t">
+            <a:normAutofit/>
+          </a:bodyPr>
           <a:lstStyle/>
           <a:p>
             <a:pPr algn="l" indent="0" marL="0">
@@ -1625,6 +1629,10 @@
             <a:prstDash val="solid"/>
           </a:ln>
         </p:spPr>
+        <p:txBody>
+          <a:bodyPr/>
+          <a:p/>
+        </p:txBody>
       </p:sp>
       <p:sp>
         <p:nvSpPr>
@@ -1644,7 +1652,7 @@
           <a:ln/>
         </p:spPr>
         <p:txBody>
-          <a:bodyPr wrap="square" lIns="0" tIns="0" rIns="0" bIns="0" rtlCol="0" anchor="t"/>
+          <a:bodyPr wrap="none" lIns="0" tIns="0" rIns="0" bIns="0" rtlCol="0" anchor="t"/>
           <a:lstStyle/>
           <a:p>
             <a:pPr algn="l" indent="0" marL="0">
@@ -1686,7 +1694,7 @@
           <a:ln/>
         </p:spPr>
         <p:txBody>
-          <a:bodyPr wrap="square" lIns="0" tIns="0" rIns="0" bIns="0" rtlCol="0" anchor="t"/>
+          <a:bodyPr wrap="none" lIns="0" tIns="0" rIns="0" bIns="0" rtlCol="0" anchor="t"/>
           <a:lstStyle/>
           <a:p>
             <a:pPr algn="l" indent="0" marL="0">
@@ -1732,6 +1740,10 @@
             <a:prstDash val="solid"/>
           </a:ln>
         </p:spPr>
+        <p:txBody>
+          <a:bodyPr/>
+          <a:p/>
+        </p:txBody>
       </p:sp>
       <p:sp>
         <p:nvSpPr>
@@ -1751,7 +1763,7 @@
           <a:ln/>
         </p:spPr>
         <p:txBody>
-          <a:bodyPr wrap="square" lIns="0" tIns="0" rIns="0" bIns="0" rtlCol="0" anchor="t"/>
+          <a:bodyPr wrap="none" lIns="0" tIns="0" rIns="0" bIns="0" rtlCol="0" anchor="t"/>
           <a:lstStyle/>
           <a:p>
             <a:pPr algn="l" indent="0" marL="0">
@@ -1777,134 +1789,7 @@
       </p:sp>
       <p:sp>
         <p:nvSpPr>
-          <p:cNvPr id="13" name="Text 11"/>
-          <p:cNvSpPr/>
-          <p:nvPr/>
-        </p:nvSpPr>
-        <p:spPr>
-          <a:xfrm>
-            <a:off x="8206315" y="2191742"/>
-            <a:ext cx="3305539" cy="3718123"/>
-          </a:xfrm>
-          <a:prstGeom prst="rect">
-            <a:avLst/>
-          </a:prstGeom>
-          <a:noFill/>
-          <a:ln/>
-        </p:spPr>
-        <p:txBody>
-          <a:bodyPr wrap="square" lIns="0" tIns="0" rIns="0" bIns="0" rtlCol="0" anchor="t"/>
-          <a:lstStyle/>
-          <a:p>
-            <a:pPr algn="l" marL="342900" indent="-342900">
-              <a:lnSpc>
-                <a:spcPts val="2053"/>
-              </a:lnSpc>
-              <a:buSzPct val="100000"/>
-              <a:buChar char="•"/>
-            </a:pPr>
-            <a:r>
-              <a:rPr lang="en-US" sz="1466" dirty="0">
-                <a:solidFill>
-                  <a:srgbClr val="000000"/>
-                </a:solidFill>
-                <a:latin typeface="GeistMono" pitchFamily="34" charset="0"/>
-                <a:ea typeface="GeistMono" pitchFamily="34" charset="-122"/>
-                <a:cs typeface="GeistMono" pitchFamily="34" charset="-120"/>
-              </a:rPr>
-              <a:t>02 / THE SWITCH</a:t>
-            </a:r>
-            <a:endParaRPr lang="en-US" sz="1466" dirty="0"/>
-          </a:p>
-          <a:p>
-            <a:pPr algn="l" marL="342900" indent="-342900">
-              <a:lnSpc>
-                <a:spcPts val="2053"/>
-              </a:lnSpc>
-              <a:buSzPct val="100000"/>
-              <a:buChar char="•"/>
-            </a:pPr>
-            <a:r>
-              <a:rPr lang="en-US" sz="1466" dirty="0">
-                <a:solidFill>
-                  <a:srgbClr val="000000"/>
-                </a:solidFill>
-                <a:latin typeface="GeistMono" pitchFamily="34" charset="0"/>
-                <a:ea typeface="GeistMono" pitchFamily="34" charset="-122"/>
-                <a:cs typeface="GeistMono" pitchFamily="34" charset="-120"/>
-              </a:rPr>
-              <a:t>03 / THE BUDGET</a:t>
-            </a:r>
-            <a:endParaRPr lang="en-US" sz="1466" dirty="0"/>
-          </a:p>
-          <a:p>
-            <a:pPr algn="l" marL="342900" indent="-342900">
-              <a:lnSpc>
-                <a:spcPts val="2053"/>
-              </a:lnSpc>
-              <a:buSzPct val="100000"/>
-              <a:buChar char="•"/>
-            </a:pPr>
-            <a:r>
-              <a:rPr lang="en-US" sz="1466" dirty="0">
-                <a:solidFill>
-                  <a:srgbClr val="000000"/>
-                </a:solidFill>
-                <a:latin typeface="GeistMono" pitchFamily="34" charset="0"/>
-                <a:ea typeface="GeistMono" pitchFamily="34" charset="-122"/>
-                <a:cs typeface="GeistMono" pitchFamily="34" charset="-120"/>
-              </a:rPr>
-              <a:t>04 / THE EXCLUSIONS</a:t>
-            </a:r>
-            <a:endParaRPr lang="en-US" sz="1466" dirty="0"/>
-          </a:p>
-          <a:p>
-            <a:pPr algn="l" marL="342900" indent="-342900">
-              <a:lnSpc>
-                <a:spcPts val="2053"/>
-              </a:lnSpc>
-              <a:buSzPct val="100000"/>
-              <a:buChar char="•"/>
-            </a:pPr>
-            <a:r>
-              <a:rPr lang="en-US" sz="1466" dirty="0">
-                <a:solidFill>
-                  <a:srgbClr val="000000"/>
-                </a:solidFill>
-                <a:latin typeface="GeistMono" pitchFamily="34" charset="0"/>
-                <a:ea typeface="GeistMono" pitchFamily="34" charset="-122"/>
-                <a:cs typeface="GeistMono" pitchFamily="34" charset="-120"/>
-              </a:rPr>
-              <a:t>05 / THE FAILURE MODES</a:t>
-            </a:r>
-            <a:endParaRPr lang="en-US" sz="1466" dirty="0"/>
-          </a:p>
-          <a:p>
-            <a:pPr algn="l" marL="342900" indent="-342900">
-              <a:lnSpc>
-                <a:spcPts val="2053"/>
-              </a:lnSpc>
-              <a:buSzPct val="100000"/>
-              <a:buChar char="•"/>
-            </a:pPr>
-            <a:r>
-              <a:rPr lang="en-US" sz="1466" dirty="0">
-                <a:solidFill>
-                  <a:srgbClr val="000000"/>
-                </a:solidFill>
-                <a:latin typeface="GeistMono" pitchFamily="34" charset="0"/>
-                <a:ea typeface="GeistMono" pitchFamily="34" charset="-122"/>
-                <a:cs typeface="GeistMono" pitchFamily="34" charset="-120"/>
-              </a:rPr>
-              <a:t>06 / THE DECISIONS</a:t>
-            </a:r>
-            <a:endParaRPr lang="en-US" sz="1466" dirty="0"/>
-          </a:p>
-        </p:txBody>
-      </p:sp>
-      <p:sp>
-        <p:nvSpPr>
-          <p:cNvPr id="14" name="Shape 12"/>
+          <p:cNvPr id="13" name="Shape 11"/>
           <p:cNvSpPr/>
           <p:nvPr/>
         </p:nvSpPr>
@@ -1924,10 +1809,14 @@
             <a:prstDash val="solid"/>
           </a:ln>
         </p:spPr>
-      </p:sp>
-      <p:sp>
-        <p:nvSpPr>
-          <p:cNvPr id="15" name="Text 13"/>
+        <p:txBody>
+          <a:bodyPr/>
+          <a:p/>
+        </p:txBody>
+      </p:sp>
+      <p:sp>
+        <p:nvSpPr>
+          <p:cNvPr id="14" name="Text 12"/>
           <p:cNvSpPr/>
           <p:nvPr/>
         </p:nvSpPr>
@@ -1943,7 +1832,7 @@
           <a:ln/>
         </p:spPr>
         <p:txBody>
-          <a:bodyPr wrap="square" lIns="0" tIns="0" rIns="0" bIns="0" rtlCol="0" anchor="t"/>
+          <a:bodyPr wrap="none" lIns="0" tIns="0" rIns="0" bIns="0" rtlCol="0" anchor="t"/>
           <a:lstStyle/>
           <a:p>
             <a:pPr algn="l" indent="0" marL="0">
@@ -1969,7 +1858,7 @@
       </p:sp>
       <p:sp>
         <p:nvSpPr>
-          <p:cNvPr id="16" name="Shape 14"/>
+          <p:cNvPr id="15" name="Shape 13"/>
           <p:cNvSpPr/>
           <p:nvPr/>
         </p:nvSpPr>
@@ -1989,10 +1878,14 @@
             <a:prstDash val="solid"/>
           </a:ln>
         </p:spPr>
-      </p:sp>
-      <p:sp>
-        <p:nvSpPr>
-          <p:cNvPr id="17" name="Text 15"/>
+        <p:txBody>
+          <a:bodyPr/>
+          <a:p/>
+        </p:txBody>
+      </p:sp>
+      <p:sp>
+        <p:nvSpPr>
+          <p:cNvPr id="16" name="Text 14"/>
           <p:cNvSpPr/>
           <p:nvPr/>
         </p:nvSpPr>
@@ -2008,7 +1901,7 @@
           <a:ln/>
         </p:spPr>
         <p:txBody>
-          <a:bodyPr wrap="square" lIns="0" tIns="0" rIns="0" bIns="0" rtlCol="0" anchor="t"/>
+          <a:bodyPr wrap="none" lIns="0" tIns="0" rIns="0" bIns="0" rtlCol="0" anchor="t"/>
           <a:lstStyle/>
           <a:p>
             <a:pPr algn="l" indent="0" marL="0">
@@ -2034,7 +1927,7 @@
       </p:sp>
       <p:sp>
         <p:nvSpPr>
-          <p:cNvPr id="18" name="Shape 16"/>
+          <p:cNvPr id="17" name="Shape 15"/>
           <p:cNvSpPr/>
           <p:nvPr/>
         </p:nvSpPr>
@@ -2054,10 +1947,14 @@
             <a:prstDash val="solid"/>
           </a:ln>
         </p:spPr>
-      </p:sp>
-      <p:sp>
-        <p:nvSpPr>
-          <p:cNvPr id="19" name="Text 17"/>
+        <p:txBody>
+          <a:bodyPr/>
+          <a:p/>
+        </p:txBody>
+      </p:sp>
+      <p:sp>
+        <p:nvSpPr>
+          <p:cNvPr id="18" name="Text 16"/>
           <p:cNvSpPr/>
           <p:nvPr/>
         </p:nvSpPr>
@@ -2073,7 +1970,7 @@
           <a:ln/>
         </p:spPr>
         <p:txBody>
-          <a:bodyPr wrap="square" lIns="0" tIns="0" rIns="0" bIns="0" rtlCol="0" anchor="t"/>
+          <a:bodyPr wrap="none" lIns="0" tIns="0" rIns="0" bIns="0" rtlCol="0" anchor="t"/>
           <a:lstStyle/>
           <a:p>
             <a:pPr algn="l" indent="0" marL="0">
@@ -2099,7 +1996,7 @@
       </p:sp>
       <p:sp>
         <p:nvSpPr>
-          <p:cNvPr id="20" name="Shape 18"/>
+          <p:cNvPr id="19" name="Shape 17"/>
           <p:cNvSpPr/>
           <p:nvPr/>
         </p:nvSpPr>
@@ -2119,10 +2016,14 @@
             <a:prstDash val="solid"/>
           </a:ln>
         </p:spPr>
-      </p:sp>
-      <p:sp>
-        <p:nvSpPr>
-          <p:cNvPr id="21" name="Text 19"/>
+        <p:txBody>
+          <a:bodyPr/>
+          <a:p/>
+        </p:txBody>
+      </p:sp>
+      <p:sp>
+        <p:nvSpPr>
+          <p:cNvPr id="20" name="Text 18"/>
           <p:cNvSpPr/>
           <p:nvPr/>
         </p:nvSpPr>
@@ -2138,7 +2039,7 @@
           <a:ln/>
         </p:spPr>
         <p:txBody>
-          <a:bodyPr wrap="square" lIns="0" tIns="0" rIns="0" bIns="0" rtlCol="0" anchor="t"/>
+          <a:bodyPr wrap="none" lIns="0" tIns="0" rIns="0" bIns="0" rtlCol="0" anchor="t"/>
           <a:lstStyle/>
           <a:p>
             <a:pPr algn="l" indent="0" marL="0">
@@ -2164,7 +2065,7 @@
       </p:sp>
       <p:sp>
         <p:nvSpPr>
-          <p:cNvPr id="22" name="Shape 20"/>
+          <p:cNvPr id="21" name="Shape 19"/>
           <p:cNvSpPr/>
           <p:nvPr/>
         </p:nvSpPr>
@@ -2184,10 +2085,14 @@
             <a:prstDash val="solid"/>
           </a:ln>
         </p:spPr>
-      </p:sp>
-      <p:sp>
-        <p:nvSpPr>
-          <p:cNvPr id="23" name="Text 21"/>
+        <p:txBody>
+          <a:bodyPr/>
+          <a:p/>
+        </p:txBody>
+      </p:sp>
+      <p:sp>
+        <p:nvSpPr>
+          <p:cNvPr id="22" name="Text 20"/>
           <p:cNvSpPr/>
           <p:nvPr/>
         </p:nvSpPr>
@@ -2203,7 +2108,7 @@
           <a:ln/>
         </p:spPr>
         <p:txBody>
-          <a:bodyPr wrap="square" lIns="0" tIns="0" rIns="0" bIns="0" rtlCol="0" anchor="t"/>
+          <a:bodyPr wrap="none" lIns="0" tIns="0" rIns="0" bIns="0" rtlCol="0" anchor="t"/>
           <a:lstStyle/>
           <a:p>
             <a:pPr algn="l" indent="0" marL="0">
@@ -2229,7 +2134,7 @@
       </p:sp>
       <p:sp>
         <p:nvSpPr>
-          <p:cNvPr id="24" name="Text 22"/>
+          <p:cNvPr id="23" name="Text 21"/>
           <p:cNvSpPr/>
           <p:nvPr/>
         </p:nvSpPr>
@@ -2245,7 +2150,7 @@
           <a:ln/>
         </p:spPr>
         <p:txBody>
-          <a:bodyPr wrap="square" lIns="0" tIns="0" rIns="0" bIns="0" rtlCol="0" anchor="t"/>
+          <a:bodyPr wrap="none" lIns="0" tIns="0" rIns="0" bIns="0" rtlCol="0" anchor="t"/>
           <a:lstStyle/>
           <a:p>
             <a:pPr algn="l" indent="0" marL="0">
@@ -2271,7 +2176,7 @@
       </p:sp>
       <p:sp>
         <p:nvSpPr>
-          <p:cNvPr id="25" name="Text 23"/>
+          <p:cNvPr id="24" name="Text 22"/>
           <p:cNvSpPr/>
           <p:nvPr/>
         </p:nvSpPr>
@@ -2287,7 +2192,7 @@
           <a:ln/>
         </p:spPr>
         <p:txBody>
-          <a:bodyPr wrap="square" lIns="0" tIns="0" rIns="0" bIns="0" rtlCol="0" anchor="t"/>
+          <a:bodyPr wrap="none" lIns="0" tIns="0" rIns="0" bIns="0" rtlCol="0" anchor="t"/>
           <a:lstStyle/>
           <a:p>
             <a:pPr algn="l" indent="0" marL="0">
@@ -2361,7 +2266,7 @@
           <a:ln/>
         </p:spPr>
         <p:txBody>
-          <a:bodyPr wrap="square" lIns="0" tIns="0" rIns="0" bIns="0" rtlCol="0" anchor="t"/>
+          <a:bodyPr wrap="none" lIns="0" tIns="0" rIns="0" bIns="0" rtlCol="0" anchor="t"/>
           <a:lstStyle/>
           <a:p>
             <a:pPr algn="l" indent="0" marL="0">
@@ -2403,7 +2308,7 @@
           <a:ln/>
         </p:spPr>
         <p:txBody>
-          <a:bodyPr wrap="square" lIns="0" tIns="0" rIns="0" bIns="0" rtlCol="0" anchor="t"/>
+          <a:bodyPr wrap="none" lIns="0" tIns="0" rIns="0" bIns="0" rtlCol="0" anchor="t"/>
           <a:lstStyle/>
           <a:p>
             <a:pPr algn="l" indent="0" marL="0">
@@ -2445,7 +2350,7 @@
           <a:ln/>
         </p:spPr>
         <p:txBody>
-          <a:bodyPr wrap="square" lIns="0" tIns="0" rIns="0" bIns="0" rtlCol="0" anchor="t"/>
+          <a:bodyPr wrap="none" lIns="0" tIns="0" rIns="0" bIns="0" rtlCol="0" anchor="t"/>
           <a:lstStyle/>
           <a:p>
             <a:pPr algn="l" indent="0" marL="0">
@@ -2543,92 +2448,7 @@
       </p:sp>
       <p:sp>
         <p:nvSpPr>
-          <p:cNvPr id="7" name="Text 5"/>
-          <p:cNvSpPr/>
-          <p:nvPr/>
-        </p:nvSpPr>
-        <p:spPr>
-          <a:xfrm>
-            <a:off x="689795" y="2390577"/>
-            <a:ext cx="5188835" cy="2617589"/>
-          </a:xfrm>
-          <a:prstGeom prst="rect">
-            <a:avLst/>
-          </a:prstGeom>
-          <a:noFill/>
-          <a:ln/>
-        </p:spPr>
-        <p:txBody>
-          <a:bodyPr wrap="square" lIns="118519" tIns="0" rIns="0" bIns="0" rtlCol="0" anchor="t"/>
-          <a:lstStyle/>
-          <a:p>
-            <a:pPr algn="l" marL="118519" indent="-118519">
-              <a:lnSpc>
-                <a:spcPts val="2706"/>
-              </a:lnSpc>
-              <a:buSzPct val="100000"/>
-              <a:buChar char="•"/>
-            </a:pPr>
-            <a:r>
-              <a:rPr lang="en-US" sz="1866" dirty="0">
-                <a:solidFill>
-                  <a:srgbClr val="000000"/>
-                </a:solidFill>
-                <a:latin typeface="Geist" pitchFamily="34" charset="0"/>
-                <a:ea typeface="Geist" pitchFamily="34" charset="-122"/>
-                <a:cs typeface="Geist" pitchFamily="34" charset="-120"/>
-              </a:rPr>
-              <a:t>It describes how the service behaved.</a:t>
-            </a:r>
-            <a:endParaRPr lang="en-US" sz="1866" dirty="0"/>
-          </a:p>
-          <a:p>
-            <a:pPr algn="l" marL="118519" indent="-118519">
-              <a:lnSpc>
-                <a:spcPts val="2706"/>
-              </a:lnSpc>
-              <a:buSzPct val="100000"/>
-              <a:buChar char="•"/>
-            </a:pPr>
-            <a:r>
-              <a:rPr lang="en-US" sz="1866" dirty="0">
-                <a:solidFill>
-                  <a:srgbClr val="000000"/>
-                </a:solidFill>
-                <a:latin typeface="Geist" pitchFamily="34" charset="0"/>
-                <a:ea typeface="Geist" pitchFamily="34" charset="-122"/>
-                <a:cs typeface="Geist" pitchFamily="34" charset="-120"/>
-              </a:rPr>
-              <a:t>It gets reported, compared, discussed.</a:t>
-            </a:r>
-            <a:endParaRPr lang="en-US" sz="1866" dirty="0"/>
-          </a:p>
-          <a:p>
-            <a:pPr algn="l" marL="118519" indent="-118519">
-              <a:lnSpc>
-                <a:spcPts val="2706"/>
-              </a:lnSpc>
-              <a:buSzPct val="100000"/>
-              <a:buChar char="•"/>
-            </a:pPr>
-            <a:r>
-              <a:rPr lang="en-US" sz="1866" dirty="0">
-                <a:solidFill>
-                  <a:srgbClr val="000000"/>
-                </a:solidFill>
-                <a:latin typeface="Geist" pitchFamily="34" charset="0"/>
-                <a:ea typeface="Geist" pitchFamily="34" charset="-122"/>
-                <a:cs typeface="Geist" pitchFamily="34" charset="-120"/>
-              </a:rPr>
-              <a:t>Nothing about next week has to change.</a:t>
-            </a:r>
-            <a:endParaRPr lang="en-US" sz="1866" dirty="0"/>
-          </a:p>
-        </p:txBody>
-      </p:sp>
-      <p:sp>
-        <p:nvSpPr>
-          <p:cNvPr id="8" name="Shape 6"/>
+          <p:cNvPr id="7" name="Shape 5"/>
           <p:cNvSpPr/>
           <p:nvPr/>
         </p:nvSpPr>
@@ -2648,10 +2468,14 @@
             <a:prstDash val="solid"/>
           </a:ln>
         </p:spPr>
-      </p:sp>
-      <p:sp>
-        <p:nvSpPr>
-          <p:cNvPr id="9" name="Text 7"/>
+        <p:txBody>
+          <a:bodyPr/>
+          <a:p/>
+        </p:txBody>
+      </p:sp>
+      <p:sp>
+        <p:nvSpPr>
+          <p:cNvPr id="8" name="Text 6"/>
           <p:cNvSpPr/>
           <p:nvPr/>
         </p:nvSpPr>
@@ -2667,7 +2491,7 @@
           <a:ln/>
         </p:spPr>
         <p:txBody>
-          <a:bodyPr wrap="square" lIns="0" tIns="0" rIns="0" bIns="0" rtlCol="0" anchor="t"/>
+          <a:bodyPr wrap="none" lIns="0" tIns="0" rIns="0" bIns="0" rtlCol="0" anchor="t"/>
           <a:lstStyle/>
           <a:p>
             <a:pPr algn="l" indent="0" marL="0">
@@ -2693,7 +2517,7 @@
       </p:sp>
       <p:sp>
         <p:nvSpPr>
-          <p:cNvPr id="10" name="Shape 8"/>
+          <p:cNvPr id="9" name="Shape 7"/>
           <p:cNvSpPr/>
           <p:nvPr/>
         </p:nvSpPr>
@@ -2713,10 +2537,14 @@
             <a:prstDash val="solid"/>
           </a:ln>
         </p:spPr>
-      </p:sp>
-      <p:sp>
-        <p:nvSpPr>
-          <p:cNvPr id="11" name="Text 9"/>
+        <p:txBody>
+          <a:bodyPr/>
+          <a:p/>
+        </p:txBody>
+      </p:sp>
+      <p:sp>
+        <p:nvSpPr>
+          <p:cNvPr id="10" name="Text 8"/>
           <p:cNvSpPr/>
           <p:nvPr/>
         </p:nvSpPr>
@@ -2732,7 +2560,7 @@
           <a:ln/>
         </p:spPr>
         <p:txBody>
-          <a:bodyPr wrap="square" lIns="0" tIns="0" rIns="0" bIns="0" rtlCol="0" anchor="t"/>
+          <a:bodyPr wrap="none" lIns="0" tIns="0" rIns="0" bIns="0" rtlCol="0" anchor="t"/>
           <a:lstStyle/>
           <a:p>
             <a:pPr algn="l" indent="0" marL="0">
@@ -2758,7 +2586,7 @@
       </p:sp>
       <p:sp>
         <p:nvSpPr>
-          <p:cNvPr id="12" name="Shape 10"/>
+          <p:cNvPr id="11" name="Shape 9"/>
           <p:cNvSpPr/>
           <p:nvPr/>
         </p:nvSpPr>
@@ -2778,10 +2606,14 @@
             <a:prstDash val="solid"/>
           </a:ln>
         </p:spPr>
-      </p:sp>
-      <p:sp>
-        <p:nvSpPr>
-          <p:cNvPr id="13" name="Text 11"/>
+        <p:txBody>
+          <a:bodyPr/>
+          <a:p/>
+        </p:txBody>
+      </p:sp>
+      <p:sp>
+        <p:nvSpPr>
+          <p:cNvPr id="12" name="Text 10"/>
           <p:cNvSpPr/>
           <p:nvPr/>
         </p:nvSpPr>
@@ -2797,7 +2629,7 @@
           <a:ln/>
         </p:spPr>
         <p:txBody>
-          <a:bodyPr wrap="square" lIns="0" tIns="0" rIns="0" bIns="0" rtlCol="0" anchor="t"/>
+          <a:bodyPr wrap="none" lIns="0" tIns="0" rIns="0" bIns="0" rtlCol="0" anchor="t"/>
           <a:lstStyle/>
           <a:p>
             <a:pPr algn="l" indent="0" marL="0">
@@ -2823,7 +2655,7 @@
       </p:sp>
       <p:sp>
         <p:nvSpPr>
-          <p:cNvPr id="14" name="Text 12"/>
+          <p:cNvPr id="13" name="Text 11"/>
           <p:cNvSpPr/>
           <p:nvPr/>
         </p:nvSpPr>
@@ -2853,7 +2685,7 @@
       </p:sp>
       <p:sp>
         <p:nvSpPr>
-          <p:cNvPr id="15" name="Text 13"/>
+          <p:cNvPr id="14" name="Text 12"/>
           <p:cNvSpPr/>
           <p:nvPr/>
         </p:nvSpPr>
@@ -2895,92 +2727,7 @@
       </p:sp>
       <p:sp>
         <p:nvSpPr>
-          <p:cNvPr id="16" name="Text 14"/>
-          <p:cNvSpPr/>
-          <p:nvPr/>
-        </p:nvSpPr>
-        <p:spPr>
-          <a:xfrm>
-            <a:off x="6310322" y="2390577"/>
-            <a:ext cx="5188835" cy="2617589"/>
-          </a:xfrm>
-          <a:prstGeom prst="rect">
-            <a:avLst/>
-          </a:prstGeom>
-          <a:noFill/>
-          <a:ln/>
-        </p:spPr>
-        <p:txBody>
-          <a:bodyPr wrap="square" lIns="118519" tIns="0" rIns="0" bIns="0" rtlCol="0" anchor="t"/>
-          <a:lstStyle/>
-          <a:p>
-            <a:pPr algn="l" marL="118519" indent="-118519">
-              <a:lnSpc>
-                <a:spcPts val="2706"/>
-              </a:lnSpc>
-              <a:buSzPct val="100000"/>
-              <a:buChar char="•"/>
-            </a:pPr>
-            <a:r>
-              <a:rPr lang="en-US" sz="1866" dirty="0">
-                <a:solidFill>
-                  <a:srgbClr val="000000"/>
-                </a:solidFill>
-                <a:latin typeface="Geist" pitchFamily="34" charset="0"/>
-                <a:ea typeface="Geist" pitchFamily="34" charset="-122"/>
-                <a:cs typeface="Geist" pitchFamily="34" charset="-120"/>
-              </a:rPr>
-              <a:t>It has two positions and only two.</a:t>
-            </a:r>
-            <a:endParaRPr lang="en-US" sz="1866" dirty="0"/>
-          </a:p>
-          <a:p>
-            <a:pPr algn="l" marL="118519" indent="-118519">
-              <a:lnSpc>
-                <a:spcPts val="2706"/>
-              </a:lnSpc>
-              <a:buSzPct val="100000"/>
-              <a:buChar char="•"/>
-            </a:pPr>
-            <a:r>
-              <a:rPr lang="en-US" sz="1866" dirty="0">
-                <a:solidFill>
-                  <a:srgbClr val="000000"/>
-                </a:solidFill>
-                <a:latin typeface="Geist" pitchFamily="34" charset="0"/>
-                <a:ea typeface="Geist" pitchFamily="34" charset="-122"/>
-                <a:cs typeface="Geist" pitchFamily="34" charset="-120"/>
-              </a:rPr>
-              <a:t>Crossing it changes what ships next.</a:t>
-            </a:r>
-            <a:endParaRPr lang="en-US" sz="1866" dirty="0"/>
-          </a:p>
-          <a:p>
-            <a:pPr algn="l" marL="118519" indent="-118519">
-              <a:lnSpc>
-                <a:spcPts val="2706"/>
-              </a:lnSpc>
-              <a:buSzPct val="100000"/>
-              <a:buChar char="•"/>
-            </a:pPr>
-            <a:r>
-              <a:rPr lang="en-US" sz="1866" dirty="0">
-                <a:solidFill>
-                  <a:srgbClr val="000000"/>
-                </a:solidFill>
-                <a:latin typeface="Geist" pitchFamily="34" charset="0"/>
-                <a:ea typeface="Geist" pitchFamily="34" charset="-122"/>
-                <a:cs typeface="Geist" pitchFamily="34" charset="-120"/>
-              </a:rPr>
-              <a:t>No meeting is needed for it to fire.</a:t>
-            </a:r>
-            <a:endParaRPr lang="en-US" sz="1866" dirty="0"/>
-          </a:p>
-        </p:txBody>
-      </p:sp>
-      <p:sp>
-        <p:nvSpPr>
-          <p:cNvPr id="17" name="Shape 15"/>
+          <p:cNvPr id="15" name="Shape 13"/>
           <p:cNvSpPr/>
           <p:nvPr/>
         </p:nvSpPr>
@@ -3000,10 +2747,14 @@
             <a:prstDash val="solid"/>
           </a:ln>
         </p:spPr>
-      </p:sp>
-      <p:sp>
-        <p:nvSpPr>
-          <p:cNvPr id="18" name="Text 16"/>
+        <p:txBody>
+          <a:bodyPr/>
+          <a:p/>
+        </p:txBody>
+      </p:sp>
+      <p:sp>
+        <p:nvSpPr>
+          <p:cNvPr id="16" name="Text 14"/>
           <p:cNvSpPr/>
           <p:nvPr/>
         </p:nvSpPr>
@@ -3019,7 +2770,7 @@
           <a:ln/>
         </p:spPr>
         <p:txBody>
-          <a:bodyPr wrap="square" lIns="0" tIns="0" rIns="0" bIns="0" rtlCol="0" anchor="t"/>
+          <a:bodyPr wrap="none" lIns="0" tIns="0" rIns="0" bIns="0" rtlCol="0" anchor="t"/>
           <a:lstStyle/>
           <a:p>
             <a:pPr algn="l" indent="0" marL="0">
@@ -3045,7 +2796,7 @@
       </p:sp>
       <p:sp>
         <p:nvSpPr>
-          <p:cNvPr id="19" name="Shape 17"/>
+          <p:cNvPr id="17" name="Shape 15"/>
           <p:cNvSpPr/>
           <p:nvPr/>
         </p:nvSpPr>
@@ -3065,10 +2816,14 @@
             <a:prstDash val="solid"/>
           </a:ln>
         </p:spPr>
-      </p:sp>
-      <p:sp>
-        <p:nvSpPr>
-          <p:cNvPr id="20" name="Text 18"/>
+        <p:txBody>
+          <a:bodyPr/>
+          <a:p/>
+        </p:txBody>
+      </p:sp>
+      <p:sp>
+        <p:nvSpPr>
+          <p:cNvPr id="18" name="Text 16"/>
           <p:cNvSpPr/>
           <p:nvPr/>
         </p:nvSpPr>
@@ -3084,7 +2839,7 @@
           <a:ln/>
         </p:spPr>
         <p:txBody>
-          <a:bodyPr wrap="square" lIns="0" tIns="0" rIns="0" bIns="0" rtlCol="0" anchor="t"/>
+          <a:bodyPr wrap="none" lIns="0" tIns="0" rIns="0" bIns="0" rtlCol="0" anchor="t"/>
           <a:lstStyle/>
           <a:p>
             <a:pPr algn="l" indent="0" marL="0">
@@ -3110,7 +2865,7 @@
       </p:sp>
       <p:sp>
         <p:nvSpPr>
-          <p:cNvPr id="21" name="Shape 19"/>
+          <p:cNvPr id="19" name="Shape 17"/>
           <p:cNvSpPr/>
           <p:nvPr/>
         </p:nvSpPr>
@@ -3130,10 +2885,14 @@
             <a:prstDash val="solid"/>
           </a:ln>
         </p:spPr>
-      </p:sp>
-      <p:sp>
-        <p:nvSpPr>
-          <p:cNvPr id="22" name="Text 20"/>
+        <p:txBody>
+          <a:bodyPr/>
+          <a:p/>
+        </p:txBody>
+      </p:sp>
+      <p:sp>
+        <p:nvSpPr>
+          <p:cNvPr id="20" name="Text 18"/>
           <p:cNvSpPr/>
           <p:nvPr/>
         </p:nvSpPr>
@@ -3149,7 +2908,7 @@
           <a:ln/>
         </p:spPr>
         <p:txBody>
-          <a:bodyPr wrap="square" lIns="0" tIns="0" rIns="0" bIns="0" rtlCol="0" anchor="t"/>
+          <a:bodyPr wrap="none" lIns="0" tIns="0" rIns="0" bIns="0" rtlCol="0" anchor="t"/>
           <a:lstStyle/>
           <a:p>
             <a:pPr algn="l" indent="0" marL="0">
@@ -3175,7 +2934,7 @@
       </p:sp>
       <p:sp>
         <p:nvSpPr>
-          <p:cNvPr id="23" name="Shape 21"/>
+          <p:cNvPr id="21" name="Shape 19"/>
           <p:cNvSpPr/>
           <p:nvPr/>
         </p:nvSpPr>
@@ -3195,10 +2954,14 @@
             <a:prstDash val="solid"/>
           </a:ln>
         </p:spPr>
-      </p:sp>
-      <p:sp>
-        <p:nvSpPr>
-          <p:cNvPr id="24" name="Text 22"/>
+        <p:txBody>
+          <a:bodyPr/>
+          <a:p/>
+        </p:txBody>
+      </p:sp>
+      <p:sp>
+        <p:nvSpPr>
+          <p:cNvPr id="22" name="Text 20"/>
           <p:cNvSpPr/>
           <p:nvPr/>
         </p:nvSpPr>
@@ -3214,7 +2977,7 @@
           <a:ln/>
         </p:spPr>
         <p:txBody>
-          <a:bodyPr wrap="square" lIns="0" tIns="0" rIns="0" bIns="0" rtlCol="0" anchor="t"/>
+          <a:bodyPr wrap="none" lIns="0" tIns="0" rIns="0" bIns="0" rtlCol="0" anchor="t"/>
           <a:lstStyle/>
           <a:p>
             <a:pPr algn="l" indent="0" marL="0">
@@ -3240,7 +3003,7 @@
       </p:sp>
       <p:sp>
         <p:nvSpPr>
-          <p:cNvPr id="25" name="Text 23"/>
+          <p:cNvPr id="23" name="Text 21"/>
           <p:cNvSpPr/>
           <p:nvPr/>
         </p:nvSpPr>
@@ -3256,7 +3019,7 @@
           <a:ln/>
         </p:spPr>
         <p:txBody>
-          <a:bodyPr wrap="square" lIns="0" tIns="0" rIns="0" bIns="0" rtlCol="0" anchor="t"/>
+          <a:bodyPr wrap="none" lIns="0" tIns="0" rIns="0" bIns="0" rtlCol="0" anchor="t"/>
           <a:lstStyle/>
           <a:p>
             <a:pPr algn="l" indent="0" marL="0">
@@ -3282,7 +3045,7 @@
       </p:sp>
       <p:sp>
         <p:nvSpPr>
-          <p:cNvPr id="26" name="Text 24"/>
+          <p:cNvPr id="24" name="Text 22"/>
           <p:cNvSpPr/>
           <p:nvPr/>
         </p:nvSpPr>
@@ -3298,7 +3061,7 @@
           <a:ln/>
         </p:spPr>
         <p:txBody>
-          <a:bodyPr wrap="square" lIns="0" tIns="0" rIns="0" bIns="0" rtlCol="0" anchor="t"/>
+          <a:bodyPr wrap="none" lIns="0" tIns="0" rIns="0" bIns="0" rtlCol="0" anchor="t"/>
           <a:lstStyle/>
           <a:p>
             <a:pPr algn="l" indent="0" marL="0">
@@ -3372,7 +3135,7 @@
           <a:ln/>
         </p:spPr>
         <p:txBody>
-          <a:bodyPr wrap="square" lIns="0" tIns="0" rIns="0" bIns="0" rtlCol="0" anchor="t"/>
+          <a:bodyPr wrap="none" lIns="0" tIns="0" rIns="0" bIns="0" rtlCol="0" anchor="t"/>
           <a:lstStyle/>
           <a:p>
             <a:pPr algn="l" indent="0" marL="0">
@@ -3414,7 +3177,7 @@
           <a:ln/>
         </p:spPr>
         <p:txBody>
-          <a:bodyPr wrap="square" lIns="0" tIns="0" rIns="0" bIns="0" rtlCol="0" anchor="t"/>
+          <a:bodyPr wrap="none" lIns="0" tIns="0" rIns="0" bIns="0" rtlCol="0" anchor="t"/>
           <a:lstStyle/>
           <a:p>
             <a:pPr algn="l" indent="0" marL="0">
@@ -3456,7 +3219,7 @@
           <a:ln/>
         </p:spPr>
         <p:txBody>
-          <a:bodyPr wrap="square" lIns="0" tIns="0" rIns="0" bIns="0" rtlCol="0" anchor="t"/>
+          <a:bodyPr wrap="none" lIns="0" tIns="0" rIns="0" bIns="0" rtlCol="0" anchor="t"/>
           <a:lstStyle/>
           <a:p>
             <a:pPr algn="l" indent="0" marL="0">
@@ -3684,7 +3447,9 @@
           <a:ln/>
         </p:spPr>
         <p:txBody>
-          <a:bodyPr wrap="square" lIns="169312" tIns="67725" rIns="169312" bIns="169312" rtlCol="0" anchor="t"/>
+          <a:bodyPr wrap="square" lIns="169312" tIns="67725" rIns="169312" bIns="169312" rtlCol="0" anchor="t">
+            <a:normAutofit/>
+          </a:bodyPr>
           <a:lstStyle/>
           <a:p>
             <a:pPr algn="l" indent="0" marL="0">
@@ -3984,7 +3749,7 @@
           <a:ln/>
         </p:spPr>
         <p:txBody>
-          <a:bodyPr wrap="square" lIns="0" tIns="0" rIns="0" bIns="0" rtlCol="0" anchor="t"/>
+          <a:bodyPr wrap="none" lIns="0" tIns="0" rIns="0" bIns="0" rtlCol="0" anchor="t"/>
           <a:lstStyle/>
           <a:p>
             <a:pPr algn="l" indent="0" marL="0">
@@ -4029,7 +3794,9 @@
           <a:ln/>
         </p:spPr>
         <p:txBody>
-          <a:bodyPr wrap="square" lIns="0" tIns="0" rIns="0" bIns="0" rtlCol="0" anchor="t"/>
+          <a:bodyPr wrap="square" lIns="0" tIns="0" rIns="0" bIns="0" rtlCol="0" anchor="t">
+            <a:normAutofit/>
+          </a:bodyPr>
           <a:lstStyle/>
           <a:p>
             <a:pPr algn="l" indent="0" marL="0">
@@ -4071,7 +3838,7 @@
           <a:ln/>
         </p:spPr>
         <p:txBody>
-          <a:bodyPr wrap="square" lIns="0" tIns="0" rIns="0" bIns="0" rtlCol="0" anchor="t"/>
+          <a:bodyPr wrap="none" lIns="0" tIns="0" rIns="0" bIns="0" rtlCol="0" anchor="t"/>
           <a:lstStyle/>
           <a:p>
             <a:pPr algn="l" indent="0" marL="0">
@@ -4116,7 +3883,9 @@
           <a:ln/>
         </p:spPr>
         <p:txBody>
-          <a:bodyPr wrap="square" lIns="0" tIns="0" rIns="0" bIns="0" rtlCol="0" anchor="t"/>
+          <a:bodyPr wrap="square" lIns="0" tIns="0" rIns="0" bIns="0" rtlCol="0" anchor="t">
+            <a:normAutofit/>
+          </a:bodyPr>
           <a:lstStyle/>
           <a:p>
             <a:pPr algn="l" indent="0" marL="0">
@@ -4162,6 +3931,10 @@
             <a:prstDash val="solid"/>
           </a:ln>
         </p:spPr>
+        <p:txBody>
+          <a:bodyPr/>
+          <a:p/>
+        </p:txBody>
       </p:sp>
       <p:sp>
         <p:nvSpPr>
@@ -4181,7 +3954,7 @@
           <a:ln/>
         </p:spPr>
         <p:txBody>
-          <a:bodyPr wrap="square" lIns="0" tIns="0" rIns="0" bIns="0" rtlCol="0" anchor="t"/>
+          <a:bodyPr wrap="none" lIns="0" tIns="0" rIns="0" bIns="0" rtlCol="0" anchor="t"/>
           <a:lstStyle/>
           <a:p>
             <a:pPr algn="l" indent="0" marL="0">
@@ -4223,7 +3996,7 @@
           <a:ln/>
         </p:spPr>
         <p:txBody>
-          <a:bodyPr wrap="square" lIns="0" tIns="0" rIns="0" bIns="0" rtlCol="0" anchor="t"/>
+          <a:bodyPr wrap="none" lIns="0" tIns="0" rIns="0" bIns="0" rtlCol="0" anchor="t"/>
           <a:lstStyle/>
           <a:p>
             <a:pPr algn="l" indent="0" marL="0">
@@ -4265,7 +4038,7 @@
           <a:ln/>
         </p:spPr>
         <p:txBody>
-          <a:bodyPr wrap="square" lIns="0" tIns="0" rIns="0" bIns="0" rtlCol="0" anchor="t"/>
+          <a:bodyPr wrap="none" lIns="0" tIns="0" rIns="0" bIns="0" rtlCol="0" anchor="t"/>
           <a:lstStyle/>
           <a:p>
             <a:pPr algn="l" indent="0" marL="0">
@@ -4339,7 +4112,7 @@
           <a:ln/>
         </p:spPr>
         <p:txBody>
-          <a:bodyPr wrap="square" lIns="0" tIns="0" rIns="0" bIns="0" rtlCol="0" anchor="t"/>
+          <a:bodyPr wrap="none" lIns="0" tIns="0" rIns="0" bIns="0" rtlCol="0" anchor="t"/>
           <a:lstStyle/>
           <a:p>
             <a:pPr algn="l" indent="0" marL="0">
@@ -4381,7 +4154,7 @@
           <a:ln/>
         </p:spPr>
         <p:txBody>
-          <a:bodyPr wrap="square" lIns="0" tIns="0" rIns="0" bIns="0" rtlCol="0" anchor="t"/>
+          <a:bodyPr wrap="none" lIns="0" tIns="0" rIns="0" bIns="0" rtlCol="0" anchor="t"/>
           <a:lstStyle/>
           <a:p>
             <a:pPr algn="l" indent="0" marL="0">
@@ -4423,7 +4196,7 @@
           <a:ln/>
         </p:spPr>
         <p:txBody>
-          <a:bodyPr wrap="square" lIns="0" tIns="0" rIns="0" bIns="0" rtlCol="0" anchor="t"/>
+          <a:bodyPr wrap="none" lIns="0" tIns="0" rIns="0" bIns="0" rtlCol="0" anchor="t"/>
           <a:lstStyle/>
           <a:p>
             <a:pPr algn="l" indent="0" marL="0">
@@ -4561,6 +4334,10 @@
             <a:prstDash val="solid"/>
           </a:ln>
         </p:spPr>
+        <p:txBody>
+          <a:bodyPr/>
+          <a:p/>
+        </p:txBody>
       </p:sp>
       <p:sp>
         <p:nvSpPr>
@@ -4626,6 +4403,10 @@
             <a:prstDash val="solid"/>
           </a:ln>
         </p:spPr>
+        <p:txBody>
+          <a:bodyPr/>
+          <a:p/>
+        </p:txBody>
       </p:sp>
       <p:sp>
         <p:nvSpPr>
@@ -4691,6 +4472,10 @@
             <a:prstDash val="solid"/>
           </a:ln>
         </p:spPr>
+        <p:txBody>
+          <a:bodyPr/>
+          <a:p/>
+        </p:txBody>
       </p:sp>
       <p:sp>
         <p:nvSpPr>
@@ -4782,7 +4567,7 @@
           <a:ln/>
         </p:spPr>
         <p:txBody>
-          <a:bodyPr wrap="square" lIns="0" tIns="0" rIns="0" bIns="0" rtlCol="0" anchor="t"/>
+          <a:bodyPr wrap="none" lIns="0" tIns="0" rIns="0" bIns="0" rtlCol="0" anchor="t"/>
           <a:lstStyle/>
           <a:p>
             <a:pPr algn="l" indent="0" marL="0">
@@ -4828,6 +4613,10 @@
             <a:prstDash val="solid"/>
           </a:ln>
         </p:spPr>
+        <p:txBody>
+          <a:bodyPr/>
+          <a:p/>
+        </p:txBody>
       </p:sp>
       <p:sp>
         <p:nvSpPr>
@@ -4847,7 +4636,7 @@
           <a:ln/>
         </p:spPr>
         <p:txBody>
-          <a:bodyPr wrap="square" lIns="0" tIns="0" rIns="0" bIns="0" rtlCol="0" anchor="t"/>
+          <a:bodyPr wrap="none" lIns="0" tIns="0" rIns="0" bIns="0" rtlCol="0" anchor="t"/>
           <a:lstStyle/>
           <a:p>
             <a:pPr algn="l" indent="0" marL="0">
@@ -4893,6 +4682,10 @@
             <a:prstDash val="solid"/>
           </a:ln>
         </p:spPr>
+        <p:txBody>
+          <a:bodyPr/>
+          <a:p/>
+        </p:txBody>
       </p:sp>
       <p:sp>
         <p:nvSpPr>
@@ -4912,7 +4705,7 @@
           <a:ln/>
         </p:spPr>
         <p:txBody>
-          <a:bodyPr wrap="square" lIns="0" tIns="0" rIns="0" bIns="0" rtlCol="0" anchor="t"/>
+          <a:bodyPr wrap="none" lIns="0" tIns="0" rIns="0" bIns="0" rtlCol="0" anchor="t"/>
           <a:lstStyle/>
           <a:p>
             <a:pPr algn="l" indent="0" marL="0">
@@ -4958,6 +4751,10 @@
             <a:prstDash val="solid"/>
           </a:ln>
         </p:spPr>
+        <p:txBody>
+          <a:bodyPr/>
+          <a:p/>
+        </p:txBody>
       </p:sp>
       <p:sp>
         <p:nvSpPr>
@@ -4977,7 +4774,7 @@
           <a:ln/>
         </p:spPr>
         <p:txBody>
-          <a:bodyPr wrap="square" lIns="0" tIns="0" rIns="0" bIns="0" rtlCol="0" anchor="t"/>
+          <a:bodyPr wrap="none" lIns="0" tIns="0" rIns="0" bIns="0" rtlCol="0" anchor="t"/>
           <a:lstStyle/>
           <a:p>
             <a:pPr algn="l" indent="0" marL="0">
@@ -5023,6 +4820,10 @@
             <a:prstDash val="solid"/>
           </a:ln>
         </p:spPr>
+        <p:txBody>
+          <a:bodyPr/>
+          <a:p/>
+        </p:txBody>
       </p:sp>
       <p:sp>
         <p:nvSpPr>
@@ -5042,7 +4843,7 @@
           <a:ln/>
         </p:spPr>
         <p:txBody>
-          <a:bodyPr wrap="square" lIns="0" tIns="0" rIns="0" bIns="0" rtlCol="0" anchor="t"/>
+          <a:bodyPr wrap="none" lIns="0" tIns="0" rIns="0" bIns="0" rtlCol="0" anchor="t"/>
           <a:lstStyle/>
           <a:p>
             <a:pPr algn="l" indent="0" marL="0">
@@ -5088,6 +4889,10 @@
             <a:prstDash val="solid"/>
           </a:ln>
         </p:spPr>
+        <p:txBody>
+          <a:bodyPr/>
+          <a:p/>
+        </p:txBody>
       </p:sp>
       <p:sp>
         <p:nvSpPr>
@@ -5107,7 +4912,7 @@
           <a:ln/>
         </p:spPr>
         <p:txBody>
-          <a:bodyPr wrap="square" lIns="0" tIns="0" rIns="0" bIns="0" rtlCol="0" anchor="t"/>
+          <a:bodyPr wrap="none" lIns="0" tIns="0" rIns="0" bIns="0" rtlCol="0" anchor="t"/>
           <a:lstStyle/>
           <a:p>
             <a:pPr algn="l" indent="0" marL="0">
@@ -5153,6 +4958,10 @@
             <a:prstDash val="solid"/>
           </a:ln>
         </p:spPr>
+        <p:txBody>
+          <a:bodyPr/>
+          <a:p/>
+        </p:txBody>
       </p:sp>
       <p:sp>
         <p:nvSpPr>
@@ -5172,7 +4981,7 @@
           <a:ln/>
         </p:spPr>
         <p:txBody>
-          <a:bodyPr wrap="square" lIns="0" tIns="0" rIns="0" bIns="0" rtlCol="0" anchor="t"/>
+          <a:bodyPr wrap="none" lIns="0" tIns="0" rIns="0" bIns="0" rtlCol="0" anchor="t"/>
           <a:lstStyle/>
           <a:p>
             <a:pPr algn="l" indent="0" marL="0">
@@ -5218,6 +5027,10 @@
             <a:prstDash val="solid"/>
           </a:ln>
         </p:spPr>
+        <p:txBody>
+          <a:bodyPr/>
+          <a:p/>
+        </p:txBody>
       </p:sp>
       <p:sp>
         <p:nvSpPr>
@@ -5237,7 +5050,7 @@
           <a:ln/>
         </p:spPr>
         <p:txBody>
-          <a:bodyPr wrap="square" lIns="0" tIns="0" rIns="0" bIns="0" rtlCol="0" anchor="t"/>
+          <a:bodyPr wrap="none" lIns="0" tIns="0" rIns="0" bIns="0" rtlCol="0" anchor="t"/>
           <a:lstStyle/>
           <a:p>
             <a:pPr algn="l" indent="0" marL="0">
@@ -5283,6 +5096,10 @@
             <a:prstDash val="solid"/>
           </a:ln>
         </p:spPr>
+        <p:txBody>
+          <a:bodyPr/>
+          <a:p/>
+        </p:txBody>
       </p:sp>
       <p:sp>
         <p:nvSpPr>
@@ -5302,7 +5119,7 @@
           <a:ln/>
         </p:spPr>
         <p:txBody>
-          <a:bodyPr wrap="square" lIns="0" tIns="0" rIns="0" bIns="0" rtlCol="0" anchor="t"/>
+          <a:bodyPr wrap="none" lIns="0" tIns="0" rIns="0" bIns="0" rtlCol="0" anchor="t"/>
           <a:lstStyle/>
           <a:p>
             <a:pPr algn="l" indent="0" marL="0">
@@ -5348,6 +5165,10 @@
             <a:prstDash val="solid"/>
           </a:ln>
         </p:spPr>
+        <p:txBody>
+          <a:bodyPr/>
+          <a:p/>
+        </p:txBody>
       </p:sp>
       <p:sp>
         <p:nvSpPr>
@@ -5367,7 +5188,7 @@
           <a:ln/>
         </p:spPr>
         <p:txBody>
-          <a:bodyPr wrap="square" lIns="0" tIns="0" rIns="0" bIns="0" rtlCol="0" anchor="t"/>
+          <a:bodyPr wrap="none" lIns="0" tIns="0" rIns="0" bIns="0" rtlCol="0" anchor="t"/>
           <a:lstStyle/>
           <a:p>
             <a:pPr algn="l" indent="0" marL="0">
@@ -5413,6 +5234,10 @@
             <a:prstDash val="solid"/>
           </a:ln>
         </p:spPr>
+        <p:txBody>
+          <a:bodyPr/>
+          <a:p/>
+        </p:txBody>
       </p:sp>
       <p:sp>
         <p:nvSpPr>
@@ -5432,7 +5257,7 @@
           <a:ln/>
         </p:spPr>
         <p:txBody>
-          <a:bodyPr wrap="square" lIns="0" tIns="0" rIns="0" bIns="0" rtlCol="0" anchor="t"/>
+          <a:bodyPr wrap="none" lIns="0" tIns="0" rIns="0" bIns="0" rtlCol="0" anchor="t"/>
           <a:lstStyle/>
           <a:p>
             <a:pPr algn="l" indent="0" marL="0">
@@ -5478,6 +5303,10 @@
             <a:prstDash val="solid"/>
           </a:ln>
         </p:spPr>
+        <p:txBody>
+          <a:bodyPr/>
+          <a:p/>
+        </p:txBody>
       </p:sp>
       <p:sp>
         <p:nvSpPr>
@@ -5497,7 +5326,7 @@
           <a:ln/>
         </p:spPr>
         <p:txBody>
-          <a:bodyPr wrap="square" lIns="0" tIns="0" rIns="0" bIns="0" rtlCol="0" anchor="t"/>
+          <a:bodyPr wrap="none" lIns="0" tIns="0" rIns="0" bIns="0" rtlCol="0" anchor="t"/>
           <a:lstStyle/>
           <a:p>
             <a:pPr algn="l" indent="0" marL="0">
@@ -5543,6 +5372,10 @@
             <a:prstDash val="solid"/>
           </a:ln>
         </p:spPr>
+        <p:txBody>
+          <a:bodyPr/>
+          <a:p/>
+        </p:txBody>
       </p:sp>
       <p:sp>
         <p:nvSpPr>
@@ -5562,7 +5395,7 @@
           <a:ln/>
         </p:spPr>
         <p:txBody>
-          <a:bodyPr wrap="square" lIns="0" tIns="0" rIns="0" bIns="0" rtlCol="0" anchor="t"/>
+          <a:bodyPr wrap="none" lIns="0" tIns="0" rIns="0" bIns="0" rtlCol="0" anchor="t"/>
           <a:lstStyle/>
           <a:p>
             <a:pPr algn="l" indent="0" marL="0">
@@ -5604,7 +5437,7 @@
           <a:ln/>
         </p:spPr>
         <p:txBody>
-          <a:bodyPr wrap="square" lIns="0" tIns="0" rIns="0" bIns="0" rtlCol="0" anchor="t"/>
+          <a:bodyPr wrap="none" lIns="0" tIns="0" rIns="0" bIns="0" rtlCol="0" anchor="t"/>
           <a:lstStyle/>
           <a:p>
             <a:pPr algn="l" indent="0" marL="0">
@@ -5646,7 +5479,7 @@
           <a:ln/>
         </p:spPr>
         <p:txBody>
-          <a:bodyPr wrap="square" lIns="0" tIns="0" rIns="0" bIns="0" rtlCol="0" anchor="t"/>
+          <a:bodyPr wrap="none" lIns="0" tIns="0" rIns="0" bIns="0" rtlCol="0" anchor="t"/>
           <a:lstStyle/>
           <a:p>
             <a:pPr algn="l" indent="0" marL="0">
@@ -5720,7 +5553,7 @@
           <a:ln/>
         </p:spPr>
         <p:txBody>
-          <a:bodyPr wrap="square" lIns="0" tIns="0" rIns="0" bIns="0" rtlCol="0" anchor="t"/>
+          <a:bodyPr wrap="none" lIns="0" tIns="0" rIns="0" bIns="0" rtlCol="0" anchor="t"/>
           <a:lstStyle/>
           <a:p>
             <a:pPr algn="l" indent="0" marL="0">
@@ -5762,7 +5595,7 @@
           <a:ln/>
         </p:spPr>
         <p:txBody>
-          <a:bodyPr wrap="square" lIns="0" tIns="0" rIns="0" bIns="0" rtlCol="0" anchor="t"/>
+          <a:bodyPr wrap="none" lIns="0" tIns="0" rIns="0" bIns="0" rtlCol="0" anchor="t"/>
           <a:lstStyle/>
           <a:p>
             <a:pPr algn="l" indent="0" marL="0">
@@ -5804,7 +5637,7 @@
           <a:ln/>
         </p:spPr>
         <p:txBody>
-          <a:bodyPr wrap="square" lIns="0" tIns="0" rIns="0" bIns="0" rtlCol="0" anchor="t"/>
+          <a:bodyPr wrap="none" lIns="0" tIns="0" rIns="0" bIns="0" rtlCol="0" anchor="t"/>
           <a:lstStyle/>
           <a:p>
             <a:pPr algn="l" indent="0" marL="0">
@@ -5876,7 +5709,7 @@
           <a:ln/>
         </p:spPr>
         <p:txBody>
-          <a:bodyPr wrap="square" lIns="0" tIns="0" rIns="0" bIns="0" rtlCol="0" anchor="t"/>
+          <a:bodyPr wrap="none" lIns="0" tIns="0" rIns="0" bIns="0" rtlCol="0" anchor="t"/>
           <a:lstStyle/>
           <a:p>
             <a:pPr algn="l" indent="0" marL="0">
@@ -5921,7 +5754,7 @@
           <a:ln/>
         </p:spPr>
         <p:txBody>
-          <a:bodyPr wrap="square" lIns="0" tIns="0" rIns="0" bIns="0" rtlCol="0" anchor="t"/>
+          <a:bodyPr wrap="none" lIns="0" tIns="0" rIns="0" bIns="0" rtlCol="0" anchor="t"/>
           <a:lstStyle/>
           <a:p>
             <a:pPr algn="l" indent="0" marL="0">
@@ -5963,7 +5796,7 @@
           <a:ln/>
         </p:spPr>
         <p:txBody>
-          <a:bodyPr wrap="square" lIns="0" tIns="0" rIns="0" bIns="0" rtlCol="0" anchor="t"/>
+          <a:bodyPr wrap="none" lIns="0" tIns="0" rIns="0" bIns="0" rtlCol="0" anchor="t"/>
           <a:lstStyle/>
           <a:p>
             <a:pPr algn="l" indent="0" marL="0">
@@ -6012,6 +5845,10 @@
             <a:prstDash val="solid"/>
           </a:ln>
         </p:spPr>
+        <p:txBody>
+          <a:bodyPr/>
+          <a:p/>
+        </p:txBody>
       </p:sp>
       <p:sp>
         <p:nvSpPr>
@@ -6031,7 +5868,9 @@
           <a:ln/>
         </p:spPr>
         <p:txBody>
-          <a:bodyPr wrap="square" lIns="0" tIns="0" rIns="0" bIns="0" rtlCol="0" anchor="t"/>
+          <a:bodyPr wrap="square" lIns="0" tIns="0" rIns="0" bIns="0" rtlCol="0" anchor="t">
+            <a:normAutofit/>
+          </a:bodyPr>
           <a:lstStyle/>
           <a:p>
             <a:pPr algn="l" indent="0" marL="0">
@@ -6073,7 +5912,7 @@
           <a:ln/>
         </p:spPr>
         <p:txBody>
-          <a:bodyPr wrap="square" lIns="0" tIns="0" rIns="0" bIns="0" rtlCol="0" anchor="t"/>
+          <a:bodyPr wrap="none" lIns="0" tIns="0" rIns="0" bIns="0" rtlCol="0" anchor="t"/>
           <a:lstStyle/>
           <a:p>
             <a:pPr algn="l" indent="0" marL="0">
@@ -6115,7 +5954,7 @@
           <a:ln/>
         </p:spPr>
         <p:txBody>
-          <a:bodyPr wrap="square" lIns="0" tIns="0" rIns="0" bIns="0" rtlCol="0" anchor="t"/>
+          <a:bodyPr wrap="none" lIns="0" tIns="0" rIns="0" bIns="0" rtlCol="0" anchor="t"/>
           <a:lstStyle/>
           <a:p>
             <a:pPr algn="l" indent="0" marL="0">
@@ -6164,6 +6003,10 @@
             <a:prstDash val="solid"/>
           </a:ln>
         </p:spPr>
+        <p:txBody>
+          <a:bodyPr/>
+          <a:p/>
+        </p:txBody>
       </p:sp>
       <p:sp>
         <p:nvSpPr>
@@ -6183,7 +6026,9 @@
           <a:ln/>
         </p:spPr>
         <p:txBody>
-          <a:bodyPr wrap="square" lIns="0" tIns="0" rIns="0" bIns="0" rtlCol="0" anchor="t"/>
+          <a:bodyPr wrap="square" lIns="0" tIns="0" rIns="0" bIns="0" rtlCol="0" anchor="t">
+            <a:normAutofit/>
+          </a:bodyPr>
           <a:lstStyle/>
           <a:p>
             <a:pPr algn="l" indent="0" marL="0">
@@ -6225,7 +6070,7 @@
           <a:ln/>
         </p:spPr>
         <p:txBody>
-          <a:bodyPr wrap="square" lIns="0" tIns="0" rIns="0" bIns="0" rtlCol="0" anchor="t"/>
+          <a:bodyPr wrap="none" lIns="0" tIns="0" rIns="0" bIns="0" rtlCol="0" anchor="t"/>
           <a:lstStyle/>
           <a:p>
             <a:pPr algn="l" indent="0" marL="0">
@@ -6267,7 +6112,7 @@
           <a:ln/>
         </p:spPr>
         <p:txBody>
-          <a:bodyPr wrap="square" lIns="0" tIns="0" rIns="0" bIns="0" rtlCol="0" anchor="t"/>
+          <a:bodyPr wrap="none" lIns="0" tIns="0" rIns="0" bIns="0" rtlCol="0" anchor="t"/>
           <a:lstStyle/>
           <a:p>
             <a:pPr algn="l" indent="0" marL="0">
@@ -6316,6 +6161,10 @@
             <a:prstDash val="solid"/>
           </a:ln>
         </p:spPr>
+        <p:txBody>
+          <a:bodyPr/>
+          <a:p/>
+        </p:txBody>
       </p:sp>
       <p:sp>
         <p:nvSpPr>
@@ -6335,7 +6184,9 @@
           <a:ln/>
         </p:spPr>
         <p:txBody>
-          <a:bodyPr wrap="square" lIns="0" tIns="0" rIns="0" bIns="0" rtlCol="0" anchor="t"/>
+          <a:bodyPr wrap="square" lIns="0" tIns="0" rIns="0" bIns="0" rtlCol="0" anchor="t">
+            <a:normAutofit/>
+          </a:bodyPr>
           <a:lstStyle/>
           <a:p>
             <a:pPr algn="l" indent="0" marL="0">
@@ -6381,6 +6232,10 @@
             <a:prstDash val="solid"/>
           </a:ln>
         </p:spPr>
+        <p:txBody>
+          <a:bodyPr/>
+          <a:p/>
+        </p:txBody>
       </p:sp>
       <p:sp>
         <p:nvSpPr>
@@ -6400,7 +6255,7 @@
           <a:ln/>
         </p:spPr>
         <p:txBody>
-          <a:bodyPr wrap="square" lIns="0" tIns="0" rIns="0" bIns="0" rtlCol="0" anchor="t"/>
+          <a:bodyPr wrap="none" lIns="0" tIns="0" rIns="0" bIns="0" rtlCol="0" anchor="t"/>
           <a:lstStyle/>
           <a:p>
             <a:pPr algn="l" indent="0" marL="0">
@@ -6442,7 +6297,7 @@
           <a:ln/>
         </p:spPr>
         <p:txBody>
-          <a:bodyPr wrap="square" lIns="0" tIns="0" rIns="0" bIns="0" rtlCol="0" anchor="t"/>
+          <a:bodyPr wrap="none" lIns="0" tIns="0" rIns="0" bIns="0" rtlCol="0" anchor="t"/>
           <a:lstStyle/>
           <a:p>
             <a:pPr algn="l" indent="0" marL="0">
@@ -6484,7 +6339,7 @@
           <a:ln/>
         </p:spPr>
         <p:txBody>
-          <a:bodyPr wrap="square" lIns="0" tIns="0" rIns="0" bIns="0" rtlCol="0" anchor="t"/>
+          <a:bodyPr wrap="none" lIns="0" tIns="0" rIns="0" bIns="0" rtlCol="0" anchor="t"/>
           <a:lstStyle/>
           <a:p>
             <a:pPr algn="l" indent="0" marL="0">
@@ -6558,7 +6413,7 @@
           <a:ln/>
         </p:spPr>
         <p:txBody>
-          <a:bodyPr wrap="square" lIns="0" tIns="0" rIns="0" bIns="0" rtlCol="0" anchor="t"/>
+          <a:bodyPr wrap="none" lIns="0" tIns="0" rIns="0" bIns="0" rtlCol="0" anchor="t"/>
           <a:lstStyle/>
           <a:p>
             <a:pPr algn="l" indent="0" marL="0">
@@ -6600,7 +6455,7 @@
           <a:ln/>
         </p:spPr>
         <p:txBody>
-          <a:bodyPr wrap="square" lIns="0" tIns="0" rIns="0" bIns="0" rtlCol="0" anchor="t"/>
+          <a:bodyPr wrap="none" lIns="0" tIns="0" rIns="0" bIns="0" rtlCol="0" anchor="t"/>
           <a:lstStyle/>
           <a:p>
             <a:pPr algn="l" indent="0" marL="0">
@@ -6642,7 +6497,7 @@
           <a:ln/>
         </p:spPr>
         <p:txBody>
-          <a:bodyPr wrap="square" lIns="0" tIns="0" rIns="0" bIns="0" rtlCol="0" anchor="t"/>
+          <a:bodyPr wrap="none" lIns="0" tIns="0" rIns="0" bIns="0" rtlCol="0" anchor="t"/>
           <a:lstStyle/>
           <a:p>
             <a:pPr algn="l" indent="0" marL="0">
@@ -6714,7 +6569,7 @@
           <a:ln/>
         </p:spPr>
         <p:txBody>
-          <a:bodyPr wrap="square" lIns="0" tIns="0" rIns="0" bIns="0" rtlCol="0" anchor="t"/>
+          <a:bodyPr wrap="none" lIns="0" tIns="0" rIns="0" bIns="0" rtlCol="0" anchor="t"/>
           <a:lstStyle/>
           <a:p>
             <a:pPr algn="l" indent="0" marL="0">
@@ -6756,7 +6611,7 @@
           <a:ln/>
         </p:spPr>
         <p:txBody>
-          <a:bodyPr wrap="square" lIns="0" tIns="0" rIns="0" bIns="0" rtlCol="0" anchor="t"/>
+          <a:bodyPr wrap="none" lIns="0" tIns="0" rIns="0" bIns="0" rtlCol="0" anchor="t"/>
           <a:lstStyle/>
           <a:p>
             <a:pPr algn="l" indent="0" marL="0">
@@ -6798,7 +6653,7 @@
           <a:ln/>
         </p:spPr>
         <p:txBody>
-          <a:bodyPr wrap="square" lIns="0" tIns="0" rIns="0" bIns="0" rtlCol="0" anchor="t"/>
+          <a:bodyPr wrap="none" lIns="0" tIns="0" rIns="0" bIns="0" rtlCol="0" anchor="t"/>
           <a:lstStyle/>
           <a:p>
             <a:pPr algn="l" indent="0" marL="0">
@@ -6843,7 +6698,7 @@
           <a:ln/>
         </p:spPr>
         <p:txBody>
-          <a:bodyPr wrap="square" lIns="0" tIns="0" rIns="0" bIns="0" rtlCol="0" anchor="t"/>
+          <a:bodyPr wrap="none" lIns="0" tIns="0" rIns="0" bIns="0" rtlCol="0" anchor="t"/>
           <a:lstStyle/>
           <a:p>
             <a:pPr algn="l" indent="0" marL="0">
@@ -6885,7 +6740,7 @@
           <a:ln/>
         </p:spPr>
         <p:txBody>
-          <a:bodyPr wrap="square" lIns="0" tIns="0" rIns="0" bIns="0" rtlCol="0" anchor="t"/>
+          <a:bodyPr wrap="none" lIns="0" tIns="0" rIns="0" bIns="0" rtlCol="0" anchor="t"/>
           <a:lstStyle/>
           <a:p>
             <a:pPr algn="l" indent="0" marL="0">
@@ -6927,7 +6782,7 @@
           <a:ln/>
         </p:spPr>
         <p:txBody>
-          <a:bodyPr wrap="square" lIns="0" tIns="0" rIns="0" bIns="0" rtlCol="0" anchor="t"/>
+          <a:bodyPr wrap="none" lIns="0" tIns="0" rIns="0" bIns="0" rtlCol="0" anchor="t"/>
           <a:lstStyle/>
           <a:p>
             <a:pPr algn="l" indent="0" marL="0">
@@ -6972,7 +6827,7 @@
           <a:ln/>
         </p:spPr>
         <p:txBody>
-          <a:bodyPr wrap="square" lIns="0" tIns="0" rIns="0" bIns="0" rtlCol="0" anchor="t"/>
+          <a:bodyPr wrap="none" lIns="0" tIns="0" rIns="0" bIns="0" rtlCol="0" anchor="t"/>
           <a:lstStyle/>
           <a:p>
             <a:pPr algn="l" indent="0" marL="0">
@@ -7014,7 +6869,7 @@
           <a:ln/>
         </p:spPr>
         <p:txBody>
-          <a:bodyPr wrap="square" lIns="0" tIns="0" rIns="0" bIns="0" rtlCol="0" anchor="t"/>
+          <a:bodyPr wrap="none" lIns="0" tIns="0" rIns="0" bIns="0" rtlCol="0" anchor="t"/>
           <a:lstStyle/>
           <a:p>
             <a:pPr algn="l" indent="0" marL="0">
@@ -7056,7 +6911,7 @@
           <a:ln/>
         </p:spPr>
         <p:txBody>
-          <a:bodyPr wrap="square" lIns="0" tIns="0" rIns="0" bIns="0" rtlCol="0" anchor="t"/>
+          <a:bodyPr wrap="none" lIns="0" tIns="0" rIns="0" bIns="0" rtlCol="0" anchor="t"/>
           <a:lstStyle/>
           <a:p>
             <a:pPr algn="l" indent="0" marL="0">
@@ -7105,6 +6960,10 @@
             <a:prstDash val="solid"/>
           </a:ln>
         </p:spPr>
+        <p:txBody>
+          <a:bodyPr/>
+          <a:p/>
+        </p:txBody>
       </p:sp>
       <p:sp>
         <p:nvSpPr>
@@ -7124,7 +6983,7 @@
           <a:ln/>
         </p:spPr>
         <p:txBody>
-          <a:bodyPr wrap="square" lIns="0" tIns="0" rIns="0" bIns="0" rtlCol="0" anchor="t"/>
+          <a:bodyPr wrap="none" lIns="0" tIns="0" rIns="0" bIns="0" rtlCol="0" anchor="t"/>
           <a:lstStyle/>
           <a:p>
             <a:pPr algn="l" indent="0" marL="0">
@@ -7166,7 +7025,7 @@
           <a:ln/>
         </p:spPr>
         <p:txBody>
-          <a:bodyPr wrap="square" lIns="0" tIns="0" rIns="0" bIns="0" rtlCol="0" anchor="t"/>
+          <a:bodyPr wrap="none" lIns="0" tIns="0" rIns="0" bIns="0" rtlCol="0" anchor="t"/>
           <a:lstStyle/>
           <a:p>
             <a:pPr algn="l" indent="0" marL="0">
@@ -7208,7 +7067,7 @@
           <a:ln/>
         </p:spPr>
         <p:txBody>
-          <a:bodyPr wrap="square" lIns="0" tIns="0" rIns="0" bIns="0" rtlCol="0" anchor="t"/>
+          <a:bodyPr wrap="none" lIns="0" tIns="0" rIns="0" bIns="0" rtlCol="0" anchor="t"/>
           <a:lstStyle/>
           <a:p>
             <a:pPr algn="l" indent="0" marL="0">

--- a/decks/slo/slo.pptx
+++ b/decks/slo/slo.pptx
@@ -1494,9 +1494,7 @@
           <a:ln/>
         </p:spPr>
         <p:txBody>
-          <a:bodyPr wrap="square" lIns="0" tIns="0" rIns="0" bIns="0" rtlCol="0" anchor="t">
-            <a:normAutofit/>
-          </a:bodyPr>
+          <a:bodyPr wrap="none" lIns="0" tIns="0" rIns="0" bIns="0" rtlCol="0" anchor="t"/>
           <a:lstStyle/>
           <a:p>
             <a:pPr algn="l" indent="0" marL="0">
@@ -2350,7 +2348,9 @@
           <a:ln/>
         </p:spPr>
         <p:txBody>
-          <a:bodyPr wrap="none" lIns="0" tIns="0" rIns="0" bIns="0" rtlCol="0" anchor="t"/>
+          <a:bodyPr wrap="square" lIns="0" tIns="0" rIns="0" bIns="0" rtlCol="0" anchor="t">
+            <a:normAutofit/>
+          </a:bodyPr>
           <a:lstStyle/>
           <a:p>
             <a:pPr algn="l" indent="0" marL="0">
@@ -2839,7 +2839,9 @@
           <a:ln/>
         </p:spPr>
         <p:txBody>
-          <a:bodyPr wrap="none" lIns="0" tIns="0" rIns="0" bIns="0" rtlCol="0" anchor="t"/>
+          <a:bodyPr wrap="square" lIns="0" tIns="0" rIns="0" bIns="0" rtlCol="0" anchor="t">
+            <a:normAutofit/>
+          </a:bodyPr>
           <a:lstStyle/>
           <a:p>
             <a:pPr algn="l" indent="0" marL="0">
@@ -2908,7 +2910,9 @@
           <a:ln/>
         </p:spPr>
         <p:txBody>
-          <a:bodyPr wrap="none" lIns="0" tIns="0" rIns="0" bIns="0" rtlCol="0" anchor="t"/>
+          <a:bodyPr wrap="square" lIns="0" tIns="0" rIns="0" bIns="0" rtlCol="0" anchor="t">
+            <a:normAutofit/>
+          </a:bodyPr>
           <a:lstStyle/>
           <a:p>
             <a:pPr algn="l" indent="0" marL="0">
@@ -2977,7 +2981,9 @@
           <a:ln/>
         </p:spPr>
         <p:txBody>
-          <a:bodyPr wrap="none" lIns="0" tIns="0" rIns="0" bIns="0" rtlCol="0" anchor="t"/>
+          <a:bodyPr wrap="square" lIns="0" tIns="0" rIns="0" bIns="0" rtlCol="0" anchor="t">
+            <a:normAutofit/>
+          </a:bodyPr>
           <a:lstStyle/>
           <a:p>
             <a:pPr algn="l" indent="0" marL="0">
@@ -3219,7 +3225,9 @@
           <a:ln/>
         </p:spPr>
         <p:txBody>
-          <a:bodyPr wrap="none" lIns="0" tIns="0" rIns="0" bIns="0" rtlCol="0" anchor="t"/>
+          <a:bodyPr wrap="square" lIns="0" tIns="0" rIns="0" bIns="0" rtlCol="0" anchor="t">
+            <a:normAutofit/>
+          </a:bodyPr>
           <a:lstStyle/>
           <a:p>
             <a:pPr algn="l" indent="0" marL="0">
@@ -4196,7 +4204,9 @@
           <a:ln/>
         </p:spPr>
         <p:txBody>
-          <a:bodyPr wrap="none" lIns="0" tIns="0" rIns="0" bIns="0" rtlCol="0" anchor="t"/>
+          <a:bodyPr wrap="square" lIns="0" tIns="0" rIns="0" bIns="0" rtlCol="0" anchor="t">
+            <a:normAutofit/>
+          </a:bodyPr>
           <a:lstStyle/>
           <a:p>
             <a:pPr algn="l" indent="0" marL="0">
@@ -4912,7 +4922,9 @@
           <a:ln/>
         </p:spPr>
         <p:txBody>
-          <a:bodyPr wrap="none" lIns="0" tIns="0" rIns="0" bIns="0" rtlCol="0" anchor="t"/>
+          <a:bodyPr wrap="square" lIns="0" tIns="0" rIns="0" bIns="0" rtlCol="0" anchor="t">
+            <a:normAutofit/>
+          </a:bodyPr>
           <a:lstStyle/>
           <a:p>
             <a:pPr algn="l" indent="0" marL="0">
@@ -5395,7 +5407,9 @@
           <a:ln/>
         </p:spPr>
         <p:txBody>
-          <a:bodyPr wrap="none" lIns="0" tIns="0" rIns="0" bIns="0" rtlCol="0" anchor="t"/>
+          <a:bodyPr wrap="square" lIns="0" tIns="0" rIns="0" bIns="0" rtlCol="0" anchor="t">
+            <a:normAutofit/>
+          </a:bodyPr>
           <a:lstStyle/>
           <a:p>
             <a:pPr algn="l" indent="0" marL="0">
@@ -5709,7 +5723,9 @@
           <a:ln/>
         </p:spPr>
         <p:txBody>
-          <a:bodyPr wrap="none" lIns="0" tIns="0" rIns="0" bIns="0" rtlCol="0" anchor="t"/>
+          <a:bodyPr wrap="square" lIns="0" tIns="0" rIns="0" bIns="0" rtlCol="0" anchor="t">
+            <a:normAutofit/>
+          </a:bodyPr>
           <a:lstStyle/>
           <a:p>
             <a:pPr algn="l" indent="0" marL="0">
@@ -6255,7 +6271,9 @@
           <a:ln/>
         </p:spPr>
         <p:txBody>
-          <a:bodyPr wrap="none" lIns="0" tIns="0" rIns="0" bIns="0" rtlCol="0" anchor="t"/>
+          <a:bodyPr wrap="square" lIns="0" tIns="0" rIns="0" bIns="0" rtlCol="0" anchor="t">
+            <a:normAutofit/>
+          </a:bodyPr>
           <a:lstStyle/>
           <a:p>
             <a:pPr algn="l" indent="0" marL="0">
@@ -6653,7 +6671,9 @@
           <a:ln/>
         </p:spPr>
         <p:txBody>
-          <a:bodyPr wrap="none" lIns="0" tIns="0" rIns="0" bIns="0" rtlCol="0" anchor="t"/>
+          <a:bodyPr wrap="square" lIns="0" tIns="0" rIns="0" bIns="0" rtlCol="0" anchor="t">
+            <a:normAutofit/>
+          </a:bodyPr>
           <a:lstStyle/>
           <a:p>
             <a:pPr algn="l" indent="0" marL="0">
@@ -6782,7 +6802,9 @@
           <a:ln/>
         </p:spPr>
         <p:txBody>
-          <a:bodyPr wrap="none" lIns="0" tIns="0" rIns="0" bIns="0" rtlCol="0" anchor="t"/>
+          <a:bodyPr wrap="square" lIns="0" tIns="0" rIns="0" bIns="0" rtlCol="0" anchor="t">
+            <a:normAutofit/>
+          </a:bodyPr>
           <a:lstStyle/>
           <a:p>
             <a:pPr algn="l" indent="0" marL="0">
@@ -6911,7 +6933,9 @@
           <a:ln/>
         </p:spPr>
         <p:txBody>
-          <a:bodyPr wrap="none" lIns="0" tIns="0" rIns="0" bIns="0" rtlCol="0" anchor="t"/>
+          <a:bodyPr wrap="square" lIns="0" tIns="0" rIns="0" bIns="0" rtlCol="0" anchor="t">
+            <a:normAutofit/>
+          </a:bodyPr>
           <a:lstStyle/>
           <a:p>
             <a:pPr algn="l" indent="0" marL="0">
@@ -6983,7 +7007,9 @@
           <a:ln/>
         </p:spPr>
         <p:txBody>
-          <a:bodyPr wrap="none" lIns="0" tIns="0" rIns="0" bIns="0" rtlCol="0" anchor="t"/>
+          <a:bodyPr wrap="square" lIns="0" tIns="0" rIns="0" bIns="0" rtlCol="0" anchor="t">
+            <a:normAutofit/>
+          </a:bodyPr>
           <a:lstStyle/>
           <a:p>
             <a:pPr algn="l" indent="0" marL="0">
